--- a/slides/modules/m14-securing-apps-keycloak.pptx
+++ b/slides/modules/m14-securing-apps-keycloak.pptx
@@ -14,6 +14,11 @@
     <p:sldId id="262" r:id="rId14"/>
     <p:sldId id="263" r:id="rId15"/>
     <p:sldId id="264" r:id="rId16"/>
+    <p:sldId id="265" r:id="rId17"/>
+    <p:sldId id="266" r:id="rId18"/>
+    <p:sldId id="267" r:id="rId19"/>
+    <p:sldId id="268" r:id="rId20"/>
+    <p:sldId id="269" r:id="rId21"/>
   </p:sldIdLst>
   <p:sldSz cx="12191695" cy="6858000" type="screen4x3"/>
   <p:notesSz cx="6858000" cy="9144000"/>
@@ -535,6 +540,286 @@
 </p:notes>
 </file>
 
+<file path=ppt/notesSlides/notesSlide10.xml><?xml version="1.0" encoding="utf-8"?>
+<p:notes xmlns:a="http://schemas.openxmlformats.org/drawingml/2006/main" xmlns:p="http://schemas.openxmlformats.org/presentationml/2006/main" xmlns:r="http://schemas.openxmlformats.org/officeDocument/2006/relationships">
+  <p:cSld>
+    <p:spTree>
+      <p:nvGrpSpPr>
+        <p:cNvPr id="1" name=""/>
+        <p:cNvGrpSpPr/>
+        <p:nvPr/>
+      </p:nvGrpSpPr>
+      <p:grpSpPr>
+        <a:xfrm>
+          <a:off x="0" y="0"/>
+          <a:ext cx="0" cy="0"/>
+          <a:chOff x="0" y="0"/>
+          <a:chExt cx="0" cy="0"/>
+        </a:xfrm>
+      </p:grpSpPr>
+      <p:sp>
+        <p:nvSpPr>
+          <p:cNvPr id="2" name="Slide Image Placeholder 1"/>
+          <p:cNvSpPr>
+            <a:spLocks noGrp="1"/>
+          </p:cNvSpPr>
+          <p:nvPr>
+            <p:ph type="sldImg" idx="2"/>
+          </p:nvPr>
+        </p:nvSpPr>
+        <p:spPr/>
+      </p:sp>
+      <p:sp>
+        <p:nvSpPr>
+          <p:cNvPr id="3" name="Notes Placeholder 2"/>
+          <p:cNvSpPr>
+            <a:spLocks noGrp="1"/>
+          </p:cNvSpPr>
+          <p:nvPr>
+            <p:ph type="body" idx="3" sz="quarter"/>
+          </p:nvPr>
+        </p:nvSpPr>
+        <p:spPr/>
+        <p:txBody>
+          <a:bodyPr/>
+          <a:lstStyle/>
+          <a:p>
+            <a:r>
+              <a:t>Concept diagram: Realm model.</a:t>
+            </a:r>
+          </a:p>
+        </p:txBody>
+      </p:sp>
+      <p:sp>
+        <p:nvSpPr>
+          <p:cNvPr id="4" name="Slide Number Placeholder 3"/>
+          <p:cNvSpPr>
+            <a:spLocks noGrp="1"/>
+          </p:cNvSpPr>
+          <p:nvPr>
+            <p:ph type="sldNum" idx="5" sz="quarter"/>
+          </p:nvPr>
+        </p:nvSpPr>
+        <p:spPr/>
+      </p:sp>
+    </p:spTree>
+  </p:cSld>
+  <p:clrMapOvr>
+    <a:masterClrMapping/>
+  </p:clrMapOvr>
+</p:notes>
+</file>
+
+<file path=ppt/notesSlides/notesSlide11.xml><?xml version="1.0" encoding="utf-8"?>
+<p:notes xmlns:a="http://schemas.openxmlformats.org/drawingml/2006/main" xmlns:p="http://schemas.openxmlformats.org/presentationml/2006/main" xmlns:r="http://schemas.openxmlformats.org/officeDocument/2006/relationships">
+  <p:cSld>
+    <p:spTree>
+      <p:nvGrpSpPr>
+        <p:cNvPr id="1" name=""/>
+        <p:cNvGrpSpPr/>
+        <p:nvPr/>
+      </p:nvGrpSpPr>
+      <p:grpSpPr>
+        <a:xfrm>
+          <a:off x="0" y="0"/>
+          <a:ext cx="0" cy="0"/>
+          <a:chOff x="0" y="0"/>
+          <a:chExt cx="0" cy="0"/>
+        </a:xfrm>
+      </p:grpSpPr>
+      <p:sp>
+        <p:nvSpPr>
+          <p:cNvPr id="2" name="Slide Image Placeholder 1"/>
+          <p:cNvSpPr>
+            <a:spLocks noGrp="1"/>
+          </p:cNvSpPr>
+          <p:nvPr>
+            <p:ph type="sldImg" idx="2"/>
+          </p:nvPr>
+        </p:nvSpPr>
+        <p:spPr/>
+      </p:sp>
+      <p:sp>
+        <p:nvSpPr>
+          <p:cNvPr id="3" name="Notes Placeholder 2"/>
+          <p:cNvSpPr>
+            <a:spLocks noGrp="1"/>
+          </p:cNvSpPr>
+          <p:nvPr>
+            <p:ph type="body" idx="3" sz="quarter"/>
+          </p:nvPr>
+        </p:nvSpPr>
+        <p:spPr/>
+        <p:txBody>
+          <a:bodyPr/>
+          <a:lstStyle/>
+          <a:p>
+            <a:r>
+              <a:t>Concept diagram: Build vs buy.</a:t>
+            </a:r>
+          </a:p>
+        </p:txBody>
+      </p:sp>
+      <p:sp>
+        <p:nvSpPr>
+          <p:cNvPr id="4" name="Slide Number Placeholder 3"/>
+          <p:cNvSpPr>
+            <a:spLocks noGrp="1"/>
+          </p:cNvSpPr>
+          <p:nvPr>
+            <p:ph type="sldNum" idx="5" sz="quarter"/>
+          </p:nvPr>
+        </p:nvSpPr>
+        <p:spPr/>
+      </p:sp>
+    </p:spTree>
+  </p:cSld>
+  <p:clrMapOvr>
+    <a:masterClrMapping/>
+  </p:clrMapOvr>
+</p:notes>
+</file>
+
+<file path=ppt/notesSlides/notesSlide12.xml><?xml version="1.0" encoding="utf-8"?>
+<p:notes xmlns:a="http://schemas.openxmlformats.org/drawingml/2006/main" xmlns:p="http://schemas.openxmlformats.org/presentationml/2006/main" xmlns:r="http://schemas.openxmlformats.org/officeDocument/2006/relationships">
+  <p:cSld>
+    <p:spTree>
+      <p:nvGrpSpPr>
+        <p:cNvPr id="1" name=""/>
+        <p:cNvGrpSpPr/>
+        <p:nvPr/>
+      </p:nvGrpSpPr>
+      <p:grpSpPr>
+        <a:xfrm>
+          <a:off x="0" y="0"/>
+          <a:ext cx="0" cy="0"/>
+          <a:chOff x="0" y="0"/>
+          <a:chExt cx="0" cy="0"/>
+        </a:xfrm>
+      </p:grpSpPr>
+      <p:sp>
+        <p:nvSpPr>
+          <p:cNvPr id="2" name="Slide Image Placeholder 1"/>
+          <p:cNvSpPr>
+            <a:spLocks noGrp="1"/>
+          </p:cNvSpPr>
+          <p:nvPr>
+            <p:ph type="sldImg" idx="2"/>
+          </p:nvPr>
+        </p:nvSpPr>
+        <p:spPr/>
+      </p:sp>
+      <p:sp>
+        <p:nvSpPr>
+          <p:cNvPr id="3" name="Notes Placeholder 2"/>
+          <p:cNvSpPr>
+            <a:spLocks noGrp="1"/>
+          </p:cNvSpPr>
+          <p:nvPr>
+            <p:ph type="body" idx="3" sz="quarter"/>
+          </p:nvPr>
+        </p:nvSpPr>
+        <p:spPr/>
+        <p:txBody>
+          <a:bodyPr/>
+          <a:lstStyle/>
+          <a:p>
+            <a:r>
+              <a:t>Concept diagram: Security layer.</a:t>
+            </a:r>
+          </a:p>
+        </p:txBody>
+      </p:sp>
+      <p:sp>
+        <p:nvSpPr>
+          <p:cNvPr id="4" name="Slide Number Placeholder 3"/>
+          <p:cNvSpPr>
+            <a:spLocks noGrp="1"/>
+          </p:cNvSpPr>
+          <p:nvPr>
+            <p:ph type="sldNum" idx="5" sz="quarter"/>
+          </p:nvPr>
+        </p:nvSpPr>
+        <p:spPr/>
+      </p:sp>
+    </p:spTree>
+  </p:cSld>
+  <p:clrMapOvr>
+    <a:masterClrMapping/>
+  </p:clrMapOvr>
+</p:notes>
+</file>
+
+<file path=ppt/notesSlides/notesSlide13.xml><?xml version="1.0" encoding="utf-8"?>
+<p:notes xmlns:a="http://schemas.openxmlformats.org/drawingml/2006/main" xmlns:p="http://schemas.openxmlformats.org/presentationml/2006/main" xmlns:r="http://schemas.openxmlformats.org/officeDocument/2006/relationships">
+  <p:cSld>
+    <p:spTree>
+      <p:nvGrpSpPr>
+        <p:cNvPr id="1" name=""/>
+        <p:cNvGrpSpPr/>
+        <p:nvPr/>
+      </p:nvGrpSpPr>
+      <p:grpSpPr>
+        <a:xfrm>
+          <a:off x="0" y="0"/>
+          <a:ext cx="0" cy="0"/>
+          <a:chOff x="0" y="0"/>
+          <a:chExt cx="0" cy="0"/>
+        </a:xfrm>
+      </p:grpSpPr>
+      <p:sp>
+        <p:nvSpPr>
+          <p:cNvPr id="2" name="Slide Image Placeholder 1"/>
+          <p:cNvSpPr>
+            <a:spLocks noGrp="1"/>
+          </p:cNvSpPr>
+          <p:nvPr>
+            <p:ph type="sldImg" idx="2"/>
+          </p:nvPr>
+        </p:nvSpPr>
+        <p:spPr/>
+      </p:sp>
+      <p:sp>
+        <p:nvSpPr>
+          <p:cNvPr id="3" name="Notes Placeholder 2"/>
+          <p:cNvSpPr>
+            <a:spLocks noGrp="1"/>
+          </p:cNvSpPr>
+          <p:nvPr>
+            <p:ph type="body" idx="3" sz="quarter"/>
+          </p:nvPr>
+        </p:nvSpPr>
+        <p:spPr/>
+        <p:txBody>
+          <a:bodyPr/>
+          <a:lstStyle/>
+          <a:p>
+            <a:r>
+              <a:t>Concept diagram: What you built.</a:t>
+            </a:r>
+          </a:p>
+        </p:txBody>
+      </p:sp>
+      <p:sp>
+        <p:nvSpPr>
+          <p:cNvPr id="4" name="Slide Number Placeholder 3"/>
+          <p:cNvSpPr>
+            <a:spLocks noGrp="1"/>
+          </p:cNvSpPr>
+          <p:nvPr>
+            <p:ph type="sldNum" idx="5" sz="quarter"/>
+          </p:nvPr>
+        </p:nvSpPr>
+        <p:spPr/>
+      </p:sp>
+    </p:spTree>
+  </p:cSld>
+  <p:clrMapOvr>
+    <a:masterClrMapping/>
+  </p:clrMapOvr>
+</p:notes>
+</file>
+
 <file path=ppt/notesSlides/notesSlide2.xml><?xml version="1.0" encoding="utf-8"?>
 <p:notes xmlns:a="http://schemas.openxmlformats.org/drawingml/2006/main" xmlns:p="http://schemas.openxmlformats.org/presentationml/2006/main" xmlns:r="http://schemas.openxmlformats.org/officeDocument/2006/relationships">
   <p:cSld>
@@ -1001,6 +1286,76 @@
           <a:p>
             <a:r>
               <a:t>Close by connecting it back. You put a front door on Parasol — web login, bearer API with roles, a machine identity, token-debugging fluency, and a delegation chain that cannot escalate — without writing authentication code, on a product included with OpenShift that also secures the platform's own login. The durable message: stop trusting the network and start trusting tokens you can validate, and stop re-buying (or worse, re-building) identity you already own. The bridge to what's next: the same identity provider wiring apps *and* the cluster is the multi-tenancy story.</a:t>
+            </a:r>
+          </a:p>
+        </p:txBody>
+      </p:sp>
+      <p:sp>
+        <p:nvSpPr>
+          <p:cNvPr id="4" name="Slide Number Placeholder 3"/>
+          <p:cNvSpPr>
+            <a:spLocks noGrp="1"/>
+          </p:cNvSpPr>
+          <p:nvPr>
+            <p:ph type="sldNum" idx="5" sz="quarter"/>
+          </p:nvPr>
+        </p:nvSpPr>
+        <p:spPr/>
+      </p:sp>
+    </p:spTree>
+  </p:cSld>
+  <p:clrMapOvr>
+    <a:masterClrMapping/>
+  </p:clrMapOvr>
+</p:notes>
+</file>
+
+<file path=ppt/notesSlides/notesSlide9.xml><?xml version="1.0" encoding="utf-8"?>
+<p:notes xmlns:a="http://schemas.openxmlformats.org/drawingml/2006/main" xmlns:p="http://schemas.openxmlformats.org/presentationml/2006/main" xmlns:r="http://schemas.openxmlformats.org/officeDocument/2006/relationships">
+  <p:cSld>
+    <p:spTree>
+      <p:nvGrpSpPr>
+        <p:cNvPr id="1" name=""/>
+        <p:cNvGrpSpPr/>
+        <p:nvPr/>
+      </p:nvGrpSpPr>
+      <p:grpSpPr>
+        <a:xfrm>
+          <a:off x="0" y="0"/>
+          <a:ext cx="0" cy="0"/>
+          <a:chOff x="0" y="0"/>
+          <a:chExt cx="0" cy="0"/>
+        </a:xfrm>
+      </p:grpSpPr>
+      <p:sp>
+        <p:nvSpPr>
+          <p:cNvPr id="2" name="Slide Image Placeholder 1"/>
+          <p:cNvSpPr>
+            <a:spLocks noGrp="1"/>
+          </p:cNvSpPr>
+          <p:nvPr>
+            <p:ph type="sldImg" idx="2"/>
+          </p:nvPr>
+        </p:nvSpPr>
+        <p:spPr/>
+      </p:sp>
+      <p:sp>
+        <p:nvSpPr>
+          <p:cNvPr id="3" name="Notes Placeholder 2"/>
+          <p:cNvSpPr>
+            <a:spLocks noGrp="1"/>
+          </p:cNvSpPr>
+          <p:nvPr>
+            <p:ph type="body" idx="3" sz="quarter"/>
+          </p:nvPr>
+        </p:nvSpPr>
+        <p:spPr/>
+        <p:txBody>
+          <a:bodyPr/>
+          <a:lstStyle/>
+          <a:p>
+            <a:r>
+              <a:t>Concept diagram: Four flows.</a:t>
             </a:r>
           </a:p>
         </p:txBody>
@@ -4209,6 +4564,1836 @@
 </p:sld>
 </file>
 
+<file path=ppt/slides/slide10.xml><?xml version="1.0" encoding="utf-8"?>
+<p:sld xmlns:a="http://schemas.openxmlformats.org/drawingml/2006/main" xmlns:p="http://schemas.openxmlformats.org/presentationml/2006/main" xmlns:r="http://schemas.openxmlformats.org/officeDocument/2006/relationships">
+  <p:cSld>
+    <p:spTree>
+      <p:nvGrpSpPr>
+        <p:cNvPr id="1" name=""/>
+        <p:cNvGrpSpPr/>
+        <p:nvPr/>
+      </p:nvGrpSpPr>
+      <p:grpSpPr/>
+      <p:pic>
+        <p:nvPicPr>
+          <p:cNvPr id="2" name="Picture 1" descr="redhat_logo.jpg"/>
+          <p:cNvPicPr>
+            <a:picLocks noChangeAspect="1"/>
+          </p:cNvPicPr>
+          <p:nvPr/>
+        </p:nvPicPr>
+        <p:blipFill>
+          <a:blip r:embed="rId2"/>
+          <a:stretch>
+            <a:fillRect/>
+          </a:stretch>
+        </p:blipFill>
+        <p:spPr>
+          <a:xfrm>
+            <a:off x="10326319" y="475488"/>
+            <a:ext cx="1024128" cy="242248"/>
+          </a:xfrm>
+          <a:prstGeom prst="rect">
+            <a:avLst/>
+          </a:prstGeom>
+        </p:spPr>
+      </p:pic>
+      <p:sp>
+        <p:nvSpPr>
+          <p:cNvPr id="3" name="TextBox 2"/>
+          <p:cNvSpPr txBox="1"/>
+          <p:nvPr/>
+        </p:nvSpPr>
+        <p:spPr>
+          <a:xfrm>
+            <a:off x="841248" y="548640"/>
+            <a:ext cx="8595360" cy="274320"/>
+          </a:xfrm>
+          <a:prstGeom prst="rect">
+            <a:avLst/>
+          </a:prstGeom>
+          <a:noFill/>
+        </p:spPr>
+        <p:txBody>
+          <a:bodyPr wrap="square" anchor="t" lIns="0" rIns="0" tIns="0" bIns="0">
+            <a:spAutoFit/>
+          </a:bodyPr>
+          <a:lstStyle/>
+          <a:p>
+            <a:pPr algn="l">
+              <a:lnSpc>
+                <a:spcPct val="106000"/>
+              </a:lnSpc>
+              <a:spcBef>
+                <a:spcPts val="0"/>
+              </a:spcBef>
+              <a:spcAft>
+                <a:spcPts val="0"/>
+              </a:spcAft>
+            </a:pPr>
+            <a:r>
+              <a:rPr sz="1250" b="1" spc="220">
+                <a:solidFill>
+                  <a:srgbClr val="EE0000"/>
+                </a:solidFill>
+                <a:latin typeface="Red Hat Display"/>
+              </a:rPr>
+              <a:t>M14 · SECURING APPS WITH KEYCLOAK</a:t>
+            </a:r>
+          </a:p>
+        </p:txBody>
+      </p:sp>
+      <p:sp>
+        <p:nvSpPr>
+          <p:cNvPr id="4" name="TextBox 3"/>
+          <p:cNvSpPr txBox="1"/>
+          <p:nvPr/>
+        </p:nvSpPr>
+        <p:spPr>
+          <a:xfrm>
+            <a:off x="841248" y="877824"/>
+            <a:ext cx="10515600" cy="548640"/>
+          </a:xfrm>
+          <a:prstGeom prst="rect">
+            <a:avLst/>
+          </a:prstGeom>
+          <a:noFill/>
+        </p:spPr>
+        <p:txBody>
+          <a:bodyPr wrap="none" anchor="t" lIns="0" rIns="0" tIns="0" bIns="0">
+            <a:spAutoFit/>
+          </a:bodyPr>
+          <a:lstStyle/>
+          <a:p>
+            <a:pPr algn="l">
+              <a:lnSpc>
+                <a:spcPct val="100000"/>
+              </a:lnSpc>
+              <a:spcBef>
+                <a:spcPts val="0"/>
+              </a:spcBef>
+              <a:spcAft>
+                <a:spcPts val="0"/>
+              </a:spcAft>
+            </a:pPr>
+            <a:r>
+              <a:rPr sz="2500" b="1">
+                <a:solidFill>
+                  <a:srgbClr val="1A1A1A"/>
+                </a:solidFill>
+                <a:latin typeface="Red Hat Display"/>
+              </a:rPr>
+              <a:t>Four flows</a:t>
+            </a:r>
+          </a:p>
+        </p:txBody>
+      </p:sp>
+      <p:cxnSp>
+        <p:nvCxnSpPr>
+          <p:cNvPr id="5" name="Connector 4"/>
+          <p:cNvCxnSpPr/>
+          <p:nvPr/>
+        </p:nvCxnSpPr>
+        <p:spPr>
+          <a:xfrm>
+            <a:off x="841248" y="1554480"/>
+            <a:ext cx="1371600" cy="0"/>
+          </a:xfrm>
+          <a:prstGeom prst="bentConnector3">
+            <a:avLst/>
+          </a:prstGeom>
+          <a:ln w="31750">
+            <a:solidFill>
+              <a:srgbClr val="EE0000"/>
+            </a:solidFill>
+          </a:ln>
+          <a:effectLst/>
+        </p:spPr>
+        <p:style>
+          <a:lnRef idx="2">
+            <a:schemeClr val="accent1"/>
+          </a:lnRef>
+          <a:fillRef idx="0">
+            <a:schemeClr val="accent1"/>
+          </a:fillRef>
+          <a:effectRef idx="1">
+            <a:schemeClr val="accent1"/>
+          </a:effectRef>
+          <a:fontRef idx="minor">
+            <a:schemeClr val="tx1"/>
+          </a:fontRef>
+        </p:style>
+      </p:cxnSp>
+      <p:sp>
+        <p:nvSpPr>
+          <p:cNvPr id="6" name="Rounded Rectangle 5"/>
+          <p:cNvSpPr/>
+          <p:nvPr/>
+        </p:nvSpPr>
+        <p:spPr>
+          <a:xfrm>
+            <a:off x="841248" y="2331720"/>
+            <a:ext cx="10509199" cy="3794760"/>
+          </a:xfrm>
+          <a:prstGeom prst="roundRect">
+            <a:avLst>
+              <a:gd name="adj" fmla="val 4000"/>
+            </a:avLst>
+          </a:prstGeom>
+          <a:solidFill>
+            <a:srgbClr val="FFFFFF"/>
+          </a:solidFill>
+          <a:ln w="15240">
+            <a:solidFill>
+              <a:srgbClr val="DDE1E6"/>
+            </a:solidFill>
+          </a:ln>
+          <a:effectLst/>
+        </p:spPr>
+        <p:style>
+          <a:lnRef idx="1">
+            <a:schemeClr val="accent1"/>
+          </a:lnRef>
+          <a:fillRef idx="3">
+            <a:schemeClr val="accent1"/>
+          </a:fillRef>
+          <a:effectRef idx="2">
+            <a:schemeClr val="accent1"/>
+          </a:effectRef>
+          <a:fontRef idx="minor">
+            <a:schemeClr val="lt1"/>
+          </a:fontRef>
+        </p:style>
+        <p:txBody>
+          <a:bodyPr rtlCol="0" anchor="ctr"/>
+          <a:lstStyle/>
+          <a:p>
+            <a:pPr algn="ctr"/>
+          </a:p>
+        </p:txBody>
+      </p:sp>
+      <p:pic>
+        <p:nvPicPr>
+          <p:cNvPr id="7" name="Picture 6" descr="01-four-flows.png"/>
+          <p:cNvPicPr>
+            <a:picLocks noChangeAspect="1"/>
+          </p:cNvPicPr>
+          <p:nvPr/>
+        </p:nvPicPr>
+        <p:blipFill>
+          <a:blip r:embed="rId3"/>
+          <a:stretch>
+            <a:fillRect/>
+          </a:stretch>
+        </p:blipFill>
+        <p:spPr>
+          <a:xfrm>
+            <a:off x="4155933" y="2532888"/>
+            <a:ext cx="3879827" cy="3392424"/>
+          </a:xfrm>
+          <a:prstGeom prst="rect">
+            <a:avLst/>
+          </a:prstGeom>
+        </p:spPr>
+      </p:pic>
+      <p:cxnSp>
+        <p:nvCxnSpPr>
+          <p:cNvPr id="8" name="Connector 7"/>
+          <p:cNvCxnSpPr/>
+          <p:nvPr/>
+        </p:nvCxnSpPr>
+        <p:spPr>
+          <a:xfrm>
+            <a:off x="841248" y="6437376"/>
+            <a:ext cx="10509199" cy="0"/>
+          </a:xfrm>
+          <a:prstGeom prst="bentConnector3">
+            <a:avLst/>
+          </a:prstGeom>
+          <a:ln w="12700">
+            <a:solidFill>
+              <a:srgbClr val="DDE1E6"/>
+            </a:solidFill>
+          </a:ln>
+          <a:effectLst/>
+        </p:spPr>
+        <p:style>
+          <a:lnRef idx="2">
+            <a:schemeClr val="accent1"/>
+          </a:lnRef>
+          <a:fillRef idx="0">
+            <a:schemeClr val="accent1"/>
+          </a:fillRef>
+          <a:effectRef idx="1">
+            <a:schemeClr val="accent1"/>
+          </a:effectRef>
+          <a:fontRef idx="minor">
+            <a:schemeClr val="tx1"/>
+          </a:fontRef>
+        </p:style>
+      </p:cxnSp>
+      <p:sp>
+        <p:nvSpPr>
+          <p:cNvPr id="9" name="TextBox 8"/>
+          <p:cNvSpPr txBox="1"/>
+          <p:nvPr/>
+        </p:nvSpPr>
+        <p:spPr>
+          <a:xfrm>
+            <a:off x="841248" y="6473952"/>
+            <a:ext cx="7315200" cy="274320"/>
+          </a:xfrm>
+          <a:prstGeom prst="rect">
+            <a:avLst/>
+          </a:prstGeom>
+          <a:noFill/>
+        </p:spPr>
+        <p:txBody>
+          <a:bodyPr wrap="square" anchor="t" lIns="0" rIns="0" tIns="0" bIns="0">
+            <a:spAutoFit/>
+          </a:bodyPr>
+          <a:lstStyle/>
+          <a:p>
+            <a:pPr algn="l">
+              <a:lnSpc>
+                <a:spcPct val="106000"/>
+              </a:lnSpc>
+              <a:spcBef>
+                <a:spcPts val="0"/>
+              </a:spcBef>
+              <a:spcAft>
+                <a:spcPts val="0"/>
+              </a:spcAft>
+            </a:pPr>
+            <a:r>
+              <a:rPr sz="950" b="0">
+                <a:solidFill>
+                  <a:srgbClr val="8A9099"/>
+                </a:solidFill>
+                <a:latin typeface="Red Hat Text"/>
+              </a:rPr>
+              <a:t>CONFIDENTIAL</a:t>
+            </a:r>
+          </a:p>
+        </p:txBody>
+      </p:sp>
+      <p:sp>
+        <p:nvSpPr>
+          <p:cNvPr id="10" name="TextBox 9"/>
+          <p:cNvSpPr txBox="1"/>
+          <p:nvPr/>
+        </p:nvSpPr>
+        <p:spPr>
+          <a:xfrm>
+            <a:off x="10801807" y="6473952"/>
+            <a:ext cx="548640" cy="274320"/>
+          </a:xfrm>
+          <a:prstGeom prst="rect">
+            <a:avLst/>
+          </a:prstGeom>
+          <a:noFill/>
+        </p:spPr>
+        <p:txBody>
+          <a:bodyPr wrap="square" anchor="t" lIns="0" rIns="0" tIns="0" bIns="0">
+            <a:spAutoFit/>
+          </a:bodyPr>
+          <a:lstStyle/>
+          <a:p>
+            <a:pPr algn="r">
+              <a:lnSpc>
+                <a:spcPct val="106000"/>
+              </a:lnSpc>
+              <a:spcBef>
+                <a:spcPts val="0"/>
+              </a:spcBef>
+              <a:spcAft>
+                <a:spcPts val="0"/>
+              </a:spcAft>
+            </a:pPr>
+            <a:r>
+              <a:rPr sz="950" b="0">
+                <a:solidFill>
+                  <a:srgbClr val="8A9099"/>
+                </a:solidFill>
+                <a:latin typeface="Red Hat Text"/>
+              </a:rPr>
+              <a:t>9</a:t>
+            </a:r>
+          </a:p>
+        </p:txBody>
+      </p:sp>
+    </p:spTree>
+  </p:cSld>
+  <p:clrMapOvr>
+    <a:masterClrMapping/>
+  </p:clrMapOvr>
+</p:sld>
+</file>
+
+<file path=ppt/slides/slide11.xml><?xml version="1.0" encoding="utf-8"?>
+<p:sld xmlns:a="http://schemas.openxmlformats.org/drawingml/2006/main" xmlns:p="http://schemas.openxmlformats.org/presentationml/2006/main" xmlns:r="http://schemas.openxmlformats.org/officeDocument/2006/relationships">
+  <p:cSld>
+    <p:spTree>
+      <p:nvGrpSpPr>
+        <p:cNvPr id="1" name=""/>
+        <p:cNvGrpSpPr/>
+        <p:nvPr/>
+      </p:nvGrpSpPr>
+      <p:grpSpPr/>
+      <p:pic>
+        <p:nvPicPr>
+          <p:cNvPr id="2" name="Picture 1" descr="redhat_logo.jpg"/>
+          <p:cNvPicPr>
+            <a:picLocks noChangeAspect="1"/>
+          </p:cNvPicPr>
+          <p:nvPr/>
+        </p:nvPicPr>
+        <p:blipFill>
+          <a:blip r:embed="rId2"/>
+          <a:stretch>
+            <a:fillRect/>
+          </a:stretch>
+        </p:blipFill>
+        <p:spPr>
+          <a:xfrm>
+            <a:off x="10326319" y="475488"/>
+            <a:ext cx="1024128" cy="242248"/>
+          </a:xfrm>
+          <a:prstGeom prst="rect">
+            <a:avLst/>
+          </a:prstGeom>
+        </p:spPr>
+      </p:pic>
+      <p:sp>
+        <p:nvSpPr>
+          <p:cNvPr id="3" name="TextBox 2"/>
+          <p:cNvSpPr txBox="1"/>
+          <p:nvPr/>
+        </p:nvSpPr>
+        <p:spPr>
+          <a:xfrm>
+            <a:off x="841248" y="548640"/>
+            <a:ext cx="8595360" cy="274320"/>
+          </a:xfrm>
+          <a:prstGeom prst="rect">
+            <a:avLst/>
+          </a:prstGeom>
+          <a:noFill/>
+        </p:spPr>
+        <p:txBody>
+          <a:bodyPr wrap="square" anchor="t" lIns="0" rIns="0" tIns="0" bIns="0">
+            <a:spAutoFit/>
+          </a:bodyPr>
+          <a:lstStyle/>
+          <a:p>
+            <a:pPr algn="l">
+              <a:lnSpc>
+                <a:spcPct val="106000"/>
+              </a:lnSpc>
+              <a:spcBef>
+                <a:spcPts val="0"/>
+              </a:spcBef>
+              <a:spcAft>
+                <a:spcPts val="0"/>
+              </a:spcAft>
+            </a:pPr>
+            <a:r>
+              <a:rPr sz="1250" b="1" spc="220">
+                <a:solidFill>
+                  <a:srgbClr val="EE0000"/>
+                </a:solidFill>
+                <a:latin typeface="Red Hat Display"/>
+              </a:rPr>
+              <a:t>M14 · SECURING APPS WITH KEYCLOAK</a:t>
+            </a:r>
+          </a:p>
+        </p:txBody>
+      </p:sp>
+      <p:sp>
+        <p:nvSpPr>
+          <p:cNvPr id="4" name="TextBox 3"/>
+          <p:cNvSpPr txBox="1"/>
+          <p:nvPr/>
+        </p:nvSpPr>
+        <p:spPr>
+          <a:xfrm>
+            <a:off x="841248" y="877824"/>
+            <a:ext cx="10515600" cy="548640"/>
+          </a:xfrm>
+          <a:prstGeom prst="rect">
+            <a:avLst/>
+          </a:prstGeom>
+          <a:noFill/>
+        </p:spPr>
+        <p:txBody>
+          <a:bodyPr wrap="none" anchor="t" lIns="0" rIns="0" tIns="0" bIns="0">
+            <a:spAutoFit/>
+          </a:bodyPr>
+          <a:lstStyle/>
+          <a:p>
+            <a:pPr algn="l">
+              <a:lnSpc>
+                <a:spcPct val="100000"/>
+              </a:lnSpc>
+              <a:spcBef>
+                <a:spcPts val="0"/>
+              </a:spcBef>
+              <a:spcAft>
+                <a:spcPts val="0"/>
+              </a:spcAft>
+            </a:pPr>
+            <a:r>
+              <a:rPr sz="2500" b="1">
+                <a:solidFill>
+                  <a:srgbClr val="1A1A1A"/>
+                </a:solidFill>
+                <a:latin typeface="Red Hat Display"/>
+              </a:rPr>
+              <a:t>Realm model</a:t>
+            </a:r>
+          </a:p>
+        </p:txBody>
+      </p:sp>
+      <p:cxnSp>
+        <p:nvCxnSpPr>
+          <p:cNvPr id="5" name="Connector 4"/>
+          <p:cNvCxnSpPr/>
+          <p:nvPr/>
+        </p:nvCxnSpPr>
+        <p:spPr>
+          <a:xfrm>
+            <a:off x="841248" y="1554480"/>
+            <a:ext cx="1371600" cy="0"/>
+          </a:xfrm>
+          <a:prstGeom prst="bentConnector3">
+            <a:avLst/>
+          </a:prstGeom>
+          <a:ln w="31750">
+            <a:solidFill>
+              <a:srgbClr val="EE0000"/>
+            </a:solidFill>
+          </a:ln>
+          <a:effectLst/>
+        </p:spPr>
+        <p:style>
+          <a:lnRef idx="2">
+            <a:schemeClr val="accent1"/>
+          </a:lnRef>
+          <a:fillRef idx="0">
+            <a:schemeClr val="accent1"/>
+          </a:fillRef>
+          <a:effectRef idx="1">
+            <a:schemeClr val="accent1"/>
+          </a:effectRef>
+          <a:fontRef idx="minor">
+            <a:schemeClr val="tx1"/>
+          </a:fontRef>
+        </p:style>
+      </p:cxnSp>
+      <p:sp>
+        <p:nvSpPr>
+          <p:cNvPr id="6" name="Rounded Rectangle 5"/>
+          <p:cNvSpPr/>
+          <p:nvPr/>
+        </p:nvSpPr>
+        <p:spPr>
+          <a:xfrm>
+            <a:off x="841248" y="2331720"/>
+            <a:ext cx="10509199" cy="3794760"/>
+          </a:xfrm>
+          <a:prstGeom prst="roundRect">
+            <a:avLst>
+              <a:gd name="adj" fmla="val 4000"/>
+            </a:avLst>
+          </a:prstGeom>
+          <a:solidFill>
+            <a:srgbClr val="FFFFFF"/>
+          </a:solidFill>
+          <a:ln w="15240">
+            <a:solidFill>
+              <a:srgbClr val="DDE1E6"/>
+            </a:solidFill>
+          </a:ln>
+          <a:effectLst/>
+        </p:spPr>
+        <p:style>
+          <a:lnRef idx="1">
+            <a:schemeClr val="accent1"/>
+          </a:lnRef>
+          <a:fillRef idx="3">
+            <a:schemeClr val="accent1"/>
+          </a:fillRef>
+          <a:effectRef idx="2">
+            <a:schemeClr val="accent1"/>
+          </a:effectRef>
+          <a:fontRef idx="minor">
+            <a:schemeClr val="lt1"/>
+          </a:fontRef>
+        </p:style>
+        <p:txBody>
+          <a:bodyPr rtlCol="0" anchor="ctr"/>
+          <a:lstStyle/>
+          <a:p>
+            <a:pPr algn="ctr"/>
+          </a:p>
+        </p:txBody>
+      </p:sp>
+      <p:pic>
+        <p:nvPicPr>
+          <p:cNvPr id="7" name="Picture 6" descr="02-realm-model.png"/>
+          <p:cNvPicPr>
+            <a:picLocks noChangeAspect="1"/>
+          </p:cNvPicPr>
+          <p:nvPr/>
+        </p:nvPicPr>
+        <p:blipFill>
+          <a:blip r:embed="rId3"/>
+          <a:stretch>
+            <a:fillRect/>
+          </a:stretch>
+        </p:blipFill>
+        <p:spPr>
+          <a:xfrm>
+            <a:off x="1042416" y="3278423"/>
+            <a:ext cx="10106863" cy="1901353"/>
+          </a:xfrm>
+          <a:prstGeom prst="rect">
+            <a:avLst/>
+          </a:prstGeom>
+        </p:spPr>
+      </p:pic>
+      <p:cxnSp>
+        <p:nvCxnSpPr>
+          <p:cNvPr id="8" name="Connector 7"/>
+          <p:cNvCxnSpPr/>
+          <p:nvPr/>
+        </p:nvCxnSpPr>
+        <p:spPr>
+          <a:xfrm>
+            <a:off x="841248" y="6437376"/>
+            <a:ext cx="10509199" cy="0"/>
+          </a:xfrm>
+          <a:prstGeom prst="bentConnector3">
+            <a:avLst/>
+          </a:prstGeom>
+          <a:ln w="12700">
+            <a:solidFill>
+              <a:srgbClr val="DDE1E6"/>
+            </a:solidFill>
+          </a:ln>
+          <a:effectLst/>
+        </p:spPr>
+        <p:style>
+          <a:lnRef idx="2">
+            <a:schemeClr val="accent1"/>
+          </a:lnRef>
+          <a:fillRef idx="0">
+            <a:schemeClr val="accent1"/>
+          </a:fillRef>
+          <a:effectRef idx="1">
+            <a:schemeClr val="accent1"/>
+          </a:effectRef>
+          <a:fontRef idx="minor">
+            <a:schemeClr val="tx1"/>
+          </a:fontRef>
+        </p:style>
+      </p:cxnSp>
+      <p:sp>
+        <p:nvSpPr>
+          <p:cNvPr id="9" name="TextBox 8"/>
+          <p:cNvSpPr txBox="1"/>
+          <p:nvPr/>
+        </p:nvSpPr>
+        <p:spPr>
+          <a:xfrm>
+            <a:off x="841248" y="6473952"/>
+            <a:ext cx="7315200" cy="274320"/>
+          </a:xfrm>
+          <a:prstGeom prst="rect">
+            <a:avLst/>
+          </a:prstGeom>
+          <a:noFill/>
+        </p:spPr>
+        <p:txBody>
+          <a:bodyPr wrap="square" anchor="t" lIns="0" rIns="0" tIns="0" bIns="0">
+            <a:spAutoFit/>
+          </a:bodyPr>
+          <a:lstStyle/>
+          <a:p>
+            <a:pPr algn="l">
+              <a:lnSpc>
+                <a:spcPct val="106000"/>
+              </a:lnSpc>
+              <a:spcBef>
+                <a:spcPts val="0"/>
+              </a:spcBef>
+              <a:spcAft>
+                <a:spcPts val="0"/>
+              </a:spcAft>
+            </a:pPr>
+            <a:r>
+              <a:rPr sz="950" b="0">
+                <a:solidFill>
+                  <a:srgbClr val="8A9099"/>
+                </a:solidFill>
+                <a:latin typeface="Red Hat Text"/>
+              </a:rPr>
+              <a:t>CONFIDENTIAL</a:t>
+            </a:r>
+          </a:p>
+        </p:txBody>
+      </p:sp>
+      <p:sp>
+        <p:nvSpPr>
+          <p:cNvPr id="10" name="TextBox 9"/>
+          <p:cNvSpPr txBox="1"/>
+          <p:nvPr/>
+        </p:nvSpPr>
+        <p:spPr>
+          <a:xfrm>
+            <a:off x="10801807" y="6473952"/>
+            <a:ext cx="548640" cy="274320"/>
+          </a:xfrm>
+          <a:prstGeom prst="rect">
+            <a:avLst/>
+          </a:prstGeom>
+          <a:noFill/>
+        </p:spPr>
+        <p:txBody>
+          <a:bodyPr wrap="square" anchor="t" lIns="0" rIns="0" tIns="0" bIns="0">
+            <a:spAutoFit/>
+          </a:bodyPr>
+          <a:lstStyle/>
+          <a:p>
+            <a:pPr algn="r">
+              <a:lnSpc>
+                <a:spcPct val="106000"/>
+              </a:lnSpc>
+              <a:spcBef>
+                <a:spcPts val="0"/>
+              </a:spcBef>
+              <a:spcAft>
+                <a:spcPts val="0"/>
+              </a:spcAft>
+            </a:pPr>
+            <a:r>
+              <a:rPr sz="950" b="0">
+                <a:solidFill>
+                  <a:srgbClr val="8A9099"/>
+                </a:solidFill>
+                <a:latin typeface="Red Hat Text"/>
+              </a:rPr>
+              <a:t>10</a:t>
+            </a:r>
+          </a:p>
+        </p:txBody>
+      </p:sp>
+    </p:spTree>
+  </p:cSld>
+  <p:clrMapOvr>
+    <a:masterClrMapping/>
+  </p:clrMapOvr>
+</p:sld>
+</file>
+
+<file path=ppt/slides/slide12.xml><?xml version="1.0" encoding="utf-8"?>
+<p:sld xmlns:a="http://schemas.openxmlformats.org/drawingml/2006/main" xmlns:p="http://schemas.openxmlformats.org/presentationml/2006/main" xmlns:r="http://schemas.openxmlformats.org/officeDocument/2006/relationships">
+  <p:cSld>
+    <p:spTree>
+      <p:nvGrpSpPr>
+        <p:cNvPr id="1" name=""/>
+        <p:cNvGrpSpPr/>
+        <p:nvPr/>
+      </p:nvGrpSpPr>
+      <p:grpSpPr/>
+      <p:pic>
+        <p:nvPicPr>
+          <p:cNvPr id="2" name="Picture 1" descr="redhat_logo.jpg"/>
+          <p:cNvPicPr>
+            <a:picLocks noChangeAspect="1"/>
+          </p:cNvPicPr>
+          <p:nvPr/>
+        </p:nvPicPr>
+        <p:blipFill>
+          <a:blip r:embed="rId2"/>
+          <a:stretch>
+            <a:fillRect/>
+          </a:stretch>
+        </p:blipFill>
+        <p:spPr>
+          <a:xfrm>
+            <a:off x="10326319" y="475488"/>
+            <a:ext cx="1024128" cy="242248"/>
+          </a:xfrm>
+          <a:prstGeom prst="rect">
+            <a:avLst/>
+          </a:prstGeom>
+        </p:spPr>
+      </p:pic>
+      <p:sp>
+        <p:nvSpPr>
+          <p:cNvPr id="3" name="TextBox 2"/>
+          <p:cNvSpPr txBox="1"/>
+          <p:nvPr/>
+        </p:nvSpPr>
+        <p:spPr>
+          <a:xfrm>
+            <a:off x="841248" y="548640"/>
+            <a:ext cx="8595360" cy="274320"/>
+          </a:xfrm>
+          <a:prstGeom prst="rect">
+            <a:avLst/>
+          </a:prstGeom>
+          <a:noFill/>
+        </p:spPr>
+        <p:txBody>
+          <a:bodyPr wrap="square" anchor="t" lIns="0" rIns="0" tIns="0" bIns="0">
+            <a:spAutoFit/>
+          </a:bodyPr>
+          <a:lstStyle/>
+          <a:p>
+            <a:pPr algn="l">
+              <a:lnSpc>
+                <a:spcPct val="106000"/>
+              </a:lnSpc>
+              <a:spcBef>
+                <a:spcPts val="0"/>
+              </a:spcBef>
+              <a:spcAft>
+                <a:spcPts val="0"/>
+              </a:spcAft>
+            </a:pPr>
+            <a:r>
+              <a:rPr sz="1250" b="1" spc="220">
+                <a:solidFill>
+                  <a:srgbClr val="EE0000"/>
+                </a:solidFill>
+                <a:latin typeface="Red Hat Display"/>
+              </a:rPr>
+              <a:t>M14 · SECURING APPS WITH KEYCLOAK</a:t>
+            </a:r>
+          </a:p>
+        </p:txBody>
+      </p:sp>
+      <p:sp>
+        <p:nvSpPr>
+          <p:cNvPr id="4" name="TextBox 3"/>
+          <p:cNvSpPr txBox="1"/>
+          <p:nvPr/>
+        </p:nvSpPr>
+        <p:spPr>
+          <a:xfrm>
+            <a:off x="841248" y="877824"/>
+            <a:ext cx="10515600" cy="548640"/>
+          </a:xfrm>
+          <a:prstGeom prst="rect">
+            <a:avLst/>
+          </a:prstGeom>
+          <a:noFill/>
+        </p:spPr>
+        <p:txBody>
+          <a:bodyPr wrap="none" anchor="t" lIns="0" rIns="0" tIns="0" bIns="0">
+            <a:spAutoFit/>
+          </a:bodyPr>
+          <a:lstStyle/>
+          <a:p>
+            <a:pPr algn="l">
+              <a:lnSpc>
+                <a:spcPct val="100000"/>
+              </a:lnSpc>
+              <a:spcBef>
+                <a:spcPts val="0"/>
+              </a:spcBef>
+              <a:spcAft>
+                <a:spcPts val="0"/>
+              </a:spcAft>
+            </a:pPr>
+            <a:r>
+              <a:rPr sz="2500" b="1">
+                <a:solidFill>
+                  <a:srgbClr val="1A1A1A"/>
+                </a:solidFill>
+                <a:latin typeface="Red Hat Display"/>
+              </a:rPr>
+              <a:t>Build vs buy</a:t>
+            </a:r>
+          </a:p>
+        </p:txBody>
+      </p:sp>
+      <p:cxnSp>
+        <p:nvCxnSpPr>
+          <p:cNvPr id="5" name="Connector 4"/>
+          <p:cNvCxnSpPr/>
+          <p:nvPr/>
+        </p:nvCxnSpPr>
+        <p:spPr>
+          <a:xfrm>
+            <a:off x="841248" y="1554480"/>
+            <a:ext cx="1371600" cy="0"/>
+          </a:xfrm>
+          <a:prstGeom prst="bentConnector3">
+            <a:avLst/>
+          </a:prstGeom>
+          <a:ln w="31750">
+            <a:solidFill>
+              <a:srgbClr val="EE0000"/>
+            </a:solidFill>
+          </a:ln>
+          <a:effectLst/>
+        </p:spPr>
+        <p:style>
+          <a:lnRef idx="2">
+            <a:schemeClr val="accent1"/>
+          </a:lnRef>
+          <a:fillRef idx="0">
+            <a:schemeClr val="accent1"/>
+          </a:fillRef>
+          <a:effectRef idx="1">
+            <a:schemeClr val="accent1"/>
+          </a:effectRef>
+          <a:fontRef idx="minor">
+            <a:schemeClr val="tx1"/>
+          </a:fontRef>
+        </p:style>
+      </p:cxnSp>
+      <p:sp>
+        <p:nvSpPr>
+          <p:cNvPr id="6" name="Rounded Rectangle 5"/>
+          <p:cNvSpPr/>
+          <p:nvPr/>
+        </p:nvSpPr>
+        <p:spPr>
+          <a:xfrm>
+            <a:off x="841248" y="2331720"/>
+            <a:ext cx="10509199" cy="3794760"/>
+          </a:xfrm>
+          <a:prstGeom prst="roundRect">
+            <a:avLst>
+              <a:gd name="adj" fmla="val 4000"/>
+            </a:avLst>
+          </a:prstGeom>
+          <a:solidFill>
+            <a:srgbClr val="FFFFFF"/>
+          </a:solidFill>
+          <a:ln w="15240">
+            <a:solidFill>
+              <a:srgbClr val="DDE1E6"/>
+            </a:solidFill>
+          </a:ln>
+          <a:effectLst/>
+        </p:spPr>
+        <p:style>
+          <a:lnRef idx="1">
+            <a:schemeClr val="accent1"/>
+          </a:lnRef>
+          <a:fillRef idx="3">
+            <a:schemeClr val="accent1"/>
+          </a:fillRef>
+          <a:effectRef idx="2">
+            <a:schemeClr val="accent1"/>
+          </a:effectRef>
+          <a:fontRef idx="minor">
+            <a:schemeClr val="lt1"/>
+          </a:fontRef>
+        </p:style>
+        <p:txBody>
+          <a:bodyPr rtlCol="0" anchor="ctr"/>
+          <a:lstStyle/>
+          <a:p>
+            <a:pPr algn="ctr"/>
+          </a:p>
+        </p:txBody>
+      </p:sp>
+      <p:pic>
+        <p:nvPicPr>
+          <p:cNvPr id="7" name="Picture 6" descr="03-build-vs-buy.png"/>
+          <p:cNvPicPr>
+            <a:picLocks noChangeAspect="1"/>
+          </p:cNvPicPr>
+          <p:nvPr/>
+        </p:nvPicPr>
+        <p:blipFill>
+          <a:blip r:embed="rId3"/>
+          <a:stretch>
+            <a:fillRect/>
+          </a:stretch>
+        </p:blipFill>
+        <p:spPr>
+          <a:xfrm>
+            <a:off x="1042416" y="2855198"/>
+            <a:ext cx="10106863" cy="2747803"/>
+          </a:xfrm>
+          <a:prstGeom prst="rect">
+            <a:avLst/>
+          </a:prstGeom>
+        </p:spPr>
+      </p:pic>
+      <p:cxnSp>
+        <p:nvCxnSpPr>
+          <p:cNvPr id="8" name="Connector 7"/>
+          <p:cNvCxnSpPr/>
+          <p:nvPr/>
+        </p:nvCxnSpPr>
+        <p:spPr>
+          <a:xfrm>
+            <a:off x="841248" y="6437376"/>
+            <a:ext cx="10509199" cy="0"/>
+          </a:xfrm>
+          <a:prstGeom prst="bentConnector3">
+            <a:avLst/>
+          </a:prstGeom>
+          <a:ln w="12700">
+            <a:solidFill>
+              <a:srgbClr val="DDE1E6"/>
+            </a:solidFill>
+          </a:ln>
+          <a:effectLst/>
+        </p:spPr>
+        <p:style>
+          <a:lnRef idx="2">
+            <a:schemeClr val="accent1"/>
+          </a:lnRef>
+          <a:fillRef idx="0">
+            <a:schemeClr val="accent1"/>
+          </a:fillRef>
+          <a:effectRef idx="1">
+            <a:schemeClr val="accent1"/>
+          </a:effectRef>
+          <a:fontRef idx="minor">
+            <a:schemeClr val="tx1"/>
+          </a:fontRef>
+        </p:style>
+      </p:cxnSp>
+      <p:sp>
+        <p:nvSpPr>
+          <p:cNvPr id="9" name="TextBox 8"/>
+          <p:cNvSpPr txBox="1"/>
+          <p:nvPr/>
+        </p:nvSpPr>
+        <p:spPr>
+          <a:xfrm>
+            <a:off x="841248" y="6473952"/>
+            <a:ext cx="7315200" cy="274320"/>
+          </a:xfrm>
+          <a:prstGeom prst="rect">
+            <a:avLst/>
+          </a:prstGeom>
+          <a:noFill/>
+        </p:spPr>
+        <p:txBody>
+          <a:bodyPr wrap="square" anchor="t" lIns="0" rIns="0" tIns="0" bIns="0">
+            <a:spAutoFit/>
+          </a:bodyPr>
+          <a:lstStyle/>
+          <a:p>
+            <a:pPr algn="l">
+              <a:lnSpc>
+                <a:spcPct val="106000"/>
+              </a:lnSpc>
+              <a:spcBef>
+                <a:spcPts val="0"/>
+              </a:spcBef>
+              <a:spcAft>
+                <a:spcPts val="0"/>
+              </a:spcAft>
+            </a:pPr>
+            <a:r>
+              <a:rPr sz="950" b="0">
+                <a:solidFill>
+                  <a:srgbClr val="8A9099"/>
+                </a:solidFill>
+                <a:latin typeface="Red Hat Text"/>
+              </a:rPr>
+              <a:t>CONFIDENTIAL</a:t>
+            </a:r>
+          </a:p>
+        </p:txBody>
+      </p:sp>
+      <p:sp>
+        <p:nvSpPr>
+          <p:cNvPr id="10" name="TextBox 9"/>
+          <p:cNvSpPr txBox="1"/>
+          <p:nvPr/>
+        </p:nvSpPr>
+        <p:spPr>
+          <a:xfrm>
+            <a:off x="10801807" y="6473952"/>
+            <a:ext cx="548640" cy="274320"/>
+          </a:xfrm>
+          <a:prstGeom prst="rect">
+            <a:avLst/>
+          </a:prstGeom>
+          <a:noFill/>
+        </p:spPr>
+        <p:txBody>
+          <a:bodyPr wrap="square" anchor="t" lIns="0" rIns="0" tIns="0" bIns="0">
+            <a:spAutoFit/>
+          </a:bodyPr>
+          <a:lstStyle/>
+          <a:p>
+            <a:pPr algn="r">
+              <a:lnSpc>
+                <a:spcPct val="106000"/>
+              </a:lnSpc>
+              <a:spcBef>
+                <a:spcPts val="0"/>
+              </a:spcBef>
+              <a:spcAft>
+                <a:spcPts val="0"/>
+              </a:spcAft>
+            </a:pPr>
+            <a:r>
+              <a:rPr sz="950" b="0">
+                <a:solidFill>
+                  <a:srgbClr val="8A9099"/>
+                </a:solidFill>
+                <a:latin typeface="Red Hat Text"/>
+              </a:rPr>
+              <a:t>11</a:t>
+            </a:r>
+          </a:p>
+        </p:txBody>
+      </p:sp>
+    </p:spTree>
+  </p:cSld>
+  <p:clrMapOvr>
+    <a:masterClrMapping/>
+  </p:clrMapOvr>
+</p:sld>
+</file>
+
+<file path=ppt/slides/slide13.xml><?xml version="1.0" encoding="utf-8"?>
+<p:sld xmlns:a="http://schemas.openxmlformats.org/drawingml/2006/main" xmlns:p="http://schemas.openxmlformats.org/presentationml/2006/main" xmlns:r="http://schemas.openxmlformats.org/officeDocument/2006/relationships">
+  <p:cSld>
+    <p:spTree>
+      <p:nvGrpSpPr>
+        <p:cNvPr id="1" name=""/>
+        <p:cNvGrpSpPr/>
+        <p:nvPr/>
+      </p:nvGrpSpPr>
+      <p:grpSpPr/>
+      <p:pic>
+        <p:nvPicPr>
+          <p:cNvPr id="2" name="Picture 1" descr="redhat_logo.jpg"/>
+          <p:cNvPicPr>
+            <a:picLocks noChangeAspect="1"/>
+          </p:cNvPicPr>
+          <p:nvPr/>
+        </p:nvPicPr>
+        <p:blipFill>
+          <a:blip r:embed="rId2"/>
+          <a:stretch>
+            <a:fillRect/>
+          </a:stretch>
+        </p:blipFill>
+        <p:spPr>
+          <a:xfrm>
+            <a:off x="10326319" y="475488"/>
+            <a:ext cx="1024128" cy="242248"/>
+          </a:xfrm>
+          <a:prstGeom prst="rect">
+            <a:avLst/>
+          </a:prstGeom>
+        </p:spPr>
+      </p:pic>
+      <p:sp>
+        <p:nvSpPr>
+          <p:cNvPr id="3" name="TextBox 2"/>
+          <p:cNvSpPr txBox="1"/>
+          <p:nvPr/>
+        </p:nvSpPr>
+        <p:spPr>
+          <a:xfrm>
+            <a:off x="841248" y="548640"/>
+            <a:ext cx="8595360" cy="274320"/>
+          </a:xfrm>
+          <a:prstGeom prst="rect">
+            <a:avLst/>
+          </a:prstGeom>
+          <a:noFill/>
+        </p:spPr>
+        <p:txBody>
+          <a:bodyPr wrap="square" anchor="t" lIns="0" rIns="0" tIns="0" bIns="0">
+            <a:spAutoFit/>
+          </a:bodyPr>
+          <a:lstStyle/>
+          <a:p>
+            <a:pPr algn="l">
+              <a:lnSpc>
+                <a:spcPct val="106000"/>
+              </a:lnSpc>
+              <a:spcBef>
+                <a:spcPts val="0"/>
+              </a:spcBef>
+              <a:spcAft>
+                <a:spcPts val="0"/>
+              </a:spcAft>
+            </a:pPr>
+            <a:r>
+              <a:rPr sz="1250" b="1" spc="220">
+                <a:solidFill>
+                  <a:srgbClr val="EE0000"/>
+                </a:solidFill>
+                <a:latin typeface="Red Hat Display"/>
+              </a:rPr>
+              <a:t>M14 · SECURING APPS WITH KEYCLOAK</a:t>
+            </a:r>
+          </a:p>
+        </p:txBody>
+      </p:sp>
+      <p:sp>
+        <p:nvSpPr>
+          <p:cNvPr id="4" name="TextBox 3"/>
+          <p:cNvSpPr txBox="1"/>
+          <p:nvPr/>
+        </p:nvSpPr>
+        <p:spPr>
+          <a:xfrm>
+            <a:off x="841248" y="877824"/>
+            <a:ext cx="10515600" cy="548640"/>
+          </a:xfrm>
+          <a:prstGeom prst="rect">
+            <a:avLst/>
+          </a:prstGeom>
+          <a:noFill/>
+        </p:spPr>
+        <p:txBody>
+          <a:bodyPr wrap="none" anchor="t" lIns="0" rIns="0" tIns="0" bIns="0">
+            <a:spAutoFit/>
+          </a:bodyPr>
+          <a:lstStyle/>
+          <a:p>
+            <a:pPr algn="l">
+              <a:lnSpc>
+                <a:spcPct val="100000"/>
+              </a:lnSpc>
+              <a:spcBef>
+                <a:spcPts val="0"/>
+              </a:spcBef>
+              <a:spcAft>
+                <a:spcPts val="0"/>
+              </a:spcAft>
+            </a:pPr>
+            <a:r>
+              <a:rPr sz="2500" b="1">
+                <a:solidFill>
+                  <a:srgbClr val="1A1A1A"/>
+                </a:solidFill>
+                <a:latin typeface="Red Hat Display"/>
+              </a:rPr>
+              <a:t>Security layer</a:t>
+            </a:r>
+          </a:p>
+        </p:txBody>
+      </p:sp>
+      <p:cxnSp>
+        <p:nvCxnSpPr>
+          <p:cNvPr id="5" name="Connector 4"/>
+          <p:cNvCxnSpPr/>
+          <p:nvPr/>
+        </p:nvCxnSpPr>
+        <p:spPr>
+          <a:xfrm>
+            <a:off x="841248" y="1554480"/>
+            <a:ext cx="1371600" cy="0"/>
+          </a:xfrm>
+          <a:prstGeom prst="bentConnector3">
+            <a:avLst/>
+          </a:prstGeom>
+          <a:ln w="31750">
+            <a:solidFill>
+              <a:srgbClr val="EE0000"/>
+            </a:solidFill>
+          </a:ln>
+          <a:effectLst/>
+        </p:spPr>
+        <p:style>
+          <a:lnRef idx="2">
+            <a:schemeClr val="accent1"/>
+          </a:lnRef>
+          <a:fillRef idx="0">
+            <a:schemeClr val="accent1"/>
+          </a:fillRef>
+          <a:effectRef idx="1">
+            <a:schemeClr val="accent1"/>
+          </a:effectRef>
+          <a:fontRef idx="minor">
+            <a:schemeClr val="tx1"/>
+          </a:fontRef>
+        </p:style>
+      </p:cxnSp>
+      <p:sp>
+        <p:nvSpPr>
+          <p:cNvPr id="6" name="Rounded Rectangle 5"/>
+          <p:cNvSpPr/>
+          <p:nvPr/>
+        </p:nvSpPr>
+        <p:spPr>
+          <a:xfrm>
+            <a:off x="841248" y="2331720"/>
+            <a:ext cx="10509199" cy="3794760"/>
+          </a:xfrm>
+          <a:prstGeom prst="roundRect">
+            <a:avLst>
+              <a:gd name="adj" fmla="val 4000"/>
+            </a:avLst>
+          </a:prstGeom>
+          <a:solidFill>
+            <a:srgbClr val="FFFFFF"/>
+          </a:solidFill>
+          <a:ln w="15240">
+            <a:solidFill>
+              <a:srgbClr val="DDE1E6"/>
+            </a:solidFill>
+          </a:ln>
+          <a:effectLst/>
+        </p:spPr>
+        <p:style>
+          <a:lnRef idx="1">
+            <a:schemeClr val="accent1"/>
+          </a:lnRef>
+          <a:fillRef idx="3">
+            <a:schemeClr val="accent1"/>
+          </a:fillRef>
+          <a:effectRef idx="2">
+            <a:schemeClr val="accent1"/>
+          </a:effectRef>
+          <a:fontRef idx="minor">
+            <a:schemeClr val="lt1"/>
+          </a:fontRef>
+        </p:style>
+        <p:txBody>
+          <a:bodyPr rtlCol="0" anchor="ctr"/>
+          <a:lstStyle/>
+          <a:p>
+            <a:pPr algn="ctr"/>
+          </a:p>
+        </p:txBody>
+      </p:sp>
+      <p:pic>
+        <p:nvPicPr>
+          <p:cNvPr id="7" name="Picture 6" descr="04-security-layer.png"/>
+          <p:cNvPicPr>
+            <a:picLocks noChangeAspect="1"/>
+          </p:cNvPicPr>
+          <p:nvPr/>
+        </p:nvPicPr>
+        <p:blipFill>
+          <a:blip r:embed="rId3"/>
+          <a:stretch>
+            <a:fillRect/>
+          </a:stretch>
+        </p:blipFill>
+        <p:spPr>
+          <a:xfrm>
+            <a:off x="4777761" y="2532888"/>
+            <a:ext cx="2636172" cy="3392424"/>
+          </a:xfrm>
+          <a:prstGeom prst="rect">
+            <a:avLst/>
+          </a:prstGeom>
+        </p:spPr>
+      </p:pic>
+      <p:cxnSp>
+        <p:nvCxnSpPr>
+          <p:cNvPr id="8" name="Connector 7"/>
+          <p:cNvCxnSpPr/>
+          <p:nvPr/>
+        </p:nvCxnSpPr>
+        <p:spPr>
+          <a:xfrm>
+            <a:off x="841248" y="6437376"/>
+            <a:ext cx="10509199" cy="0"/>
+          </a:xfrm>
+          <a:prstGeom prst="bentConnector3">
+            <a:avLst/>
+          </a:prstGeom>
+          <a:ln w="12700">
+            <a:solidFill>
+              <a:srgbClr val="DDE1E6"/>
+            </a:solidFill>
+          </a:ln>
+          <a:effectLst/>
+        </p:spPr>
+        <p:style>
+          <a:lnRef idx="2">
+            <a:schemeClr val="accent1"/>
+          </a:lnRef>
+          <a:fillRef idx="0">
+            <a:schemeClr val="accent1"/>
+          </a:fillRef>
+          <a:effectRef idx="1">
+            <a:schemeClr val="accent1"/>
+          </a:effectRef>
+          <a:fontRef idx="minor">
+            <a:schemeClr val="tx1"/>
+          </a:fontRef>
+        </p:style>
+      </p:cxnSp>
+      <p:sp>
+        <p:nvSpPr>
+          <p:cNvPr id="9" name="TextBox 8"/>
+          <p:cNvSpPr txBox="1"/>
+          <p:nvPr/>
+        </p:nvSpPr>
+        <p:spPr>
+          <a:xfrm>
+            <a:off x="841248" y="6473952"/>
+            <a:ext cx="7315200" cy="274320"/>
+          </a:xfrm>
+          <a:prstGeom prst="rect">
+            <a:avLst/>
+          </a:prstGeom>
+          <a:noFill/>
+        </p:spPr>
+        <p:txBody>
+          <a:bodyPr wrap="square" anchor="t" lIns="0" rIns="0" tIns="0" bIns="0">
+            <a:spAutoFit/>
+          </a:bodyPr>
+          <a:lstStyle/>
+          <a:p>
+            <a:pPr algn="l">
+              <a:lnSpc>
+                <a:spcPct val="106000"/>
+              </a:lnSpc>
+              <a:spcBef>
+                <a:spcPts val="0"/>
+              </a:spcBef>
+              <a:spcAft>
+                <a:spcPts val="0"/>
+              </a:spcAft>
+            </a:pPr>
+            <a:r>
+              <a:rPr sz="950" b="0">
+                <a:solidFill>
+                  <a:srgbClr val="8A9099"/>
+                </a:solidFill>
+                <a:latin typeface="Red Hat Text"/>
+              </a:rPr>
+              <a:t>CONFIDENTIAL</a:t>
+            </a:r>
+          </a:p>
+        </p:txBody>
+      </p:sp>
+      <p:sp>
+        <p:nvSpPr>
+          <p:cNvPr id="10" name="TextBox 9"/>
+          <p:cNvSpPr txBox="1"/>
+          <p:nvPr/>
+        </p:nvSpPr>
+        <p:spPr>
+          <a:xfrm>
+            <a:off x="10801807" y="6473952"/>
+            <a:ext cx="548640" cy="274320"/>
+          </a:xfrm>
+          <a:prstGeom prst="rect">
+            <a:avLst/>
+          </a:prstGeom>
+          <a:noFill/>
+        </p:spPr>
+        <p:txBody>
+          <a:bodyPr wrap="square" anchor="t" lIns="0" rIns="0" tIns="0" bIns="0">
+            <a:spAutoFit/>
+          </a:bodyPr>
+          <a:lstStyle/>
+          <a:p>
+            <a:pPr algn="r">
+              <a:lnSpc>
+                <a:spcPct val="106000"/>
+              </a:lnSpc>
+              <a:spcBef>
+                <a:spcPts val="0"/>
+              </a:spcBef>
+              <a:spcAft>
+                <a:spcPts val="0"/>
+              </a:spcAft>
+            </a:pPr>
+            <a:r>
+              <a:rPr sz="950" b="0">
+                <a:solidFill>
+                  <a:srgbClr val="8A9099"/>
+                </a:solidFill>
+                <a:latin typeface="Red Hat Text"/>
+              </a:rPr>
+              <a:t>12</a:t>
+            </a:r>
+          </a:p>
+        </p:txBody>
+      </p:sp>
+    </p:spTree>
+  </p:cSld>
+  <p:clrMapOvr>
+    <a:masterClrMapping/>
+  </p:clrMapOvr>
+</p:sld>
+</file>
+
+<file path=ppt/slides/slide14.xml><?xml version="1.0" encoding="utf-8"?>
+<p:sld xmlns:a="http://schemas.openxmlformats.org/drawingml/2006/main" xmlns:p="http://schemas.openxmlformats.org/presentationml/2006/main" xmlns:r="http://schemas.openxmlformats.org/officeDocument/2006/relationships">
+  <p:cSld>
+    <p:spTree>
+      <p:nvGrpSpPr>
+        <p:cNvPr id="1" name=""/>
+        <p:cNvGrpSpPr/>
+        <p:nvPr/>
+      </p:nvGrpSpPr>
+      <p:grpSpPr/>
+      <p:pic>
+        <p:nvPicPr>
+          <p:cNvPr id="2" name="Picture 1" descr="redhat_logo.jpg"/>
+          <p:cNvPicPr>
+            <a:picLocks noChangeAspect="1"/>
+          </p:cNvPicPr>
+          <p:nvPr/>
+        </p:nvPicPr>
+        <p:blipFill>
+          <a:blip r:embed="rId2"/>
+          <a:stretch>
+            <a:fillRect/>
+          </a:stretch>
+        </p:blipFill>
+        <p:spPr>
+          <a:xfrm>
+            <a:off x="10326319" y="475488"/>
+            <a:ext cx="1024128" cy="242248"/>
+          </a:xfrm>
+          <a:prstGeom prst="rect">
+            <a:avLst/>
+          </a:prstGeom>
+        </p:spPr>
+      </p:pic>
+      <p:sp>
+        <p:nvSpPr>
+          <p:cNvPr id="3" name="TextBox 2"/>
+          <p:cNvSpPr txBox="1"/>
+          <p:nvPr/>
+        </p:nvSpPr>
+        <p:spPr>
+          <a:xfrm>
+            <a:off x="841248" y="548640"/>
+            <a:ext cx="8595360" cy="274320"/>
+          </a:xfrm>
+          <a:prstGeom prst="rect">
+            <a:avLst/>
+          </a:prstGeom>
+          <a:noFill/>
+        </p:spPr>
+        <p:txBody>
+          <a:bodyPr wrap="square" anchor="t" lIns="0" rIns="0" tIns="0" bIns="0">
+            <a:spAutoFit/>
+          </a:bodyPr>
+          <a:lstStyle/>
+          <a:p>
+            <a:pPr algn="l">
+              <a:lnSpc>
+                <a:spcPct val="106000"/>
+              </a:lnSpc>
+              <a:spcBef>
+                <a:spcPts val="0"/>
+              </a:spcBef>
+              <a:spcAft>
+                <a:spcPts val="0"/>
+              </a:spcAft>
+            </a:pPr>
+            <a:r>
+              <a:rPr sz="1250" b="1" spc="220">
+                <a:solidFill>
+                  <a:srgbClr val="EE0000"/>
+                </a:solidFill>
+                <a:latin typeface="Red Hat Display"/>
+              </a:rPr>
+              <a:t>M14 · SECURING APPS WITH KEYCLOAK</a:t>
+            </a:r>
+          </a:p>
+        </p:txBody>
+      </p:sp>
+      <p:sp>
+        <p:nvSpPr>
+          <p:cNvPr id="4" name="TextBox 3"/>
+          <p:cNvSpPr txBox="1"/>
+          <p:nvPr/>
+        </p:nvSpPr>
+        <p:spPr>
+          <a:xfrm>
+            <a:off x="841248" y="877824"/>
+            <a:ext cx="10515600" cy="548640"/>
+          </a:xfrm>
+          <a:prstGeom prst="rect">
+            <a:avLst/>
+          </a:prstGeom>
+          <a:noFill/>
+        </p:spPr>
+        <p:txBody>
+          <a:bodyPr wrap="none" anchor="t" lIns="0" rIns="0" tIns="0" bIns="0">
+            <a:spAutoFit/>
+          </a:bodyPr>
+          <a:lstStyle/>
+          <a:p>
+            <a:pPr algn="l">
+              <a:lnSpc>
+                <a:spcPct val="100000"/>
+              </a:lnSpc>
+              <a:spcBef>
+                <a:spcPts val="0"/>
+              </a:spcBef>
+              <a:spcAft>
+                <a:spcPts val="0"/>
+              </a:spcAft>
+            </a:pPr>
+            <a:r>
+              <a:rPr sz="2500" b="1">
+                <a:solidFill>
+                  <a:srgbClr val="1A1A1A"/>
+                </a:solidFill>
+                <a:latin typeface="Red Hat Display"/>
+              </a:rPr>
+              <a:t>What you built</a:t>
+            </a:r>
+          </a:p>
+        </p:txBody>
+      </p:sp>
+      <p:cxnSp>
+        <p:nvCxnSpPr>
+          <p:cNvPr id="5" name="Connector 4"/>
+          <p:cNvCxnSpPr/>
+          <p:nvPr/>
+        </p:nvCxnSpPr>
+        <p:spPr>
+          <a:xfrm>
+            <a:off x="841248" y="1554480"/>
+            <a:ext cx="1371600" cy="0"/>
+          </a:xfrm>
+          <a:prstGeom prst="bentConnector3">
+            <a:avLst/>
+          </a:prstGeom>
+          <a:ln w="31750">
+            <a:solidFill>
+              <a:srgbClr val="EE0000"/>
+            </a:solidFill>
+          </a:ln>
+          <a:effectLst/>
+        </p:spPr>
+        <p:style>
+          <a:lnRef idx="2">
+            <a:schemeClr val="accent1"/>
+          </a:lnRef>
+          <a:fillRef idx="0">
+            <a:schemeClr val="accent1"/>
+          </a:fillRef>
+          <a:effectRef idx="1">
+            <a:schemeClr val="accent1"/>
+          </a:effectRef>
+          <a:fontRef idx="minor">
+            <a:schemeClr val="tx1"/>
+          </a:fontRef>
+        </p:style>
+      </p:cxnSp>
+      <p:sp>
+        <p:nvSpPr>
+          <p:cNvPr id="6" name="Rounded Rectangle 5"/>
+          <p:cNvSpPr/>
+          <p:nvPr/>
+        </p:nvSpPr>
+        <p:spPr>
+          <a:xfrm>
+            <a:off x="841248" y="2331720"/>
+            <a:ext cx="10509199" cy="3794760"/>
+          </a:xfrm>
+          <a:prstGeom prst="roundRect">
+            <a:avLst>
+              <a:gd name="adj" fmla="val 4000"/>
+            </a:avLst>
+          </a:prstGeom>
+          <a:solidFill>
+            <a:srgbClr val="FFFFFF"/>
+          </a:solidFill>
+          <a:ln w="15240">
+            <a:solidFill>
+              <a:srgbClr val="DDE1E6"/>
+            </a:solidFill>
+          </a:ln>
+          <a:effectLst/>
+        </p:spPr>
+        <p:style>
+          <a:lnRef idx="1">
+            <a:schemeClr val="accent1"/>
+          </a:lnRef>
+          <a:fillRef idx="3">
+            <a:schemeClr val="accent1"/>
+          </a:fillRef>
+          <a:effectRef idx="2">
+            <a:schemeClr val="accent1"/>
+          </a:effectRef>
+          <a:fontRef idx="minor">
+            <a:schemeClr val="lt1"/>
+          </a:fontRef>
+        </p:style>
+        <p:txBody>
+          <a:bodyPr rtlCol="0" anchor="ctr"/>
+          <a:lstStyle/>
+          <a:p>
+            <a:pPr algn="ctr"/>
+          </a:p>
+        </p:txBody>
+      </p:sp>
+      <p:pic>
+        <p:nvPicPr>
+          <p:cNvPr id="7" name="Picture 6" descr="07-what-you-built.png"/>
+          <p:cNvPicPr>
+            <a:picLocks noChangeAspect="1"/>
+          </p:cNvPicPr>
+          <p:nvPr/>
+        </p:nvPicPr>
+        <p:blipFill>
+          <a:blip r:embed="rId3"/>
+          <a:stretch>
+            <a:fillRect/>
+          </a:stretch>
+        </p:blipFill>
+        <p:spPr>
+          <a:xfrm>
+            <a:off x="1042416" y="3111028"/>
+            <a:ext cx="10106863" cy="2236143"/>
+          </a:xfrm>
+          <a:prstGeom prst="rect">
+            <a:avLst/>
+          </a:prstGeom>
+        </p:spPr>
+      </p:pic>
+      <p:cxnSp>
+        <p:nvCxnSpPr>
+          <p:cNvPr id="8" name="Connector 7"/>
+          <p:cNvCxnSpPr/>
+          <p:nvPr/>
+        </p:nvCxnSpPr>
+        <p:spPr>
+          <a:xfrm>
+            <a:off x="841248" y="6437376"/>
+            <a:ext cx="10509199" cy="0"/>
+          </a:xfrm>
+          <a:prstGeom prst="bentConnector3">
+            <a:avLst/>
+          </a:prstGeom>
+          <a:ln w="12700">
+            <a:solidFill>
+              <a:srgbClr val="DDE1E6"/>
+            </a:solidFill>
+          </a:ln>
+          <a:effectLst/>
+        </p:spPr>
+        <p:style>
+          <a:lnRef idx="2">
+            <a:schemeClr val="accent1"/>
+          </a:lnRef>
+          <a:fillRef idx="0">
+            <a:schemeClr val="accent1"/>
+          </a:fillRef>
+          <a:effectRef idx="1">
+            <a:schemeClr val="accent1"/>
+          </a:effectRef>
+          <a:fontRef idx="minor">
+            <a:schemeClr val="tx1"/>
+          </a:fontRef>
+        </p:style>
+      </p:cxnSp>
+      <p:sp>
+        <p:nvSpPr>
+          <p:cNvPr id="9" name="TextBox 8"/>
+          <p:cNvSpPr txBox="1"/>
+          <p:nvPr/>
+        </p:nvSpPr>
+        <p:spPr>
+          <a:xfrm>
+            <a:off x="841248" y="6473952"/>
+            <a:ext cx="7315200" cy="274320"/>
+          </a:xfrm>
+          <a:prstGeom prst="rect">
+            <a:avLst/>
+          </a:prstGeom>
+          <a:noFill/>
+        </p:spPr>
+        <p:txBody>
+          <a:bodyPr wrap="square" anchor="t" lIns="0" rIns="0" tIns="0" bIns="0">
+            <a:spAutoFit/>
+          </a:bodyPr>
+          <a:lstStyle/>
+          <a:p>
+            <a:pPr algn="l">
+              <a:lnSpc>
+                <a:spcPct val="106000"/>
+              </a:lnSpc>
+              <a:spcBef>
+                <a:spcPts val="0"/>
+              </a:spcBef>
+              <a:spcAft>
+                <a:spcPts val="0"/>
+              </a:spcAft>
+            </a:pPr>
+            <a:r>
+              <a:rPr sz="950" b="0">
+                <a:solidFill>
+                  <a:srgbClr val="8A9099"/>
+                </a:solidFill>
+                <a:latin typeface="Red Hat Text"/>
+              </a:rPr>
+              <a:t>CONFIDENTIAL</a:t>
+            </a:r>
+          </a:p>
+        </p:txBody>
+      </p:sp>
+      <p:sp>
+        <p:nvSpPr>
+          <p:cNvPr id="10" name="TextBox 9"/>
+          <p:cNvSpPr txBox="1"/>
+          <p:nvPr/>
+        </p:nvSpPr>
+        <p:spPr>
+          <a:xfrm>
+            <a:off x="10801807" y="6473952"/>
+            <a:ext cx="548640" cy="274320"/>
+          </a:xfrm>
+          <a:prstGeom prst="rect">
+            <a:avLst/>
+          </a:prstGeom>
+          <a:noFill/>
+        </p:spPr>
+        <p:txBody>
+          <a:bodyPr wrap="square" anchor="t" lIns="0" rIns="0" tIns="0" bIns="0">
+            <a:spAutoFit/>
+          </a:bodyPr>
+          <a:lstStyle/>
+          <a:p>
+            <a:pPr algn="r">
+              <a:lnSpc>
+                <a:spcPct val="106000"/>
+              </a:lnSpc>
+              <a:spcBef>
+                <a:spcPts val="0"/>
+              </a:spcBef>
+              <a:spcAft>
+                <a:spcPts val="0"/>
+              </a:spcAft>
+            </a:pPr>
+            <a:r>
+              <a:rPr sz="950" b="0">
+                <a:solidFill>
+                  <a:srgbClr val="8A9099"/>
+                </a:solidFill>
+                <a:latin typeface="Red Hat Text"/>
+              </a:rPr>
+              <a:t>13</a:t>
+            </a:r>
+          </a:p>
+        </p:txBody>
+      </p:sp>
+    </p:spTree>
+  </p:cSld>
+  <p:clrMapOvr>
+    <a:masterClrMapping/>
+  </p:clrMapOvr>
+</p:sld>
+</file>
+
 <file path=ppt/slides/slide2.xml><?xml version="1.0" encoding="utf-8"?>
 <p:sld xmlns:a="http://schemas.openxmlformats.org/drawingml/2006/main" xmlns:p="http://schemas.openxmlformats.org/presentationml/2006/main" xmlns:r="http://schemas.openxmlformats.org/officeDocument/2006/relationships">
   <p:cSld>
@@ -4423,11 +6608,11 @@
         <p:spPr>
           <a:xfrm>
             <a:off x="841248" y="2670048"/>
-            <a:ext cx="5715000" cy="530352"/>
+            <a:ext cx="5138928" cy="786384"/>
           </a:xfrm>
           <a:prstGeom prst="roundRect">
             <a:avLst>
-              <a:gd name="adj" fmla="val 6000"/>
+              <a:gd name="adj" fmla="val 7000"/>
             </a:avLst>
           </a:prstGeom>
           <a:solidFill>
@@ -4462,9 +6647,55 @@
           </a:p>
         </p:txBody>
       </p:sp>
+      <p:sp>
+        <p:nvSpPr>
+          <p:cNvPr id="8" name="Rounded Rectangle 7"/>
+          <p:cNvSpPr/>
+          <p:nvPr/>
+        </p:nvSpPr>
+        <p:spPr>
+          <a:xfrm>
+            <a:off x="987552" y="2807208"/>
+            <a:ext cx="512064" cy="512064"/>
+          </a:xfrm>
+          <a:prstGeom prst="roundRect">
+            <a:avLst>
+              <a:gd name="adj" fmla="val 26000"/>
+            </a:avLst>
+          </a:prstGeom>
+          <a:solidFill>
+            <a:srgbClr val="EE0000"/>
+          </a:solidFill>
+          <a:ln>
+            <a:noFill/>
+          </a:ln>
+          <a:effectLst/>
+        </p:spPr>
+        <p:style>
+          <a:lnRef idx="1">
+            <a:schemeClr val="accent1"/>
+          </a:lnRef>
+          <a:fillRef idx="3">
+            <a:schemeClr val="accent1"/>
+          </a:fillRef>
+          <a:effectRef idx="2">
+            <a:schemeClr val="accent1"/>
+          </a:effectRef>
+          <a:fontRef idx="minor">
+            <a:schemeClr val="lt1"/>
+          </a:fontRef>
+        </p:style>
+        <p:txBody>
+          <a:bodyPr rtlCol="0" anchor="ctr"/>
+          <a:lstStyle/>
+          <a:p>
+            <a:pPr algn="ctr"/>
+          </a:p>
+        </p:txBody>
+      </p:sp>
       <p:pic>
         <p:nvPicPr>
-          <p:cNvPr id="8" name="Picture 7" descr="check_steel.png"/>
+          <p:cNvPr id="9" name="Picture 8" descr="check_white.png"/>
           <p:cNvPicPr>
             <a:picLocks noChangeAspect="1"/>
           </p:cNvPicPr>
@@ -4478,8 +6709,8 @@
         </p:blipFill>
         <p:spPr>
           <a:xfrm>
-            <a:off x="987552" y="2816352"/>
-            <a:ext cx="237744" cy="237744"/>
+            <a:off x="1110447" y="2930103"/>
+            <a:ext cx="266273" cy="266273"/>
           </a:xfrm>
           <a:prstGeom prst="rect">
             <a:avLst/>
@@ -4488,14 +6719,14 @@
       </p:pic>
       <p:sp>
         <p:nvSpPr>
-          <p:cNvPr id="9" name="TextBox 8"/>
+          <p:cNvPr id="10" name="TextBox 9"/>
           <p:cNvSpPr txBox="1"/>
           <p:nvPr/>
         </p:nvSpPr>
         <p:spPr>
           <a:xfrm>
-            <a:off x="1353312" y="2670048"/>
-            <a:ext cx="5029200" cy="530352"/>
+            <a:off x="1627632" y="2670048"/>
+            <a:ext cx="4206240" cy="786384"/>
           </a:xfrm>
           <a:prstGeom prst="rect">
             <a:avLst/>
@@ -4520,7 +6751,7 @@
               </a:spcAft>
             </a:pPr>
             <a:r>
-              <a:rPr sz="1200" b="0">
+              <a:rPr sz="1150" b="0">
                 <a:solidFill>
                   <a:srgbClr val="1A1A1A"/>
                 </a:solidFill>
@@ -4533,18 +6764,18 @@
       </p:sp>
       <p:sp>
         <p:nvSpPr>
-          <p:cNvPr id="10" name="Rounded Rectangle 9"/>
+          <p:cNvPr id="11" name="Rounded Rectangle 10"/>
           <p:cNvSpPr/>
           <p:nvPr/>
         </p:nvSpPr>
         <p:spPr>
           <a:xfrm>
-            <a:off x="841248" y="3273552"/>
-            <a:ext cx="5715000" cy="530352"/>
+            <a:off x="6254496" y="2670048"/>
+            <a:ext cx="5138928" cy="786384"/>
           </a:xfrm>
           <a:prstGeom prst="roundRect">
             <a:avLst>
-              <a:gd name="adj" fmla="val 6000"/>
+              <a:gd name="adj" fmla="val 7000"/>
             </a:avLst>
           </a:prstGeom>
           <a:solidFill>
@@ -4579,9 +6810,55 @@
           </a:p>
         </p:txBody>
       </p:sp>
+      <p:sp>
+        <p:nvSpPr>
+          <p:cNvPr id="12" name="Rounded Rectangle 11"/>
+          <p:cNvSpPr/>
+          <p:nvPr/>
+        </p:nvSpPr>
+        <p:spPr>
+          <a:xfrm>
+            <a:off x="6400800" y="2807208"/>
+            <a:ext cx="512064" cy="512064"/>
+          </a:xfrm>
+          <a:prstGeom prst="roundRect">
+            <a:avLst>
+              <a:gd name="adj" fmla="val 26000"/>
+            </a:avLst>
+          </a:prstGeom>
+          <a:solidFill>
+            <a:srgbClr val="EE0000"/>
+          </a:solidFill>
+          <a:ln>
+            <a:noFill/>
+          </a:ln>
+          <a:effectLst/>
+        </p:spPr>
+        <p:style>
+          <a:lnRef idx="1">
+            <a:schemeClr val="accent1"/>
+          </a:lnRef>
+          <a:fillRef idx="3">
+            <a:schemeClr val="accent1"/>
+          </a:fillRef>
+          <a:effectRef idx="2">
+            <a:schemeClr val="accent1"/>
+          </a:effectRef>
+          <a:fontRef idx="minor">
+            <a:schemeClr val="lt1"/>
+          </a:fontRef>
+        </p:style>
+        <p:txBody>
+          <a:bodyPr rtlCol="0" anchor="ctr"/>
+          <a:lstStyle/>
+          <a:p>
+            <a:pPr algn="ctr"/>
+          </a:p>
+        </p:txBody>
+      </p:sp>
       <p:pic>
         <p:nvPicPr>
-          <p:cNvPr id="11" name="Picture 10" descr="check_steel.png"/>
+          <p:cNvPr id="13" name="Picture 12" descr="check_white.png"/>
           <p:cNvPicPr>
             <a:picLocks noChangeAspect="1"/>
           </p:cNvPicPr>
@@ -4595,8 +6872,8 @@
         </p:blipFill>
         <p:spPr>
           <a:xfrm>
-            <a:off x="987552" y="3419856"/>
-            <a:ext cx="237744" cy="237744"/>
+            <a:off x="6523695" y="2930103"/>
+            <a:ext cx="266273" cy="266273"/>
           </a:xfrm>
           <a:prstGeom prst="rect">
             <a:avLst/>
@@ -4605,14 +6882,14 @@
       </p:pic>
       <p:sp>
         <p:nvSpPr>
-          <p:cNvPr id="12" name="TextBox 11"/>
+          <p:cNvPr id="14" name="TextBox 13"/>
           <p:cNvSpPr txBox="1"/>
           <p:nvPr/>
         </p:nvSpPr>
         <p:spPr>
           <a:xfrm>
-            <a:off x="1353312" y="3273552"/>
-            <a:ext cx="5029200" cy="530352"/>
+            <a:off x="7040880" y="2670048"/>
+            <a:ext cx="4206240" cy="786384"/>
           </a:xfrm>
           <a:prstGeom prst="rect">
             <a:avLst/>
@@ -4637,7 +6914,7 @@
               </a:spcAft>
             </a:pPr>
             <a:r>
-              <a:rPr sz="1200" b="0">
+              <a:rPr sz="1150" b="0">
                 <a:solidFill>
                   <a:srgbClr val="1A1A1A"/>
                 </a:solidFill>
@@ -4650,18 +6927,18 @@
       </p:sp>
       <p:sp>
         <p:nvSpPr>
-          <p:cNvPr id="13" name="Rounded Rectangle 12"/>
+          <p:cNvPr id="15" name="Rounded Rectangle 14"/>
           <p:cNvSpPr/>
           <p:nvPr/>
         </p:nvSpPr>
         <p:spPr>
           <a:xfrm>
-            <a:off x="841248" y="3877056"/>
-            <a:ext cx="5715000" cy="530352"/>
+            <a:off x="841248" y="3602736"/>
+            <a:ext cx="5138928" cy="786384"/>
           </a:xfrm>
           <a:prstGeom prst="roundRect">
             <a:avLst>
-              <a:gd name="adj" fmla="val 6000"/>
+              <a:gd name="adj" fmla="val 7000"/>
             </a:avLst>
           </a:prstGeom>
           <a:solidFill>
@@ -4696,9 +6973,55 @@
           </a:p>
         </p:txBody>
       </p:sp>
+      <p:sp>
+        <p:nvSpPr>
+          <p:cNvPr id="16" name="Rounded Rectangle 15"/>
+          <p:cNvSpPr/>
+          <p:nvPr/>
+        </p:nvSpPr>
+        <p:spPr>
+          <a:xfrm>
+            <a:off x="987552" y="3739896"/>
+            <a:ext cx="512064" cy="512064"/>
+          </a:xfrm>
+          <a:prstGeom prst="roundRect">
+            <a:avLst>
+              <a:gd name="adj" fmla="val 26000"/>
+            </a:avLst>
+          </a:prstGeom>
+          <a:solidFill>
+            <a:srgbClr val="EE0000"/>
+          </a:solidFill>
+          <a:ln>
+            <a:noFill/>
+          </a:ln>
+          <a:effectLst/>
+        </p:spPr>
+        <p:style>
+          <a:lnRef idx="1">
+            <a:schemeClr val="accent1"/>
+          </a:lnRef>
+          <a:fillRef idx="3">
+            <a:schemeClr val="accent1"/>
+          </a:fillRef>
+          <a:effectRef idx="2">
+            <a:schemeClr val="accent1"/>
+          </a:effectRef>
+          <a:fontRef idx="minor">
+            <a:schemeClr val="lt1"/>
+          </a:fontRef>
+        </p:style>
+        <p:txBody>
+          <a:bodyPr rtlCol="0" anchor="ctr"/>
+          <a:lstStyle/>
+          <a:p>
+            <a:pPr algn="ctr"/>
+          </a:p>
+        </p:txBody>
+      </p:sp>
       <p:pic>
         <p:nvPicPr>
-          <p:cNvPr id="14" name="Picture 13" descr="check_steel.png"/>
+          <p:cNvPr id="17" name="Picture 16" descr="check_white.png"/>
           <p:cNvPicPr>
             <a:picLocks noChangeAspect="1"/>
           </p:cNvPicPr>
@@ -4712,8 +7035,8 @@
         </p:blipFill>
         <p:spPr>
           <a:xfrm>
-            <a:off x="987552" y="4023360"/>
-            <a:ext cx="237744" cy="237744"/>
+            <a:off x="1110447" y="3862791"/>
+            <a:ext cx="266273" cy="266273"/>
           </a:xfrm>
           <a:prstGeom prst="rect">
             <a:avLst/>
@@ -4722,14 +7045,14 @@
       </p:pic>
       <p:sp>
         <p:nvSpPr>
-          <p:cNvPr id="15" name="TextBox 14"/>
+          <p:cNvPr id="18" name="TextBox 17"/>
           <p:cNvSpPr txBox="1"/>
           <p:nvPr/>
         </p:nvSpPr>
         <p:spPr>
           <a:xfrm>
-            <a:off x="1353312" y="3877056"/>
-            <a:ext cx="5029200" cy="530352"/>
+            <a:off x="1627632" y="3602736"/>
+            <a:ext cx="4206240" cy="786384"/>
           </a:xfrm>
           <a:prstGeom prst="rect">
             <a:avLst/>
@@ -4754,7 +7077,7 @@
               </a:spcAft>
             </a:pPr>
             <a:r>
-              <a:rPr sz="1200" b="0">
+              <a:rPr sz="1150" b="0">
                 <a:solidFill>
                   <a:srgbClr val="1A1A1A"/>
                 </a:solidFill>
@@ -4767,18 +7090,18 @@
       </p:sp>
       <p:sp>
         <p:nvSpPr>
-          <p:cNvPr id="16" name="Rounded Rectangle 15"/>
+          <p:cNvPr id="19" name="Rounded Rectangle 18"/>
           <p:cNvSpPr/>
           <p:nvPr/>
         </p:nvSpPr>
         <p:spPr>
           <a:xfrm>
-            <a:off x="841248" y="4480560"/>
-            <a:ext cx="5715000" cy="530352"/>
+            <a:off x="6254496" y="3602736"/>
+            <a:ext cx="5138928" cy="786384"/>
           </a:xfrm>
           <a:prstGeom prst="roundRect">
             <a:avLst>
-              <a:gd name="adj" fmla="val 6000"/>
+              <a:gd name="adj" fmla="val 7000"/>
             </a:avLst>
           </a:prstGeom>
           <a:solidFill>
@@ -4813,9 +7136,55 @@
           </a:p>
         </p:txBody>
       </p:sp>
+      <p:sp>
+        <p:nvSpPr>
+          <p:cNvPr id="20" name="Rounded Rectangle 19"/>
+          <p:cNvSpPr/>
+          <p:nvPr/>
+        </p:nvSpPr>
+        <p:spPr>
+          <a:xfrm>
+            <a:off x="6400800" y="3739896"/>
+            <a:ext cx="512064" cy="512064"/>
+          </a:xfrm>
+          <a:prstGeom prst="roundRect">
+            <a:avLst>
+              <a:gd name="adj" fmla="val 26000"/>
+            </a:avLst>
+          </a:prstGeom>
+          <a:solidFill>
+            <a:srgbClr val="EE0000"/>
+          </a:solidFill>
+          <a:ln>
+            <a:noFill/>
+          </a:ln>
+          <a:effectLst/>
+        </p:spPr>
+        <p:style>
+          <a:lnRef idx="1">
+            <a:schemeClr val="accent1"/>
+          </a:lnRef>
+          <a:fillRef idx="3">
+            <a:schemeClr val="accent1"/>
+          </a:fillRef>
+          <a:effectRef idx="2">
+            <a:schemeClr val="accent1"/>
+          </a:effectRef>
+          <a:fontRef idx="minor">
+            <a:schemeClr val="lt1"/>
+          </a:fontRef>
+        </p:style>
+        <p:txBody>
+          <a:bodyPr rtlCol="0" anchor="ctr"/>
+          <a:lstStyle/>
+          <a:p>
+            <a:pPr algn="ctr"/>
+          </a:p>
+        </p:txBody>
+      </p:sp>
       <p:pic>
         <p:nvPicPr>
-          <p:cNvPr id="17" name="Picture 16" descr="check_steel.png"/>
+          <p:cNvPr id="21" name="Picture 20" descr="check_white.png"/>
           <p:cNvPicPr>
             <a:picLocks noChangeAspect="1"/>
           </p:cNvPicPr>
@@ -4829,8 +7198,8 @@
         </p:blipFill>
         <p:spPr>
           <a:xfrm>
-            <a:off x="987552" y="4626864"/>
-            <a:ext cx="237744" cy="237744"/>
+            <a:off x="6523695" y="3862791"/>
+            <a:ext cx="266273" cy="266273"/>
           </a:xfrm>
           <a:prstGeom prst="rect">
             <a:avLst/>
@@ -4839,14 +7208,14 @@
       </p:pic>
       <p:sp>
         <p:nvSpPr>
-          <p:cNvPr id="18" name="TextBox 17"/>
+          <p:cNvPr id="22" name="TextBox 21"/>
           <p:cNvSpPr txBox="1"/>
           <p:nvPr/>
         </p:nvSpPr>
         <p:spPr>
           <a:xfrm>
-            <a:off x="1353312" y="4480560"/>
-            <a:ext cx="5029200" cy="530352"/>
+            <a:off x="7040880" y="3602736"/>
+            <a:ext cx="4206240" cy="786384"/>
           </a:xfrm>
           <a:prstGeom prst="rect">
             <a:avLst/>
@@ -4871,7 +7240,7 @@
               </a:spcAft>
             </a:pPr>
             <a:r>
-              <a:rPr sz="1200" b="0">
+              <a:rPr sz="1150" b="0">
                 <a:solidFill>
                   <a:srgbClr val="1A1A1A"/>
                 </a:solidFill>
@@ -4884,18 +7253,18 @@
       </p:sp>
       <p:sp>
         <p:nvSpPr>
-          <p:cNvPr id="19" name="Rounded Rectangle 18"/>
+          <p:cNvPr id="23" name="Rounded Rectangle 22"/>
           <p:cNvSpPr/>
           <p:nvPr/>
         </p:nvSpPr>
         <p:spPr>
           <a:xfrm>
-            <a:off x="841248" y="5084064"/>
-            <a:ext cx="5715000" cy="530352"/>
+            <a:off x="841248" y="4535424"/>
+            <a:ext cx="5138928" cy="786384"/>
           </a:xfrm>
           <a:prstGeom prst="roundRect">
             <a:avLst>
-              <a:gd name="adj" fmla="val 6000"/>
+              <a:gd name="adj" fmla="val 7000"/>
             </a:avLst>
           </a:prstGeom>
           <a:solidFill>
@@ -4930,9 +7299,55 @@
           </a:p>
         </p:txBody>
       </p:sp>
+      <p:sp>
+        <p:nvSpPr>
+          <p:cNvPr id="24" name="Rounded Rectangle 23"/>
+          <p:cNvSpPr/>
+          <p:nvPr/>
+        </p:nvSpPr>
+        <p:spPr>
+          <a:xfrm>
+            <a:off x="987552" y="4672584"/>
+            <a:ext cx="512064" cy="512064"/>
+          </a:xfrm>
+          <a:prstGeom prst="roundRect">
+            <a:avLst>
+              <a:gd name="adj" fmla="val 26000"/>
+            </a:avLst>
+          </a:prstGeom>
+          <a:solidFill>
+            <a:srgbClr val="EE0000"/>
+          </a:solidFill>
+          <a:ln>
+            <a:noFill/>
+          </a:ln>
+          <a:effectLst/>
+        </p:spPr>
+        <p:style>
+          <a:lnRef idx="1">
+            <a:schemeClr val="accent1"/>
+          </a:lnRef>
+          <a:fillRef idx="3">
+            <a:schemeClr val="accent1"/>
+          </a:fillRef>
+          <a:effectRef idx="2">
+            <a:schemeClr val="accent1"/>
+          </a:effectRef>
+          <a:fontRef idx="minor">
+            <a:schemeClr val="lt1"/>
+          </a:fontRef>
+        </p:style>
+        <p:txBody>
+          <a:bodyPr rtlCol="0" anchor="ctr"/>
+          <a:lstStyle/>
+          <a:p>
+            <a:pPr algn="ctr"/>
+          </a:p>
+        </p:txBody>
+      </p:sp>
       <p:pic>
         <p:nvPicPr>
-          <p:cNvPr id="20" name="Picture 19" descr="check_steel.png"/>
+          <p:cNvPr id="25" name="Picture 24" descr="check_white.png"/>
           <p:cNvPicPr>
             <a:picLocks noChangeAspect="1"/>
           </p:cNvPicPr>
@@ -4946,8 +7361,8 @@
         </p:blipFill>
         <p:spPr>
           <a:xfrm>
-            <a:off x="987552" y="5230368"/>
-            <a:ext cx="237744" cy="237744"/>
+            <a:off x="1110447" y="4795479"/>
+            <a:ext cx="266273" cy="266273"/>
           </a:xfrm>
           <a:prstGeom prst="rect">
             <a:avLst/>
@@ -4956,14 +7371,14 @@
       </p:pic>
       <p:sp>
         <p:nvSpPr>
-          <p:cNvPr id="21" name="TextBox 20"/>
+          <p:cNvPr id="26" name="TextBox 25"/>
           <p:cNvSpPr txBox="1"/>
           <p:nvPr/>
         </p:nvSpPr>
         <p:spPr>
           <a:xfrm>
-            <a:off x="1353312" y="5084064"/>
-            <a:ext cx="5029200" cy="530352"/>
+            <a:off x="1627632" y="4535424"/>
+            <a:ext cx="4206240" cy="786384"/>
           </a:xfrm>
           <a:prstGeom prst="rect">
             <a:avLst/>
@@ -4988,221 +7403,13 @@
               </a:spcAft>
             </a:pPr>
             <a:r>
-              <a:rPr sz="1200" b="0">
+              <a:rPr sz="1150" b="0">
                 <a:solidFill>
                   <a:srgbClr val="1A1A1A"/>
                 </a:solidFill>
                 <a:latin typeface="Red Hat Text"/>
               </a:rPr>
               <a:t>This module puts a front door on the Parasol apps — with a product you already own</a:t>
-            </a:r>
-          </a:p>
-        </p:txBody>
-      </p:sp>
-      <p:sp>
-        <p:nvSpPr>
-          <p:cNvPr id="22" name="Rounded Rectangle 21"/>
-          <p:cNvSpPr/>
-          <p:nvPr/>
-        </p:nvSpPr>
-        <p:spPr>
-          <a:xfrm>
-            <a:off x="6812280" y="2670048"/>
-            <a:ext cx="4538167" cy="2944368"/>
-          </a:xfrm>
-          <a:prstGeom prst="roundRect">
-            <a:avLst>
-              <a:gd name="adj" fmla="val 4000"/>
-            </a:avLst>
-          </a:prstGeom>
-          <a:solidFill>
-            <a:srgbClr val="FFFFFF"/>
-          </a:solidFill>
-          <a:ln w="15240">
-            <a:solidFill>
-              <a:srgbClr val="DDE1E6"/>
-            </a:solidFill>
-          </a:ln>
-          <a:effectLst/>
-        </p:spPr>
-        <p:style>
-          <a:lnRef idx="1">
-            <a:schemeClr val="accent1"/>
-          </a:lnRef>
-          <a:fillRef idx="3">
-            <a:schemeClr val="accent1"/>
-          </a:fillRef>
-          <a:effectRef idx="2">
-            <a:schemeClr val="accent1"/>
-          </a:effectRef>
-          <a:fontRef idx="minor">
-            <a:schemeClr val="lt1"/>
-          </a:fontRef>
-        </p:style>
-        <p:txBody>
-          <a:bodyPr rtlCol="0" anchor="ctr"/>
-          <a:lstStyle/>
-          <a:p>
-            <a:pPr algn="ctr"/>
-          </a:p>
-        </p:txBody>
-      </p:sp>
-      <p:sp>
-        <p:nvSpPr>
-          <p:cNvPr id="23" name="Rounded Rectangle 22"/>
-          <p:cNvSpPr/>
-          <p:nvPr/>
-        </p:nvSpPr>
-        <p:spPr>
-          <a:xfrm>
-            <a:off x="7013448" y="2871216"/>
-            <a:ext cx="1298448" cy="310896"/>
-          </a:xfrm>
-          <a:prstGeom prst="roundRect">
-            <a:avLst>
-              <a:gd name="adj" fmla="val 50000"/>
-            </a:avLst>
-          </a:prstGeom>
-          <a:solidFill>
-            <a:srgbClr val="FCECEC"/>
-          </a:solidFill>
-          <a:ln>
-            <a:noFill/>
-          </a:ln>
-          <a:effectLst/>
-        </p:spPr>
-        <p:style>
-          <a:lnRef idx="1">
-            <a:schemeClr val="accent1"/>
-          </a:lnRef>
-          <a:fillRef idx="3">
-            <a:schemeClr val="accent1"/>
-          </a:fillRef>
-          <a:effectRef idx="2">
-            <a:schemeClr val="accent1"/>
-          </a:effectRef>
-          <a:fontRef idx="minor">
-            <a:schemeClr val="lt1"/>
-          </a:fontRef>
-        </p:style>
-        <p:txBody>
-          <a:bodyPr rtlCol="0" anchor="ctr"/>
-          <a:lstStyle/>
-          <a:p>
-            <a:pPr algn="ctr"/>
-          </a:p>
-        </p:txBody>
-      </p:sp>
-      <p:sp>
-        <p:nvSpPr>
-          <p:cNvPr id="24" name="TextBox 23"/>
-          <p:cNvSpPr txBox="1"/>
-          <p:nvPr/>
-        </p:nvSpPr>
-        <p:spPr>
-          <a:xfrm>
-            <a:off x="7013448" y="2871216"/>
-            <a:ext cx="1298448" cy="310896"/>
-          </a:xfrm>
-          <a:prstGeom prst="rect">
-            <a:avLst/>
-          </a:prstGeom>
-          <a:noFill/>
-        </p:spPr>
-        <p:txBody>
-          <a:bodyPr wrap="none" anchor="ctr" lIns="0" rIns="0" tIns="0" bIns="0">
-            <a:spAutoFit/>
-          </a:bodyPr>
-          <a:lstStyle/>
-          <a:p>
-            <a:pPr algn="ctr">
-              <a:lnSpc>
-                <a:spcPct val="106000"/>
-              </a:lnSpc>
-              <a:spcBef>
-                <a:spcPts val="0"/>
-              </a:spcBef>
-              <a:spcAft>
-                <a:spcPts val="0"/>
-              </a:spcAft>
-            </a:pPr>
-            <a:r>
-              <a:rPr sz="850" b="1">
-                <a:solidFill>
-                  <a:srgbClr val="B80000"/>
-                </a:solidFill>
-                <a:latin typeface="Red Hat Display"/>
-              </a:rPr>
-              <a:t>MEDIA PASS</a:t>
-            </a:r>
-          </a:p>
-        </p:txBody>
-      </p:sp>
-      <p:pic>
-        <p:nvPicPr>
-          <p:cNvPr id="25" name="Picture 24" descr="eye_slate.png"/>
-          <p:cNvPicPr>
-            <a:picLocks noChangeAspect="1"/>
-          </p:cNvPicPr>
-          <p:nvPr/>
-        </p:nvPicPr>
-        <p:blipFill>
-          <a:blip r:embed="rId4"/>
-          <a:stretch>
-            <a:fillRect/>
-          </a:stretch>
-        </p:blipFill>
-        <p:spPr>
-          <a:xfrm>
-            <a:off x="8843619" y="3383280"/>
-            <a:ext cx="475488" cy="475488"/>
-          </a:xfrm>
-          <a:prstGeom prst="rect">
-            <a:avLst/>
-          </a:prstGeom>
-        </p:spPr>
-      </p:pic>
-      <p:sp>
-        <p:nvSpPr>
-          <p:cNvPr id="26" name="TextBox 25"/>
-          <p:cNvSpPr txBox="1"/>
-          <p:nvPr/>
-        </p:nvSpPr>
-        <p:spPr>
-          <a:xfrm>
-            <a:off x="7050024" y="3995928"/>
-            <a:ext cx="4062679" cy="1481328"/>
-          </a:xfrm>
-          <a:prstGeom prst="rect">
-            <a:avLst/>
-          </a:prstGeom>
-          <a:noFill/>
-        </p:spPr>
-        <p:txBody>
-          <a:bodyPr wrap="square" anchor="t" lIns="0" rIns="0" tIns="0" bIns="0">
-            <a:spAutoFit/>
-          </a:bodyPr>
-          <a:lstStyle/>
-          <a:p>
-            <a:pPr algn="l">
-              <a:lnSpc>
-                <a:spcPct val="120000"/>
-              </a:lnSpc>
-              <a:spcBef>
-                <a:spcPts val="0"/>
-              </a:spcBef>
-              <a:spcAft>
-                <a:spcPts val="0"/>
-              </a:spcAft>
-            </a:pPr>
-            <a:r>
-              <a:rPr sz="950" b="0">
-                <a:solidFill>
-                  <a:srgbClr val="8A9099"/>
-                </a:solidFill>
-                <a:latin typeface="Red Hat Text"/>
-              </a:rPr>
-              <a:t>A dark "claims API" tile spilling customer records to an anonymous stick-figure; a red "no auth" stamp.</a:t>
             </a:r>
           </a:p>
         </p:txBody>
@@ -5510,11 +7717,11 @@
         <p:spPr>
           <a:xfrm>
             <a:off x="841248" y="2395728"/>
-            <a:ext cx="5715000" cy="530352"/>
+            <a:ext cx="5138928" cy="786384"/>
           </a:xfrm>
           <a:prstGeom prst="roundRect">
             <a:avLst>
-              <a:gd name="adj" fmla="val 6000"/>
+              <a:gd name="adj" fmla="val 7000"/>
             </a:avLst>
           </a:prstGeom>
           <a:solidFill>
@@ -5549,9 +7756,55 @@
           </a:p>
         </p:txBody>
       </p:sp>
+      <p:sp>
+        <p:nvSpPr>
+          <p:cNvPr id="7" name="Rounded Rectangle 6"/>
+          <p:cNvSpPr/>
+          <p:nvPr/>
+        </p:nvSpPr>
+        <p:spPr>
+          <a:xfrm>
+            <a:off x="987552" y="2532888"/>
+            <a:ext cx="512064" cy="512064"/>
+          </a:xfrm>
+          <a:prstGeom prst="roundRect">
+            <a:avLst>
+              <a:gd name="adj" fmla="val 26000"/>
+            </a:avLst>
+          </a:prstGeom>
+          <a:solidFill>
+            <a:srgbClr val="EE0000"/>
+          </a:solidFill>
+          <a:ln>
+            <a:noFill/>
+          </a:ln>
+          <a:effectLst/>
+        </p:spPr>
+        <p:style>
+          <a:lnRef idx="1">
+            <a:schemeClr val="accent1"/>
+          </a:lnRef>
+          <a:fillRef idx="3">
+            <a:schemeClr val="accent1"/>
+          </a:fillRef>
+          <a:effectRef idx="2">
+            <a:schemeClr val="accent1"/>
+          </a:effectRef>
+          <a:fontRef idx="minor">
+            <a:schemeClr val="lt1"/>
+          </a:fontRef>
+        </p:style>
+        <p:txBody>
+          <a:bodyPr rtlCol="0" anchor="ctr"/>
+          <a:lstStyle/>
+          <a:p>
+            <a:pPr algn="ctr"/>
+          </a:p>
+        </p:txBody>
+      </p:sp>
       <p:pic>
         <p:nvPicPr>
-          <p:cNvPr id="7" name="Picture 6" descr="check_steel.png"/>
+          <p:cNvPr id="8" name="Picture 7" descr="check_white.png"/>
           <p:cNvPicPr>
             <a:picLocks noChangeAspect="1"/>
           </p:cNvPicPr>
@@ -5565,8 +7818,8 @@
         </p:blipFill>
         <p:spPr>
           <a:xfrm>
-            <a:off x="987552" y="2542032"/>
-            <a:ext cx="237744" cy="237744"/>
+            <a:off x="1110447" y="2655783"/>
+            <a:ext cx="266273" cy="266273"/>
           </a:xfrm>
           <a:prstGeom prst="rect">
             <a:avLst/>
@@ -5575,14 +7828,14 @@
       </p:pic>
       <p:sp>
         <p:nvSpPr>
-          <p:cNvPr id="8" name="TextBox 7"/>
+          <p:cNvPr id="9" name="TextBox 8"/>
           <p:cNvSpPr txBox="1"/>
           <p:nvPr/>
         </p:nvSpPr>
         <p:spPr>
           <a:xfrm>
-            <a:off x="1353312" y="2395728"/>
-            <a:ext cx="5029200" cy="530352"/>
+            <a:off x="1627632" y="2395728"/>
+            <a:ext cx="4206240" cy="786384"/>
           </a:xfrm>
           <a:prstGeom prst="rect">
             <a:avLst/>
@@ -5607,7 +7860,7 @@
               </a:spcAft>
             </a:pPr>
             <a:r>
-              <a:rPr sz="1200" b="0">
+              <a:rPr sz="1150" b="0">
                 <a:solidFill>
                   <a:srgbClr val="1A1A1A"/>
                 </a:solidFill>
@@ -5620,18 +7873,18 @@
       </p:sp>
       <p:sp>
         <p:nvSpPr>
-          <p:cNvPr id="9" name="Rounded Rectangle 8"/>
+          <p:cNvPr id="10" name="Rounded Rectangle 9"/>
           <p:cNvSpPr/>
           <p:nvPr/>
         </p:nvSpPr>
         <p:spPr>
           <a:xfrm>
-            <a:off x="841248" y="2999232"/>
-            <a:ext cx="5715000" cy="530352"/>
+            <a:off x="6254496" y="2395728"/>
+            <a:ext cx="5138928" cy="786384"/>
           </a:xfrm>
           <a:prstGeom prst="roundRect">
             <a:avLst>
-              <a:gd name="adj" fmla="val 6000"/>
+              <a:gd name="adj" fmla="val 7000"/>
             </a:avLst>
           </a:prstGeom>
           <a:solidFill>
@@ -5666,9 +7919,55 @@
           </a:p>
         </p:txBody>
       </p:sp>
+      <p:sp>
+        <p:nvSpPr>
+          <p:cNvPr id="11" name="Rounded Rectangle 10"/>
+          <p:cNvSpPr/>
+          <p:nvPr/>
+        </p:nvSpPr>
+        <p:spPr>
+          <a:xfrm>
+            <a:off x="6400800" y="2532888"/>
+            <a:ext cx="512064" cy="512064"/>
+          </a:xfrm>
+          <a:prstGeom prst="roundRect">
+            <a:avLst>
+              <a:gd name="adj" fmla="val 26000"/>
+            </a:avLst>
+          </a:prstGeom>
+          <a:solidFill>
+            <a:srgbClr val="EE0000"/>
+          </a:solidFill>
+          <a:ln>
+            <a:noFill/>
+          </a:ln>
+          <a:effectLst/>
+        </p:spPr>
+        <p:style>
+          <a:lnRef idx="1">
+            <a:schemeClr val="accent1"/>
+          </a:lnRef>
+          <a:fillRef idx="3">
+            <a:schemeClr val="accent1"/>
+          </a:fillRef>
+          <a:effectRef idx="2">
+            <a:schemeClr val="accent1"/>
+          </a:effectRef>
+          <a:fontRef idx="minor">
+            <a:schemeClr val="lt1"/>
+          </a:fontRef>
+        </p:style>
+        <p:txBody>
+          <a:bodyPr rtlCol="0" anchor="ctr"/>
+          <a:lstStyle/>
+          <a:p>
+            <a:pPr algn="ctr"/>
+          </a:p>
+        </p:txBody>
+      </p:sp>
       <p:pic>
         <p:nvPicPr>
-          <p:cNvPr id="10" name="Picture 9" descr="check_steel.png"/>
+          <p:cNvPr id="12" name="Picture 11" descr="check_white.png"/>
           <p:cNvPicPr>
             <a:picLocks noChangeAspect="1"/>
           </p:cNvPicPr>
@@ -5682,8 +7981,8 @@
         </p:blipFill>
         <p:spPr>
           <a:xfrm>
-            <a:off x="987552" y="3145536"/>
-            <a:ext cx="237744" cy="237744"/>
+            <a:off x="6523695" y="2655783"/>
+            <a:ext cx="266273" cy="266273"/>
           </a:xfrm>
           <a:prstGeom prst="rect">
             <a:avLst/>
@@ -5692,14 +7991,14 @@
       </p:pic>
       <p:sp>
         <p:nvSpPr>
-          <p:cNvPr id="11" name="TextBox 10"/>
+          <p:cNvPr id="13" name="TextBox 12"/>
           <p:cNvSpPr txBox="1"/>
           <p:nvPr/>
         </p:nvSpPr>
         <p:spPr>
           <a:xfrm>
-            <a:off x="1353312" y="2999232"/>
-            <a:ext cx="5029200" cy="530352"/>
+            <a:off x="7040880" y="2395728"/>
+            <a:ext cx="4206240" cy="786384"/>
           </a:xfrm>
           <a:prstGeom prst="rect">
             <a:avLst/>
@@ -5724,7 +8023,7 @@
               </a:spcAft>
             </a:pPr>
             <a:r>
-              <a:rPr sz="1200" b="0">
+              <a:rPr sz="1150" b="0">
                 <a:solidFill>
                   <a:srgbClr val="1A1A1A"/>
                 </a:solidFill>
@@ -5737,18 +8036,18 @@
       </p:sp>
       <p:sp>
         <p:nvSpPr>
-          <p:cNvPr id="12" name="Rounded Rectangle 11"/>
+          <p:cNvPr id="14" name="Rounded Rectangle 13"/>
           <p:cNvSpPr/>
           <p:nvPr/>
         </p:nvSpPr>
         <p:spPr>
           <a:xfrm>
-            <a:off x="841248" y="3602736"/>
-            <a:ext cx="5715000" cy="530352"/>
+            <a:off x="841248" y="3328416"/>
+            <a:ext cx="5138928" cy="786384"/>
           </a:xfrm>
           <a:prstGeom prst="roundRect">
             <a:avLst>
-              <a:gd name="adj" fmla="val 6000"/>
+              <a:gd name="adj" fmla="val 7000"/>
             </a:avLst>
           </a:prstGeom>
           <a:solidFill>
@@ -5783,9 +8082,55 @@
           </a:p>
         </p:txBody>
       </p:sp>
+      <p:sp>
+        <p:nvSpPr>
+          <p:cNvPr id="15" name="Rounded Rectangle 14"/>
+          <p:cNvSpPr/>
+          <p:nvPr/>
+        </p:nvSpPr>
+        <p:spPr>
+          <a:xfrm>
+            <a:off x="987552" y="3465576"/>
+            <a:ext cx="512064" cy="512064"/>
+          </a:xfrm>
+          <a:prstGeom prst="roundRect">
+            <a:avLst>
+              <a:gd name="adj" fmla="val 26000"/>
+            </a:avLst>
+          </a:prstGeom>
+          <a:solidFill>
+            <a:srgbClr val="EE0000"/>
+          </a:solidFill>
+          <a:ln>
+            <a:noFill/>
+          </a:ln>
+          <a:effectLst/>
+        </p:spPr>
+        <p:style>
+          <a:lnRef idx="1">
+            <a:schemeClr val="accent1"/>
+          </a:lnRef>
+          <a:fillRef idx="3">
+            <a:schemeClr val="accent1"/>
+          </a:fillRef>
+          <a:effectRef idx="2">
+            <a:schemeClr val="accent1"/>
+          </a:effectRef>
+          <a:fontRef idx="minor">
+            <a:schemeClr val="lt1"/>
+          </a:fontRef>
+        </p:style>
+        <p:txBody>
+          <a:bodyPr rtlCol="0" anchor="ctr"/>
+          <a:lstStyle/>
+          <a:p>
+            <a:pPr algn="ctr"/>
+          </a:p>
+        </p:txBody>
+      </p:sp>
       <p:pic>
         <p:nvPicPr>
-          <p:cNvPr id="13" name="Picture 12" descr="check_steel.png"/>
+          <p:cNvPr id="16" name="Picture 15" descr="check_white.png"/>
           <p:cNvPicPr>
             <a:picLocks noChangeAspect="1"/>
           </p:cNvPicPr>
@@ -5799,8 +8144,8 @@
         </p:blipFill>
         <p:spPr>
           <a:xfrm>
-            <a:off x="987552" y="3749040"/>
-            <a:ext cx="237744" cy="237744"/>
+            <a:off x="1110447" y="3588471"/>
+            <a:ext cx="266273" cy="266273"/>
           </a:xfrm>
           <a:prstGeom prst="rect">
             <a:avLst/>
@@ -5809,14 +8154,14 @@
       </p:pic>
       <p:sp>
         <p:nvSpPr>
-          <p:cNvPr id="14" name="TextBox 13"/>
+          <p:cNvPr id="17" name="TextBox 16"/>
           <p:cNvSpPr txBox="1"/>
           <p:nvPr/>
         </p:nvSpPr>
         <p:spPr>
           <a:xfrm>
-            <a:off x="1353312" y="3602736"/>
-            <a:ext cx="5029200" cy="530352"/>
+            <a:off x="1627632" y="3328416"/>
+            <a:ext cx="4206240" cy="786384"/>
           </a:xfrm>
           <a:prstGeom prst="rect">
             <a:avLst/>
@@ -5841,7 +8186,7 @@
               </a:spcAft>
             </a:pPr>
             <a:r>
-              <a:rPr sz="1200" b="0">
+              <a:rPr sz="1150" b="0">
                 <a:solidFill>
                   <a:srgbClr val="1A1A1A"/>
                 </a:solidFill>
@@ -5854,18 +8199,18 @@
       </p:sp>
       <p:sp>
         <p:nvSpPr>
-          <p:cNvPr id="15" name="Rounded Rectangle 14"/>
+          <p:cNvPr id="18" name="Rounded Rectangle 17"/>
           <p:cNvSpPr/>
           <p:nvPr/>
         </p:nvSpPr>
         <p:spPr>
           <a:xfrm>
-            <a:off x="841248" y="4206240"/>
-            <a:ext cx="5715000" cy="530352"/>
+            <a:off x="6254496" y="3328416"/>
+            <a:ext cx="5138928" cy="786384"/>
           </a:xfrm>
           <a:prstGeom prst="roundRect">
             <a:avLst>
-              <a:gd name="adj" fmla="val 6000"/>
+              <a:gd name="adj" fmla="val 7000"/>
             </a:avLst>
           </a:prstGeom>
           <a:solidFill>
@@ -5900,9 +8245,55 @@
           </a:p>
         </p:txBody>
       </p:sp>
+      <p:sp>
+        <p:nvSpPr>
+          <p:cNvPr id="19" name="Rounded Rectangle 18"/>
+          <p:cNvSpPr/>
+          <p:nvPr/>
+        </p:nvSpPr>
+        <p:spPr>
+          <a:xfrm>
+            <a:off x="6400800" y="3465576"/>
+            <a:ext cx="512064" cy="512064"/>
+          </a:xfrm>
+          <a:prstGeom prst="roundRect">
+            <a:avLst>
+              <a:gd name="adj" fmla="val 26000"/>
+            </a:avLst>
+          </a:prstGeom>
+          <a:solidFill>
+            <a:srgbClr val="EE0000"/>
+          </a:solidFill>
+          <a:ln>
+            <a:noFill/>
+          </a:ln>
+          <a:effectLst/>
+        </p:spPr>
+        <p:style>
+          <a:lnRef idx="1">
+            <a:schemeClr val="accent1"/>
+          </a:lnRef>
+          <a:fillRef idx="3">
+            <a:schemeClr val="accent1"/>
+          </a:fillRef>
+          <a:effectRef idx="2">
+            <a:schemeClr val="accent1"/>
+          </a:effectRef>
+          <a:fontRef idx="minor">
+            <a:schemeClr val="lt1"/>
+          </a:fontRef>
+        </p:style>
+        <p:txBody>
+          <a:bodyPr rtlCol="0" anchor="ctr"/>
+          <a:lstStyle/>
+          <a:p>
+            <a:pPr algn="ctr"/>
+          </a:p>
+        </p:txBody>
+      </p:sp>
       <p:pic>
         <p:nvPicPr>
-          <p:cNvPr id="16" name="Picture 15" descr="check_steel.png"/>
+          <p:cNvPr id="20" name="Picture 19" descr="check_white.png"/>
           <p:cNvPicPr>
             <a:picLocks noChangeAspect="1"/>
           </p:cNvPicPr>
@@ -5916,8 +8307,8 @@
         </p:blipFill>
         <p:spPr>
           <a:xfrm>
-            <a:off x="987552" y="4352544"/>
-            <a:ext cx="237744" cy="237744"/>
+            <a:off x="6523695" y="3588471"/>
+            <a:ext cx="266273" cy="266273"/>
           </a:xfrm>
           <a:prstGeom prst="rect">
             <a:avLst/>
@@ -5926,14 +8317,14 @@
       </p:pic>
       <p:sp>
         <p:nvSpPr>
-          <p:cNvPr id="17" name="TextBox 16"/>
+          <p:cNvPr id="21" name="TextBox 20"/>
           <p:cNvSpPr txBox="1"/>
           <p:nvPr/>
         </p:nvSpPr>
         <p:spPr>
           <a:xfrm>
-            <a:off x="1353312" y="4206240"/>
-            <a:ext cx="5029200" cy="530352"/>
+            <a:off x="7040880" y="3328416"/>
+            <a:ext cx="4206240" cy="786384"/>
           </a:xfrm>
           <a:prstGeom prst="rect">
             <a:avLst/>
@@ -5958,7 +8349,7 @@
               </a:spcAft>
             </a:pPr>
             <a:r>
-              <a:rPr sz="1200" b="0">
+              <a:rPr sz="1150" b="0">
                 <a:solidFill>
                   <a:srgbClr val="1A1A1A"/>
                 </a:solidFill>
@@ -5971,18 +8362,18 @@
       </p:sp>
       <p:sp>
         <p:nvSpPr>
-          <p:cNvPr id="18" name="Rounded Rectangle 17"/>
+          <p:cNvPr id="22" name="Rounded Rectangle 21"/>
           <p:cNvSpPr/>
           <p:nvPr/>
         </p:nvSpPr>
         <p:spPr>
           <a:xfrm>
-            <a:off x="841248" y="4809744"/>
-            <a:ext cx="5715000" cy="530352"/>
+            <a:off x="841248" y="4261104"/>
+            <a:ext cx="5138928" cy="786384"/>
           </a:xfrm>
           <a:prstGeom prst="roundRect">
             <a:avLst>
-              <a:gd name="adj" fmla="val 6000"/>
+              <a:gd name="adj" fmla="val 7000"/>
             </a:avLst>
           </a:prstGeom>
           <a:solidFill>
@@ -6017,9 +8408,55 @@
           </a:p>
         </p:txBody>
       </p:sp>
+      <p:sp>
+        <p:nvSpPr>
+          <p:cNvPr id="23" name="Rounded Rectangle 22"/>
+          <p:cNvSpPr/>
+          <p:nvPr/>
+        </p:nvSpPr>
+        <p:spPr>
+          <a:xfrm>
+            <a:off x="987552" y="4398264"/>
+            <a:ext cx="512064" cy="512064"/>
+          </a:xfrm>
+          <a:prstGeom prst="roundRect">
+            <a:avLst>
+              <a:gd name="adj" fmla="val 26000"/>
+            </a:avLst>
+          </a:prstGeom>
+          <a:solidFill>
+            <a:srgbClr val="EE0000"/>
+          </a:solidFill>
+          <a:ln>
+            <a:noFill/>
+          </a:ln>
+          <a:effectLst/>
+        </p:spPr>
+        <p:style>
+          <a:lnRef idx="1">
+            <a:schemeClr val="accent1"/>
+          </a:lnRef>
+          <a:fillRef idx="3">
+            <a:schemeClr val="accent1"/>
+          </a:fillRef>
+          <a:effectRef idx="2">
+            <a:schemeClr val="accent1"/>
+          </a:effectRef>
+          <a:fontRef idx="minor">
+            <a:schemeClr val="lt1"/>
+          </a:fontRef>
+        </p:style>
+        <p:txBody>
+          <a:bodyPr rtlCol="0" anchor="ctr"/>
+          <a:lstStyle/>
+          <a:p>
+            <a:pPr algn="ctr"/>
+          </a:p>
+        </p:txBody>
+      </p:sp>
       <p:pic>
         <p:nvPicPr>
-          <p:cNvPr id="19" name="Picture 18" descr="check_steel.png"/>
+          <p:cNvPr id="24" name="Picture 23" descr="check_white.png"/>
           <p:cNvPicPr>
             <a:picLocks noChangeAspect="1"/>
           </p:cNvPicPr>
@@ -6033,8 +8470,8 @@
         </p:blipFill>
         <p:spPr>
           <a:xfrm>
-            <a:off x="987552" y="4956048"/>
-            <a:ext cx="237744" cy="237744"/>
+            <a:off x="1110447" y="4521159"/>
+            <a:ext cx="266273" cy="266273"/>
           </a:xfrm>
           <a:prstGeom prst="rect">
             <a:avLst/>
@@ -6043,14 +8480,14 @@
       </p:pic>
       <p:sp>
         <p:nvSpPr>
-          <p:cNvPr id="20" name="TextBox 19"/>
+          <p:cNvPr id="25" name="TextBox 24"/>
           <p:cNvSpPr txBox="1"/>
           <p:nvPr/>
         </p:nvSpPr>
         <p:spPr>
           <a:xfrm>
-            <a:off x="1353312" y="4809744"/>
-            <a:ext cx="5029200" cy="530352"/>
+            <a:off x="1627632" y="4261104"/>
+            <a:ext cx="4206240" cy="786384"/>
           </a:xfrm>
           <a:prstGeom prst="rect">
             <a:avLst/>
@@ -6075,221 +8512,13 @@
               </a:spcAft>
             </a:pPr>
             <a:r>
-              <a:rPr sz="1200" b="0">
+              <a:rPr sz="1150" b="0">
                 <a:solidFill>
                   <a:srgbClr val="1A1A1A"/>
                 </a:solidFill>
                 <a:latin typeface="Red Hat Text"/>
               </a:rPr>
               <a:t>You will see it as two status codes: **401** = "who are you?" · **403** = "I know, and no"</a:t>
-            </a:r>
-          </a:p>
-        </p:txBody>
-      </p:sp>
-      <p:sp>
-        <p:nvSpPr>
-          <p:cNvPr id="21" name="Rounded Rectangle 20"/>
-          <p:cNvSpPr/>
-          <p:nvPr/>
-        </p:nvSpPr>
-        <p:spPr>
-          <a:xfrm>
-            <a:off x="6812280" y="2395728"/>
-            <a:ext cx="4538167" cy="2944368"/>
-          </a:xfrm>
-          <a:prstGeom prst="roundRect">
-            <a:avLst>
-              <a:gd name="adj" fmla="val 4000"/>
-            </a:avLst>
-          </a:prstGeom>
-          <a:solidFill>
-            <a:srgbClr val="FFFFFF"/>
-          </a:solidFill>
-          <a:ln w="15240">
-            <a:solidFill>
-              <a:srgbClr val="DDE1E6"/>
-            </a:solidFill>
-          </a:ln>
-          <a:effectLst/>
-        </p:spPr>
-        <p:style>
-          <a:lnRef idx="1">
-            <a:schemeClr val="accent1"/>
-          </a:lnRef>
-          <a:fillRef idx="3">
-            <a:schemeClr val="accent1"/>
-          </a:fillRef>
-          <a:effectRef idx="2">
-            <a:schemeClr val="accent1"/>
-          </a:effectRef>
-          <a:fontRef idx="minor">
-            <a:schemeClr val="lt1"/>
-          </a:fontRef>
-        </p:style>
-        <p:txBody>
-          <a:bodyPr rtlCol="0" anchor="ctr"/>
-          <a:lstStyle/>
-          <a:p>
-            <a:pPr algn="ctr"/>
-          </a:p>
-        </p:txBody>
-      </p:sp>
-      <p:sp>
-        <p:nvSpPr>
-          <p:cNvPr id="22" name="Rounded Rectangle 21"/>
-          <p:cNvSpPr/>
-          <p:nvPr/>
-        </p:nvSpPr>
-        <p:spPr>
-          <a:xfrm>
-            <a:off x="7013448" y="2596896"/>
-            <a:ext cx="1298448" cy="310896"/>
-          </a:xfrm>
-          <a:prstGeom prst="roundRect">
-            <a:avLst>
-              <a:gd name="adj" fmla="val 50000"/>
-            </a:avLst>
-          </a:prstGeom>
-          <a:solidFill>
-            <a:srgbClr val="FCECEC"/>
-          </a:solidFill>
-          <a:ln>
-            <a:noFill/>
-          </a:ln>
-          <a:effectLst/>
-        </p:spPr>
-        <p:style>
-          <a:lnRef idx="1">
-            <a:schemeClr val="accent1"/>
-          </a:lnRef>
-          <a:fillRef idx="3">
-            <a:schemeClr val="accent1"/>
-          </a:fillRef>
-          <a:effectRef idx="2">
-            <a:schemeClr val="accent1"/>
-          </a:effectRef>
-          <a:fontRef idx="minor">
-            <a:schemeClr val="lt1"/>
-          </a:fontRef>
-        </p:style>
-        <p:txBody>
-          <a:bodyPr rtlCol="0" anchor="ctr"/>
-          <a:lstStyle/>
-          <a:p>
-            <a:pPr algn="ctr"/>
-          </a:p>
-        </p:txBody>
-      </p:sp>
-      <p:sp>
-        <p:nvSpPr>
-          <p:cNvPr id="23" name="TextBox 22"/>
-          <p:cNvSpPr txBox="1"/>
-          <p:nvPr/>
-        </p:nvSpPr>
-        <p:spPr>
-          <a:xfrm>
-            <a:off x="7013448" y="2596896"/>
-            <a:ext cx="1298448" cy="310896"/>
-          </a:xfrm>
-          <a:prstGeom prst="rect">
-            <a:avLst/>
-          </a:prstGeom>
-          <a:noFill/>
-        </p:spPr>
-        <p:txBody>
-          <a:bodyPr wrap="none" anchor="ctr" lIns="0" rIns="0" tIns="0" bIns="0">
-            <a:spAutoFit/>
-          </a:bodyPr>
-          <a:lstStyle/>
-          <a:p>
-            <a:pPr algn="ctr">
-              <a:lnSpc>
-                <a:spcPct val="106000"/>
-              </a:lnSpc>
-              <a:spcBef>
-                <a:spcPts val="0"/>
-              </a:spcBef>
-              <a:spcAft>
-                <a:spcPts val="0"/>
-              </a:spcAft>
-            </a:pPr>
-            <a:r>
-              <a:rPr sz="850" b="1">
-                <a:solidFill>
-                  <a:srgbClr val="B80000"/>
-                </a:solidFill>
-                <a:latin typeface="Red Hat Display"/>
-              </a:rPr>
-              <a:t>MEDIA PASS</a:t>
-            </a:r>
-          </a:p>
-        </p:txBody>
-      </p:sp>
-      <p:pic>
-        <p:nvPicPr>
-          <p:cNvPr id="24" name="Picture 23" descr="eye_slate.png"/>
-          <p:cNvPicPr>
-            <a:picLocks noChangeAspect="1"/>
-          </p:cNvPicPr>
-          <p:nvPr/>
-        </p:nvPicPr>
-        <p:blipFill>
-          <a:blip r:embed="rId4"/>
-          <a:stretch>
-            <a:fillRect/>
-          </a:stretch>
-        </p:blipFill>
-        <p:spPr>
-          <a:xfrm>
-            <a:off x="8843619" y="3108960"/>
-            <a:ext cx="475488" cy="475488"/>
-          </a:xfrm>
-          <a:prstGeom prst="rect">
-            <a:avLst/>
-          </a:prstGeom>
-        </p:spPr>
-      </p:pic>
-      <p:sp>
-        <p:nvSpPr>
-          <p:cNvPr id="25" name="TextBox 24"/>
-          <p:cNvSpPr txBox="1"/>
-          <p:nvPr/>
-        </p:nvSpPr>
-        <p:spPr>
-          <a:xfrm>
-            <a:off x="7050024" y="3721608"/>
-            <a:ext cx="4062679" cy="1481328"/>
-          </a:xfrm>
-          <a:prstGeom prst="rect">
-            <a:avLst/>
-          </a:prstGeom>
-          <a:noFill/>
-        </p:spPr>
-        <p:txBody>
-          <a:bodyPr wrap="square" anchor="t" lIns="0" rIns="0" tIns="0" bIns="0">
-            <a:spAutoFit/>
-          </a:bodyPr>
-          <a:lstStyle/>
-          <a:p>
-            <a:pPr algn="l">
-              <a:lnSpc>
-                <a:spcPct val="120000"/>
-              </a:lnSpc>
-              <a:spcBef>
-                <a:spcPts val="0"/>
-              </a:spcBef>
-              <a:spcAft>
-                <a:spcPts val="0"/>
-              </a:spcAft>
-            </a:pPr>
-            <a:r>
-              <a:rPr sz="950" b="0">
-                <a:solidFill>
-                  <a:srgbClr val="8A9099"/>
-                </a:solidFill>
-                <a:latin typeface="Red Hat Text"/>
-              </a:rPr>
-              <a:t>Two gates — gate 1 "AuthN: who are you?" (401 if no), gate 2 "AuthZ: what may you do?" (403 if no); a token passes gate 1 but stops at gate 2.</a:t>
             </a:r>
           </a:p>
         </p:txBody>
@@ -6597,11 +8826,11 @@
         <p:spPr>
           <a:xfrm>
             <a:off x="841248" y="2395728"/>
-            <a:ext cx="5715000" cy="530352"/>
+            <a:ext cx="5138928" cy="786384"/>
           </a:xfrm>
           <a:prstGeom prst="roundRect">
             <a:avLst>
-              <a:gd name="adj" fmla="val 6000"/>
+              <a:gd name="adj" fmla="val 7000"/>
             </a:avLst>
           </a:prstGeom>
           <a:solidFill>
@@ -6636,9 +8865,55 @@
           </a:p>
         </p:txBody>
       </p:sp>
+      <p:sp>
+        <p:nvSpPr>
+          <p:cNvPr id="7" name="Rounded Rectangle 6"/>
+          <p:cNvSpPr/>
+          <p:nvPr/>
+        </p:nvSpPr>
+        <p:spPr>
+          <a:xfrm>
+            <a:off x="987552" y="2532888"/>
+            <a:ext cx="512064" cy="512064"/>
+          </a:xfrm>
+          <a:prstGeom prst="roundRect">
+            <a:avLst>
+              <a:gd name="adj" fmla="val 26000"/>
+            </a:avLst>
+          </a:prstGeom>
+          <a:solidFill>
+            <a:srgbClr val="EE0000"/>
+          </a:solidFill>
+          <a:ln>
+            <a:noFill/>
+          </a:ln>
+          <a:effectLst/>
+        </p:spPr>
+        <p:style>
+          <a:lnRef idx="1">
+            <a:schemeClr val="accent1"/>
+          </a:lnRef>
+          <a:fillRef idx="3">
+            <a:schemeClr val="accent1"/>
+          </a:fillRef>
+          <a:effectRef idx="2">
+            <a:schemeClr val="accent1"/>
+          </a:effectRef>
+          <a:fontRef idx="minor">
+            <a:schemeClr val="lt1"/>
+          </a:fontRef>
+        </p:style>
+        <p:txBody>
+          <a:bodyPr rtlCol="0" anchor="ctr"/>
+          <a:lstStyle/>
+          <a:p>
+            <a:pPr algn="ctr"/>
+          </a:p>
+        </p:txBody>
+      </p:sp>
       <p:pic>
         <p:nvPicPr>
-          <p:cNvPr id="7" name="Picture 6" descr="check_steel.png"/>
+          <p:cNvPr id="8" name="Picture 7" descr="check_white.png"/>
           <p:cNvPicPr>
             <a:picLocks noChangeAspect="1"/>
           </p:cNvPicPr>
@@ -6652,8 +8927,8 @@
         </p:blipFill>
         <p:spPr>
           <a:xfrm>
-            <a:off x="987552" y="2542032"/>
-            <a:ext cx="237744" cy="237744"/>
+            <a:off x="1110447" y="2655783"/>
+            <a:ext cx="266273" cy="266273"/>
           </a:xfrm>
           <a:prstGeom prst="rect">
             <a:avLst/>
@@ -6662,14 +8937,14 @@
       </p:pic>
       <p:sp>
         <p:nvSpPr>
-          <p:cNvPr id="8" name="TextBox 7"/>
+          <p:cNvPr id="9" name="TextBox 8"/>
           <p:cNvSpPr txBox="1"/>
           <p:nvPr/>
         </p:nvSpPr>
         <p:spPr>
           <a:xfrm>
-            <a:off x="1353312" y="2395728"/>
-            <a:ext cx="5029200" cy="530352"/>
+            <a:off x="1627632" y="2395728"/>
+            <a:ext cx="4206240" cy="786384"/>
           </a:xfrm>
           <a:prstGeom prst="rect">
             <a:avLst/>
@@ -6694,7 +8969,7 @@
               </a:spcAft>
             </a:pPr>
             <a:r>
-              <a:rPr sz="1200" b="0">
+              <a:rPr sz="1150" b="0">
                 <a:solidFill>
                   <a:srgbClr val="1A1A1A"/>
                 </a:solidFill>
@@ -6707,18 +8982,18 @@
       </p:sp>
       <p:sp>
         <p:nvSpPr>
-          <p:cNvPr id="9" name="Rounded Rectangle 8"/>
+          <p:cNvPr id="10" name="Rounded Rectangle 9"/>
           <p:cNvSpPr/>
           <p:nvPr/>
         </p:nvSpPr>
         <p:spPr>
           <a:xfrm>
-            <a:off x="841248" y="2999232"/>
-            <a:ext cx="5715000" cy="530352"/>
+            <a:off x="6254496" y="2395728"/>
+            <a:ext cx="5138928" cy="786384"/>
           </a:xfrm>
           <a:prstGeom prst="roundRect">
             <a:avLst>
-              <a:gd name="adj" fmla="val 6000"/>
+              <a:gd name="adj" fmla="val 7000"/>
             </a:avLst>
           </a:prstGeom>
           <a:solidFill>
@@ -6753,9 +9028,55 @@
           </a:p>
         </p:txBody>
       </p:sp>
+      <p:sp>
+        <p:nvSpPr>
+          <p:cNvPr id="11" name="Rounded Rectangle 10"/>
+          <p:cNvSpPr/>
+          <p:nvPr/>
+        </p:nvSpPr>
+        <p:spPr>
+          <a:xfrm>
+            <a:off x="6400800" y="2532888"/>
+            <a:ext cx="512064" cy="512064"/>
+          </a:xfrm>
+          <a:prstGeom prst="roundRect">
+            <a:avLst>
+              <a:gd name="adj" fmla="val 26000"/>
+            </a:avLst>
+          </a:prstGeom>
+          <a:solidFill>
+            <a:srgbClr val="EE0000"/>
+          </a:solidFill>
+          <a:ln>
+            <a:noFill/>
+          </a:ln>
+          <a:effectLst/>
+        </p:spPr>
+        <p:style>
+          <a:lnRef idx="1">
+            <a:schemeClr val="accent1"/>
+          </a:lnRef>
+          <a:fillRef idx="3">
+            <a:schemeClr val="accent1"/>
+          </a:fillRef>
+          <a:effectRef idx="2">
+            <a:schemeClr val="accent1"/>
+          </a:effectRef>
+          <a:fontRef idx="minor">
+            <a:schemeClr val="lt1"/>
+          </a:fontRef>
+        </p:style>
+        <p:txBody>
+          <a:bodyPr rtlCol="0" anchor="ctr"/>
+          <a:lstStyle/>
+          <a:p>
+            <a:pPr algn="ctr"/>
+          </a:p>
+        </p:txBody>
+      </p:sp>
       <p:pic>
         <p:nvPicPr>
-          <p:cNvPr id="10" name="Picture 9" descr="check_steel.png"/>
+          <p:cNvPr id="12" name="Picture 11" descr="check_white.png"/>
           <p:cNvPicPr>
             <a:picLocks noChangeAspect="1"/>
           </p:cNvPicPr>
@@ -6769,8 +9090,8 @@
         </p:blipFill>
         <p:spPr>
           <a:xfrm>
-            <a:off x="987552" y="3145536"/>
-            <a:ext cx="237744" cy="237744"/>
+            <a:off x="6523695" y="2655783"/>
+            <a:ext cx="266273" cy="266273"/>
           </a:xfrm>
           <a:prstGeom prst="rect">
             <a:avLst/>
@@ -6779,14 +9100,14 @@
       </p:pic>
       <p:sp>
         <p:nvSpPr>
-          <p:cNvPr id="11" name="TextBox 10"/>
+          <p:cNvPr id="13" name="TextBox 12"/>
           <p:cNvSpPr txBox="1"/>
           <p:nvPr/>
         </p:nvSpPr>
         <p:spPr>
           <a:xfrm>
-            <a:off x="1353312" y="2999232"/>
-            <a:ext cx="5029200" cy="530352"/>
+            <a:off x="7040880" y="2395728"/>
+            <a:ext cx="4206240" cy="786384"/>
           </a:xfrm>
           <a:prstGeom prst="rect">
             <a:avLst/>
@@ -6811,7 +9132,7 @@
               </a:spcAft>
             </a:pPr>
             <a:r>
-              <a:rPr sz="1200" b="0">
+              <a:rPr sz="1150" b="0">
                 <a:solidFill>
                   <a:srgbClr val="1A1A1A"/>
                 </a:solidFill>
@@ -6824,18 +9145,18 @@
       </p:sp>
       <p:sp>
         <p:nvSpPr>
-          <p:cNvPr id="12" name="Rounded Rectangle 11"/>
+          <p:cNvPr id="14" name="Rounded Rectangle 13"/>
           <p:cNvSpPr/>
           <p:nvPr/>
         </p:nvSpPr>
         <p:spPr>
           <a:xfrm>
-            <a:off x="841248" y="3602736"/>
-            <a:ext cx="5715000" cy="530352"/>
+            <a:off x="841248" y="3328416"/>
+            <a:ext cx="5138928" cy="786384"/>
           </a:xfrm>
           <a:prstGeom prst="roundRect">
             <a:avLst>
-              <a:gd name="adj" fmla="val 6000"/>
+              <a:gd name="adj" fmla="val 7000"/>
             </a:avLst>
           </a:prstGeom>
           <a:solidFill>
@@ -6870,9 +9191,55 @@
           </a:p>
         </p:txBody>
       </p:sp>
+      <p:sp>
+        <p:nvSpPr>
+          <p:cNvPr id="15" name="Rounded Rectangle 14"/>
+          <p:cNvSpPr/>
+          <p:nvPr/>
+        </p:nvSpPr>
+        <p:spPr>
+          <a:xfrm>
+            <a:off x="987552" y="3465576"/>
+            <a:ext cx="512064" cy="512064"/>
+          </a:xfrm>
+          <a:prstGeom prst="roundRect">
+            <a:avLst>
+              <a:gd name="adj" fmla="val 26000"/>
+            </a:avLst>
+          </a:prstGeom>
+          <a:solidFill>
+            <a:srgbClr val="EE0000"/>
+          </a:solidFill>
+          <a:ln>
+            <a:noFill/>
+          </a:ln>
+          <a:effectLst/>
+        </p:spPr>
+        <p:style>
+          <a:lnRef idx="1">
+            <a:schemeClr val="accent1"/>
+          </a:lnRef>
+          <a:fillRef idx="3">
+            <a:schemeClr val="accent1"/>
+          </a:fillRef>
+          <a:effectRef idx="2">
+            <a:schemeClr val="accent1"/>
+          </a:effectRef>
+          <a:fontRef idx="minor">
+            <a:schemeClr val="lt1"/>
+          </a:fontRef>
+        </p:style>
+        <p:txBody>
+          <a:bodyPr rtlCol="0" anchor="ctr"/>
+          <a:lstStyle/>
+          <a:p>
+            <a:pPr algn="ctr"/>
+          </a:p>
+        </p:txBody>
+      </p:sp>
       <p:pic>
         <p:nvPicPr>
-          <p:cNvPr id="13" name="Picture 12" descr="check_steel.png"/>
+          <p:cNvPr id="16" name="Picture 15" descr="check_white.png"/>
           <p:cNvPicPr>
             <a:picLocks noChangeAspect="1"/>
           </p:cNvPicPr>
@@ -6886,8 +9253,8 @@
         </p:blipFill>
         <p:spPr>
           <a:xfrm>
-            <a:off x="987552" y="3749040"/>
-            <a:ext cx="237744" cy="237744"/>
+            <a:off x="1110447" y="3588471"/>
+            <a:ext cx="266273" cy="266273"/>
           </a:xfrm>
           <a:prstGeom prst="rect">
             <a:avLst/>
@@ -6896,14 +9263,14 @@
       </p:pic>
       <p:sp>
         <p:nvSpPr>
-          <p:cNvPr id="14" name="TextBox 13"/>
+          <p:cNvPr id="17" name="TextBox 16"/>
           <p:cNvSpPr txBox="1"/>
           <p:nvPr/>
         </p:nvSpPr>
         <p:spPr>
           <a:xfrm>
-            <a:off x="1353312" y="3602736"/>
-            <a:ext cx="5029200" cy="530352"/>
+            <a:off x="1627632" y="3328416"/>
+            <a:ext cx="4206240" cy="786384"/>
           </a:xfrm>
           <a:prstGeom prst="rect">
             <a:avLst/>
@@ -6928,7 +9295,7 @@
               </a:spcAft>
             </a:pPr>
             <a:r>
-              <a:rPr sz="1200" b="0">
+              <a:rPr sz="1150" b="0">
                 <a:solidFill>
                   <a:srgbClr val="1A1A1A"/>
                 </a:solidFill>
@@ -6941,18 +9308,18 @@
       </p:sp>
       <p:sp>
         <p:nvSpPr>
-          <p:cNvPr id="15" name="Rounded Rectangle 14"/>
+          <p:cNvPr id="18" name="Rounded Rectangle 17"/>
           <p:cNvSpPr/>
           <p:nvPr/>
         </p:nvSpPr>
         <p:spPr>
           <a:xfrm>
-            <a:off x="841248" y="4206240"/>
-            <a:ext cx="5715000" cy="530352"/>
+            <a:off x="6254496" y="3328416"/>
+            <a:ext cx="5138928" cy="786384"/>
           </a:xfrm>
           <a:prstGeom prst="roundRect">
             <a:avLst>
-              <a:gd name="adj" fmla="val 6000"/>
+              <a:gd name="adj" fmla="val 7000"/>
             </a:avLst>
           </a:prstGeom>
           <a:solidFill>
@@ -6987,9 +9354,55 @@
           </a:p>
         </p:txBody>
       </p:sp>
+      <p:sp>
+        <p:nvSpPr>
+          <p:cNvPr id="19" name="Rounded Rectangle 18"/>
+          <p:cNvSpPr/>
+          <p:nvPr/>
+        </p:nvSpPr>
+        <p:spPr>
+          <a:xfrm>
+            <a:off x="6400800" y="3465576"/>
+            <a:ext cx="512064" cy="512064"/>
+          </a:xfrm>
+          <a:prstGeom prst="roundRect">
+            <a:avLst>
+              <a:gd name="adj" fmla="val 26000"/>
+            </a:avLst>
+          </a:prstGeom>
+          <a:solidFill>
+            <a:srgbClr val="EE0000"/>
+          </a:solidFill>
+          <a:ln>
+            <a:noFill/>
+          </a:ln>
+          <a:effectLst/>
+        </p:spPr>
+        <p:style>
+          <a:lnRef idx="1">
+            <a:schemeClr val="accent1"/>
+          </a:lnRef>
+          <a:fillRef idx="3">
+            <a:schemeClr val="accent1"/>
+          </a:fillRef>
+          <a:effectRef idx="2">
+            <a:schemeClr val="accent1"/>
+          </a:effectRef>
+          <a:fontRef idx="minor">
+            <a:schemeClr val="lt1"/>
+          </a:fontRef>
+        </p:style>
+        <p:txBody>
+          <a:bodyPr rtlCol="0" anchor="ctr"/>
+          <a:lstStyle/>
+          <a:p>
+            <a:pPr algn="ctr"/>
+          </a:p>
+        </p:txBody>
+      </p:sp>
       <p:pic>
         <p:nvPicPr>
-          <p:cNvPr id="16" name="Picture 15" descr="check_steel.png"/>
+          <p:cNvPr id="20" name="Picture 19" descr="check_white.png"/>
           <p:cNvPicPr>
             <a:picLocks noChangeAspect="1"/>
           </p:cNvPicPr>
@@ -7003,8 +9416,8 @@
         </p:blipFill>
         <p:spPr>
           <a:xfrm>
-            <a:off x="987552" y="4352544"/>
-            <a:ext cx="237744" cy="237744"/>
+            <a:off x="6523695" y="3588471"/>
+            <a:ext cx="266273" cy="266273"/>
           </a:xfrm>
           <a:prstGeom prst="rect">
             <a:avLst/>
@@ -7013,14 +9426,14 @@
       </p:pic>
       <p:sp>
         <p:nvSpPr>
-          <p:cNvPr id="17" name="TextBox 16"/>
+          <p:cNvPr id="21" name="TextBox 20"/>
           <p:cNvSpPr txBox="1"/>
           <p:nvPr/>
         </p:nvSpPr>
         <p:spPr>
           <a:xfrm>
-            <a:off x="1353312" y="4206240"/>
-            <a:ext cx="5029200" cy="530352"/>
+            <a:off x="7040880" y="3328416"/>
+            <a:ext cx="4206240" cy="786384"/>
           </a:xfrm>
           <a:prstGeom prst="rect">
             <a:avLst/>
@@ -7045,7 +9458,7 @@
               </a:spcAft>
             </a:pPr>
             <a:r>
-              <a:rPr sz="1200" b="0">
+              <a:rPr sz="1150" b="0">
                 <a:solidFill>
                   <a:srgbClr val="1A1A1A"/>
                 </a:solidFill>
@@ -7058,18 +9471,18 @@
       </p:sp>
       <p:sp>
         <p:nvSpPr>
-          <p:cNvPr id="18" name="Rounded Rectangle 17"/>
+          <p:cNvPr id="22" name="Rounded Rectangle 21"/>
           <p:cNvSpPr/>
           <p:nvPr/>
         </p:nvSpPr>
         <p:spPr>
           <a:xfrm>
-            <a:off x="841248" y="4809744"/>
-            <a:ext cx="5715000" cy="530352"/>
+            <a:off x="841248" y="4261104"/>
+            <a:ext cx="5138928" cy="786384"/>
           </a:xfrm>
           <a:prstGeom prst="roundRect">
             <a:avLst>
-              <a:gd name="adj" fmla="val 6000"/>
+              <a:gd name="adj" fmla="val 7000"/>
             </a:avLst>
           </a:prstGeom>
           <a:solidFill>
@@ -7104,9 +9517,55 @@
           </a:p>
         </p:txBody>
       </p:sp>
+      <p:sp>
+        <p:nvSpPr>
+          <p:cNvPr id="23" name="Rounded Rectangle 22"/>
+          <p:cNvSpPr/>
+          <p:nvPr/>
+        </p:nvSpPr>
+        <p:spPr>
+          <a:xfrm>
+            <a:off x="987552" y="4398264"/>
+            <a:ext cx="512064" cy="512064"/>
+          </a:xfrm>
+          <a:prstGeom prst="roundRect">
+            <a:avLst>
+              <a:gd name="adj" fmla="val 26000"/>
+            </a:avLst>
+          </a:prstGeom>
+          <a:solidFill>
+            <a:srgbClr val="EE0000"/>
+          </a:solidFill>
+          <a:ln>
+            <a:noFill/>
+          </a:ln>
+          <a:effectLst/>
+        </p:spPr>
+        <p:style>
+          <a:lnRef idx="1">
+            <a:schemeClr val="accent1"/>
+          </a:lnRef>
+          <a:fillRef idx="3">
+            <a:schemeClr val="accent1"/>
+          </a:fillRef>
+          <a:effectRef idx="2">
+            <a:schemeClr val="accent1"/>
+          </a:effectRef>
+          <a:fontRef idx="minor">
+            <a:schemeClr val="lt1"/>
+          </a:fontRef>
+        </p:style>
+        <p:txBody>
+          <a:bodyPr rtlCol="0" anchor="ctr"/>
+          <a:lstStyle/>
+          <a:p>
+            <a:pPr algn="ctr"/>
+          </a:p>
+        </p:txBody>
+      </p:sp>
       <p:pic>
         <p:nvPicPr>
-          <p:cNvPr id="19" name="Picture 18" descr="check_steel.png"/>
+          <p:cNvPr id="24" name="Picture 23" descr="check_white.png"/>
           <p:cNvPicPr>
             <a:picLocks noChangeAspect="1"/>
           </p:cNvPicPr>
@@ -7120,8 +9579,8 @@
         </p:blipFill>
         <p:spPr>
           <a:xfrm>
-            <a:off x="987552" y="4956048"/>
-            <a:ext cx="237744" cy="237744"/>
+            <a:off x="1110447" y="4521159"/>
+            <a:ext cx="266273" cy="266273"/>
           </a:xfrm>
           <a:prstGeom prst="rect">
             <a:avLst/>
@@ -7130,14 +9589,14 @@
       </p:pic>
       <p:sp>
         <p:nvSpPr>
-          <p:cNvPr id="20" name="TextBox 19"/>
+          <p:cNvPr id="25" name="TextBox 24"/>
           <p:cNvSpPr txBox="1"/>
           <p:nvPr/>
         </p:nvSpPr>
         <p:spPr>
           <a:xfrm>
-            <a:off x="1353312" y="4809744"/>
-            <a:ext cx="5029200" cy="530352"/>
+            <a:off x="1627632" y="4261104"/>
+            <a:ext cx="4206240" cy="786384"/>
           </a:xfrm>
           <a:prstGeom prst="rect">
             <a:avLst/>
@@ -7162,221 +9621,13 @@
               </a:spcAft>
             </a:pPr>
             <a:r>
-              <a:rPr sz="1200" b="0">
+              <a:rPr sz="1150" b="0">
                 <a:solidFill>
                   <a:srgbClr val="1A1A1A"/>
                 </a:solidFill>
                 <a:latin typeface="Red Hat Text"/>
               </a:rPr>
               <a:t>Learn these four; resist the rest of OAuth</a:t>
-            </a:r>
-          </a:p>
-        </p:txBody>
-      </p:sp>
-      <p:sp>
-        <p:nvSpPr>
-          <p:cNvPr id="21" name="Rounded Rectangle 20"/>
-          <p:cNvSpPr/>
-          <p:nvPr/>
-        </p:nvSpPr>
-        <p:spPr>
-          <a:xfrm>
-            <a:off x="6812280" y="2395728"/>
-            <a:ext cx="4538167" cy="2944368"/>
-          </a:xfrm>
-          <a:prstGeom prst="roundRect">
-            <a:avLst>
-              <a:gd name="adj" fmla="val 4000"/>
-            </a:avLst>
-          </a:prstGeom>
-          <a:solidFill>
-            <a:srgbClr val="FFFFFF"/>
-          </a:solidFill>
-          <a:ln w="15240">
-            <a:solidFill>
-              <a:srgbClr val="DDE1E6"/>
-            </a:solidFill>
-          </a:ln>
-          <a:effectLst/>
-        </p:spPr>
-        <p:style>
-          <a:lnRef idx="1">
-            <a:schemeClr val="accent1"/>
-          </a:lnRef>
-          <a:fillRef idx="3">
-            <a:schemeClr val="accent1"/>
-          </a:fillRef>
-          <a:effectRef idx="2">
-            <a:schemeClr val="accent1"/>
-          </a:effectRef>
-          <a:fontRef idx="minor">
-            <a:schemeClr val="lt1"/>
-          </a:fontRef>
-        </p:style>
-        <p:txBody>
-          <a:bodyPr rtlCol="0" anchor="ctr"/>
-          <a:lstStyle/>
-          <a:p>
-            <a:pPr algn="ctr"/>
-          </a:p>
-        </p:txBody>
-      </p:sp>
-      <p:sp>
-        <p:nvSpPr>
-          <p:cNvPr id="22" name="Rounded Rectangle 21"/>
-          <p:cNvSpPr/>
-          <p:nvPr/>
-        </p:nvSpPr>
-        <p:spPr>
-          <a:xfrm>
-            <a:off x="7013448" y="2596896"/>
-            <a:ext cx="1298448" cy="310896"/>
-          </a:xfrm>
-          <a:prstGeom prst="roundRect">
-            <a:avLst>
-              <a:gd name="adj" fmla="val 50000"/>
-            </a:avLst>
-          </a:prstGeom>
-          <a:solidFill>
-            <a:srgbClr val="FCECEC"/>
-          </a:solidFill>
-          <a:ln>
-            <a:noFill/>
-          </a:ln>
-          <a:effectLst/>
-        </p:spPr>
-        <p:style>
-          <a:lnRef idx="1">
-            <a:schemeClr val="accent1"/>
-          </a:lnRef>
-          <a:fillRef idx="3">
-            <a:schemeClr val="accent1"/>
-          </a:fillRef>
-          <a:effectRef idx="2">
-            <a:schemeClr val="accent1"/>
-          </a:effectRef>
-          <a:fontRef idx="minor">
-            <a:schemeClr val="lt1"/>
-          </a:fontRef>
-        </p:style>
-        <p:txBody>
-          <a:bodyPr rtlCol="0" anchor="ctr"/>
-          <a:lstStyle/>
-          <a:p>
-            <a:pPr algn="ctr"/>
-          </a:p>
-        </p:txBody>
-      </p:sp>
-      <p:sp>
-        <p:nvSpPr>
-          <p:cNvPr id="23" name="TextBox 22"/>
-          <p:cNvSpPr txBox="1"/>
-          <p:nvPr/>
-        </p:nvSpPr>
-        <p:spPr>
-          <a:xfrm>
-            <a:off x="7013448" y="2596896"/>
-            <a:ext cx="1298448" cy="310896"/>
-          </a:xfrm>
-          <a:prstGeom prst="rect">
-            <a:avLst/>
-          </a:prstGeom>
-          <a:noFill/>
-        </p:spPr>
-        <p:txBody>
-          <a:bodyPr wrap="none" anchor="ctr" lIns="0" rIns="0" tIns="0" bIns="0">
-            <a:spAutoFit/>
-          </a:bodyPr>
-          <a:lstStyle/>
-          <a:p>
-            <a:pPr algn="ctr">
-              <a:lnSpc>
-                <a:spcPct val="106000"/>
-              </a:lnSpc>
-              <a:spcBef>
-                <a:spcPts val="0"/>
-              </a:spcBef>
-              <a:spcAft>
-                <a:spcPts val="0"/>
-              </a:spcAft>
-            </a:pPr>
-            <a:r>
-              <a:rPr sz="850" b="1">
-                <a:solidFill>
-                  <a:srgbClr val="B80000"/>
-                </a:solidFill>
-                <a:latin typeface="Red Hat Display"/>
-              </a:rPr>
-              <a:t>MEDIA PASS</a:t>
-            </a:r>
-          </a:p>
-        </p:txBody>
-      </p:sp>
-      <p:pic>
-        <p:nvPicPr>
-          <p:cNvPr id="24" name="Picture 23" descr="eye_slate.png"/>
-          <p:cNvPicPr>
-            <a:picLocks noChangeAspect="1"/>
-          </p:cNvPicPr>
-          <p:nvPr/>
-        </p:nvPicPr>
-        <p:blipFill>
-          <a:blip r:embed="rId4"/>
-          <a:stretch>
-            <a:fillRect/>
-          </a:stretch>
-        </p:blipFill>
-        <p:spPr>
-          <a:xfrm>
-            <a:off x="8843619" y="3108960"/>
-            <a:ext cx="475488" cy="475488"/>
-          </a:xfrm>
-          <a:prstGeom prst="rect">
-            <a:avLst/>
-          </a:prstGeom>
-        </p:spPr>
-      </p:pic>
-      <p:sp>
-        <p:nvSpPr>
-          <p:cNvPr id="25" name="TextBox 24"/>
-          <p:cNvSpPr txBox="1"/>
-          <p:nvPr/>
-        </p:nvSpPr>
-        <p:spPr>
-          <a:xfrm>
-            <a:off x="7050024" y="3721608"/>
-            <a:ext cx="4062679" cy="1481328"/>
-          </a:xfrm>
-          <a:prstGeom prst="rect">
-            <a:avLst/>
-          </a:prstGeom>
-          <a:noFill/>
-        </p:spPr>
-        <p:txBody>
-          <a:bodyPr wrap="square" anchor="t" lIns="0" rIns="0" tIns="0" bIns="0">
-            <a:spAutoFit/>
-          </a:bodyPr>
-          <a:lstStyle/>
-          <a:p>
-            <a:pPr algn="l">
-              <a:lnSpc>
-                <a:spcPct val="120000"/>
-              </a:lnSpc>
-              <a:spcBef>
-                <a:spcPts val="0"/>
-              </a:spcBef>
-              <a:spcAft>
-                <a:spcPts val="0"/>
-              </a:spcAft>
-            </a:pPr>
-            <a:r>
-              <a:rPr sz="950" b="0">
-                <a:solidFill>
-                  <a:srgbClr val="8A9099"/>
-                </a:solidFill>
-                <a:latin typeface="Red Hat Text"/>
-              </a:rPr>
-              <a:t>Concept diagram securing-apps-keycloak-01-four-flows — human flows (auth-code, bearer) above, machine flows (client-creds, exchange) below, an arrow from the user token into the exchange.</a:t>
             </a:r>
           </a:p>
         </p:txBody>
@@ -7684,11 +9935,11 @@
         <p:spPr>
           <a:xfrm>
             <a:off x="841248" y="2395728"/>
-            <a:ext cx="5715000" cy="530352"/>
+            <a:ext cx="5138928" cy="786384"/>
           </a:xfrm>
           <a:prstGeom prst="roundRect">
             <a:avLst>
-              <a:gd name="adj" fmla="val 6000"/>
+              <a:gd name="adj" fmla="val 7000"/>
             </a:avLst>
           </a:prstGeom>
           <a:solidFill>
@@ -7723,9 +9974,55 @@
           </a:p>
         </p:txBody>
       </p:sp>
+      <p:sp>
+        <p:nvSpPr>
+          <p:cNvPr id="7" name="Rounded Rectangle 6"/>
+          <p:cNvSpPr/>
+          <p:nvPr/>
+        </p:nvSpPr>
+        <p:spPr>
+          <a:xfrm>
+            <a:off x="987552" y="2532888"/>
+            <a:ext cx="512064" cy="512064"/>
+          </a:xfrm>
+          <a:prstGeom prst="roundRect">
+            <a:avLst>
+              <a:gd name="adj" fmla="val 26000"/>
+            </a:avLst>
+          </a:prstGeom>
+          <a:solidFill>
+            <a:srgbClr val="EE0000"/>
+          </a:solidFill>
+          <a:ln>
+            <a:noFill/>
+          </a:ln>
+          <a:effectLst/>
+        </p:spPr>
+        <p:style>
+          <a:lnRef idx="1">
+            <a:schemeClr val="accent1"/>
+          </a:lnRef>
+          <a:fillRef idx="3">
+            <a:schemeClr val="accent1"/>
+          </a:fillRef>
+          <a:effectRef idx="2">
+            <a:schemeClr val="accent1"/>
+          </a:effectRef>
+          <a:fontRef idx="minor">
+            <a:schemeClr val="lt1"/>
+          </a:fontRef>
+        </p:style>
+        <p:txBody>
+          <a:bodyPr rtlCol="0" anchor="ctr"/>
+          <a:lstStyle/>
+          <a:p>
+            <a:pPr algn="ctr"/>
+          </a:p>
+        </p:txBody>
+      </p:sp>
       <p:pic>
         <p:nvPicPr>
-          <p:cNvPr id="7" name="Picture 6" descr="check_steel.png"/>
+          <p:cNvPr id="8" name="Picture 7" descr="check_white.png"/>
           <p:cNvPicPr>
             <a:picLocks noChangeAspect="1"/>
           </p:cNvPicPr>
@@ -7739,8 +10036,8 @@
         </p:blipFill>
         <p:spPr>
           <a:xfrm>
-            <a:off x="987552" y="2542032"/>
-            <a:ext cx="237744" cy="237744"/>
+            <a:off x="1110447" y="2655783"/>
+            <a:ext cx="266273" cy="266273"/>
           </a:xfrm>
           <a:prstGeom prst="rect">
             <a:avLst/>
@@ -7749,14 +10046,14 @@
       </p:pic>
       <p:sp>
         <p:nvSpPr>
-          <p:cNvPr id="8" name="TextBox 7"/>
+          <p:cNvPr id="9" name="TextBox 8"/>
           <p:cNvSpPr txBox="1"/>
           <p:nvPr/>
         </p:nvSpPr>
         <p:spPr>
           <a:xfrm>
-            <a:off x="1353312" y="2395728"/>
-            <a:ext cx="5029200" cy="530352"/>
+            <a:off x="1627632" y="2395728"/>
+            <a:ext cx="4206240" cy="786384"/>
           </a:xfrm>
           <a:prstGeom prst="rect">
             <a:avLst/>
@@ -7781,7 +10078,7 @@
               </a:spcAft>
             </a:pPr>
             <a:r>
-              <a:rPr sz="1200" b="0">
+              <a:rPr sz="1150" b="0">
                 <a:solidFill>
                   <a:srgbClr val="1A1A1A"/>
                 </a:solidFill>
@@ -7794,18 +10091,18 @@
       </p:sp>
       <p:sp>
         <p:nvSpPr>
-          <p:cNvPr id="9" name="Rounded Rectangle 8"/>
+          <p:cNvPr id="10" name="Rounded Rectangle 9"/>
           <p:cNvSpPr/>
           <p:nvPr/>
         </p:nvSpPr>
         <p:spPr>
           <a:xfrm>
-            <a:off x="841248" y="2999232"/>
-            <a:ext cx="5715000" cy="530352"/>
+            <a:off x="6254496" y="2395728"/>
+            <a:ext cx="5138928" cy="786384"/>
           </a:xfrm>
           <a:prstGeom prst="roundRect">
             <a:avLst>
-              <a:gd name="adj" fmla="val 6000"/>
+              <a:gd name="adj" fmla="val 7000"/>
             </a:avLst>
           </a:prstGeom>
           <a:solidFill>
@@ -7840,9 +10137,55 @@
           </a:p>
         </p:txBody>
       </p:sp>
+      <p:sp>
+        <p:nvSpPr>
+          <p:cNvPr id="11" name="Rounded Rectangle 10"/>
+          <p:cNvSpPr/>
+          <p:nvPr/>
+        </p:nvSpPr>
+        <p:spPr>
+          <a:xfrm>
+            <a:off x="6400800" y="2532888"/>
+            <a:ext cx="512064" cy="512064"/>
+          </a:xfrm>
+          <a:prstGeom prst="roundRect">
+            <a:avLst>
+              <a:gd name="adj" fmla="val 26000"/>
+            </a:avLst>
+          </a:prstGeom>
+          <a:solidFill>
+            <a:srgbClr val="EE0000"/>
+          </a:solidFill>
+          <a:ln>
+            <a:noFill/>
+          </a:ln>
+          <a:effectLst/>
+        </p:spPr>
+        <p:style>
+          <a:lnRef idx="1">
+            <a:schemeClr val="accent1"/>
+          </a:lnRef>
+          <a:fillRef idx="3">
+            <a:schemeClr val="accent1"/>
+          </a:fillRef>
+          <a:effectRef idx="2">
+            <a:schemeClr val="accent1"/>
+          </a:effectRef>
+          <a:fontRef idx="minor">
+            <a:schemeClr val="lt1"/>
+          </a:fontRef>
+        </p:style>
+        <p:txBody>
+          <a:bodyPr rtlCol="0" anchor="ctr"/>
+          <a:lstStyle/>
+          <a:p>
+            <a:pPr algn="ctr"/>
+          </a:p>
+        </p:txBody>
+      </p:sp>
       <p:pic>
         <p:nvPicPr>
-          <p:cNvPr id="10" name="Picture 9" descr="check_steel.png"/>
+          <p:cNvPr id="12" name="Picture 11" descr="check_white.png"/>
           <p:cNvPicPr>
             <a:picLocks noChangeAspect="1"/>
           </p:cNvPicPr>
@@ -7856,8 +10199,8 @@
         </p:blipFill>
         <p:spPr>
           <a:xfrm>
-            <a:off x="987552" y="3145536"/>
-            <a:ext cx="237744" cy="237744"/>
+            <a:off x="6523695" y="2655783"/>
+            <a:ext cx="266273" cy="266273"/>
           </a:xfrm>
           <a:prstGeom prst="rect">
             <a:avLst/>
@@ -7866,14 +10209,14 @@
       </p:pic>
       <p:sp>
         <p:nvSpPr>
-          <p:cNvPr id="11" name="TextBox 10"/>
+          <p:cNvPr id="13" name="TextBox 12"/>
           <p:cNvSpPr txBox="1"/>
           <p:nvPr/>
         </p:nvSpPr>
         <p:spPr>
           <a:xfrm>
-            <a:off x="1353312" y="2999232"/>
-            <a:ext cx="5029200" cy="530352"/>
+            <a:off x="7040880" y="2395728"/>
+            <a:ext cx="4206240" cy="786384"/>
           </a:xfrm>
           <a:prstGeom prst="rect">
             <a:avLst/>
@@ -7898,7 +10241,7 @@
               </a:spcAft>
             </a:pPr>
             <a:r>
-              <a:rPr sz="1200" b="0">
+              <a:rPr sz="1150" b="0">
                 <a:solidFill>
                   <a:srgbClr val="1A1A1A"/>
                 </a:solidFill>
@@ -7911,18 +10254,18 @@
       </p:sp>
       <p:sp>
         <p:nvSpPr>
-          <p:cNvPr id="12" name="Rounded Rectangle 11"/>
+          <p:cNvPr id="14" name="Rounded Rectangle 13"/>
           <p:cNvSpPr/>
           <p:nvPr/>
         </p:nvSpPr>
         <p:spPr>
           <a:xfrm>
-            <a:off x="841248" y="3602736"/>
-            <a:ext cx="5715000" cy="530352"/>
+            <a:off x="841248" y="3328416"/>
+            <a:ext cx="5138928" cy="786384"/>
           </a:xfrm>
           <a:prstGeom prst="roundRect">
             <a:avLst>
-              <a:gd name="adj" fmla="val 6000"/>
+              <a:gd name="adj" fmla="val 7000"/>
             </a:avLst>
           </a:prstGeom>
           <a:solidFill>
@@ -7957,9 +10300,55 @@
           </a:p>
         </p:txBody>
       </p:sp>
+      <p:sp>
+        <p:nvSpPr>
+          <p:cNvPr id="15" name="Rounded Rectangle 14"/>
+          <p:cNvSpPr/>
+          <p:nvPr/>
+        </p:nvSpPr>
+        <p:spPr>
+          <a:xfrm>
+            <a:off x="987552" y="3465576"/>
+            <a:ext cx="512064" cy="512064"/>
+          </a:xfrm>
+          <a:prstGeom prst="roundRect">
+            <a:avLst>
+              <a:gd name="adj" fmla="val 26000"/>
+            </a:avLst>
+          </a:prstGeom>
+          <a:solidFill>
+            <a:srgbClr val="EE0000"/>
+          </a:solidFill>
+          <a:ln>
+            <a:noFill/>
+          </a:ln>
+          <a:effectLst/>
+        </p:spPr>
+        <p:style>
+          <a:lnRef idx="1">
+            <a:schemeClr val="accent1"/>
+          </a:lnRef>
+          <a:fillRef idx="3">
+            <a:schemeClr val="accent1"/>
+          </a:fillRef>
+          <a:effectRef idx="2">
+            <a:schemeClr val="accent1"/>
+          </a:effectRef>
+          <a:fontRef idx="minor">
+            <a:schemeClr val="lt1"/>
+          </a:fontRef>
+        </p:style>
+        <p:txBody>
+          <a:bodyPr rtlCol="0" anchor="ctr"/>
+          <a:lstStyle/>
+          <a:p>
+            <a:pPr algn="ctr"/>
+          </a:p>
+        </p:txBody>
+      </p:sp>
       <p:pic>
         <p:nvPicPr>
-          <p:cNvPr id="13" name="Picture 12" descr="check_steel.png"/>
+          <p:cNvPr id="16" name="Picture 15" descr="check_white.png"/>
           <p:cNvPicPr>
             <a:picLocks noChangeAspect="1"/>
           </p:cNvPicPr>
@@ -7973,8 +10362,8 @@
         </p:blipFill>
         <p:spPr>
           <a:xfrm>
-            <a:off x="987552" y="3749040"/>
-            <a:ext cx="237744" cy="237744"/>
+            <a:off x="1110447" y="3588471"/>
+            <a:ext cx="266273" cy="266273"/>
           </a:xfrm>
           <a:prstGeom prst="rect">
             <a:avLst/>
@@ -7983,14 +10372,14 @@
       </p:pic>
       <p:sp>
         <p:nvSpPr>
-          <p:cNvPr id="14" name="TextBox 13"/>
+          <p:cNvPr id="17" name="TextBox 16"/>
           <p:cNvSpPr txBox="1"/>
           <p:nvPr/>
         </p:nvSpPr>
         <p:spPr>
           <a:xfrm>
-            <a:off x="1353312" y="3602736"/>
-            <a:ext cx="5029200" cy="530352"/>
+            <a:off x="1627632" y="3328416"/>
+            <a:ext cx="4206240" cy="786384"/>
           </a:xfrm>
           <a:prstGeom prst="rect">
             <a:avLst/>
@@ -8015,7 +10404,7 @@
               </a:spcAft>
             </a:pPr>
             <a:r>
-              <a:rPr sz="1200" b="0">
+              <a:rPr sz="1150" b="0">
                 <a:solidFill>
                   <a:srgbClr val="1A1A1A"/>
                 </a:solidFill>
@@ -8028,18 +10417,18 @@
       </p:sp>
       <p:sp>
         <p:nvSpPr>
-          <p:cNvPr id="15" name="Rounded Rectangle 14"/>
+          <p:cNvPr id="18" name="Rounded Rectangle 17"/>
           <p:cNvSpPr/>
           <p:nvPr/>
         </p:nvSpPr>
         <p:spPr>
           <a:xfrm>
-            <a:off x="841248" y="4206240"/>
-            <a:ext cx="5715000" cy="530352"/>
+            <a:off x="6254496" y="3328416"/>
+            <a:ext cx="5138928" cy="786384"/>
           </a:xfrm>
           <a:prstGeom prst="roundRect">
             <a:avLst>
-              <a:gd name="adj" fmla="val 6000"/>
+              <a:gd name="adj" fmla="val 7000"/>
             </a:avLst>
           </a:prstGeom>
           <a:solidFill>
@@ -8074,9 +10463,55 @@
           </a:p>
         </p:txBody>
       </p:sp>
+      <p:sp>
+        <p:nvSpPr>
+          <p:cNvPr id="19" name="Rounded Rectangle 18"/>
+          <p:cNvSpPr/>
+          <p:nvPr/>
+        </p:nvSpPr>
+        <p:spPr>
+          <a:xfrm>
+            <a:off x="6400800" y="3465576"/>
+            <a:ext cx="512064" cy="512064"/>
+          </a:xfrm>
+          <a:prstGeom prst="roundRect">
+            <a:avLst>
+              <a:gd name="adj" fmla="val 26000"/>
+            </a:avLst>
+          </a:prstGeom>
+          <a:solidFill>
+            <a:srgbClr val="EE0000"/>
+          </a:solidFill>
+          <a:ln>
+            <a:noFill/>
+          </a:ln>
+          <a:effectLst/>
+        </p:spPr>
+        <p:style>
+          <a:lnRef idx="1">
+            <a:schemeClr val="accent1"/>
+          </a:lnRef>
+          <a:fillRef idx="3">
+            <a:schemeClr val="accent1"/>
+          </a:fillRef>
+          <a:effectRef idx="2">
+            <a:schemeClr val="accent1"/>
+          </a:effectRef>
+          <a:fontRef idx="minor">
+            <a:schemeClr val="lt1"/>
+          </a:fontRef>
+        </p:style>
+        <p:txBody>
+          <a:bodyPr rtlCol="0" anchor="ctr"/>
+          <a:lstStyle/>
+          <a:p>
+            <a:pPr algn="ctr"/>
+          </a:p>
+        </p:txBody>
+      </p:sp>
       <p:pic>
         <p:nvPicPr>
-          <p:cNvPr id="16" name="Picture 15" descr="check_steel.png"/>
+          <p:cNvPr id="20" name="Picture 19" descr="check_white.png"/>
           <p:cNvPicPr>
             <a:picLocks noChangeAspect="1"/>
           </p:cNvPicPr>
@@ -8090,8 +10525,8 @@
         </p:blipFill>
         <p:spPr>
           <a:xfrm>
-            <a:off x="987552" y="4352544"/>
-            <a:ext cx="237744" cy="237744"/>
+            <a:off x="6523695" y="3588471"/>
+            <a:ext cx="266273" cy="266273"/>
           </a:xfrm>
           <a:prstGeom prst="rect">
             <a:avLst/>
@@ -8100,14 +10535,14 @@
       </p:pic>
       <p:sp>
         <p:nvSpPr>
-          <p:cNvPr id="17" name="TextBox 16"/>
+          <p:cNvPr id="21" name="TextBox 20"/>
           <p:cNvSpPr txBox="1"/>
           <p:nvPr/>
         </p:nvSpPr>
         <p:spPr>
           <a:xfrm>
-            <a:off x="1353312" y="4206240"/>
-            <a:ext cx="5029200" cy="530352"/>
+            <a:off x="7040880" y="3328416"/>
+            <a:ext cx="4206240" cy="786384"/>
           </a:xfrm>
           <a:prstGeom prst="rect">
             <a:avLst/>
@@ -8132,7 +10567,7 @@
               </a:spcAft>
             </a:pPr>
             <a:r>
-              <a:rPr sz="1200" b="0">
+              <a:rPr sz="1150" b="0">
                 <a:solidFill>
                   <a:srgbClr val="1A1A1A"/>
                 </a:solidFill>
@@ -8145,18 +10580,18 @@
       </p:sp>
       <p:sp>
         <p:nvSpPr>
-          <p:cNvPr id="18" name="Rounded Rectangle 17"/>
+          <p:cNvPr id="22" name="Rounded Rectangle 21"/>
           <p:cNvSpPr/>
           <p:nvPr/>
         </p:nvSpPr>
         <p:spPr>
           <a:xfrm>
-            <a:off x="841248" y="4809744"/>
-            <a:ext cx="5715000" cy="530352"/>
+            <a:off x="841248" y="4261104"/>
+            <a:ext cx="5138928" cy="786384"/>
           </a:xfrm>
           <a:prstGeom prst="roundRect">
             <a:avLst>
-              <a:gd name="adj" fmla="val 6000"/>
+              <a:gd name="adj" fmla="val 7000"/>
             </a:avLst>
           </a:prstGeom>
           <a:solidFill>
@@ -8191,9 +10626,55 @@
           </a:p>
         </p:txBody>
       </p:sp>
+      <p:sp>
+        <p:nvSpPr>
+          <p:cNvPr id="23" name="Rounded Rectangle 22"/>
+          <p:cNvSpPr/>
+          <p:nvPr/>
+        </p:nvSpPr>
+        <p:spPr>
+          <a:xfrm>
+            <a:off x="987552" y="4398264"/>
+            <a:ext cx="512064" cy="512064"/>
+          </a:xfrm>
+          <a:prstGeom prst="roundRect">
+            <a:avLst>
+              <a:gd name="adj" fmla="val 26000"/>
+            </a:avLst>
+          </a:prstGeom>
+          <a:solidFill>
+            <a:srgbClr val="EE0000"/>
+          </a:solidFill>
+          <a:ln>
+            <a:noFill/>
+          </a:ln>
+          <a:effectLst/>
+        </p:spPr>
+        <p:style>
+          <a:lnRef idx="1">
+            <a:schemeClr val="accent1"/>
+          </a:lnRef>
+          <a:fillRef idx="3">
+            <a:schemeClr val="accent1"/>
+          </a:fillRef>
+          <a:effectRef idx="2">
+            <a:schemeClr val="accent1"/>
+          </a:effectRef>
+          <a:fontRef idx="minor">
+            <a:schemeClr val="lt1"/>
+          </a:fontRef>
+        </p:style>
+        <p:txBody>
+          <a:bodyPr rtlCol="0" anchor="ctr"/>
+          <a:lstStyle/>
+          <a:p>
+            <a:pPr algn="ctr"/>
+          </a:p>
+        </p:txBody>
+      </p:sp>
       <p:pic>
         <p:nvPicPr>
-          <p:cNvPr id="19" name="Picture 18" descr="check_steel.png"/>
+          <p:cNvPr id="24" name="Picture 23" descr="check_white.png"/>
           <p:cNvPicPr>
             <a:picLocks noChangeAspect="1"/>
           </p:cNvPicPr>
@@ -8207,8 +10688,8 @@
         </p:blipFill>
         <p:spPr>
           <a:xfrm>
-            <a:off x="987552" y="4956048"/>
-            <a:ext cx="237744" cy="237744"/>
+            <a:off x="1110447" y="4521159"/>
+            <a:ext cx="266273" cy="266273"/>
           </a:xfrm>
           <a:prstGeom prst="rect">
             <a:avLst/>
@@ -8217,14 +10698,14 @@
       </p:pic>
       <p:sp>
         <p:nvSpPr>
-          <p:cNvPr id="20" name="TextBox 19"/>
+          <p:cNvPr id="25" name="TextBox 24"/>
           <p:cNvSpPr txBox="1"/>
           <p:nvPr/>
         </p:nvSpPr>
         <p:spPr>
           <a:xfrm>
-            <a:off x="1353312" y="4809744"/>
-            <a:ext cx="5029200" cy="530352"/>
+            <a:off x="1627632" y="4261104"/>
+            <a:ext cx="4206240" cy="786384"/>
           </a:xfrm>
           <a:prstGeom prst="rect">
             <a:avLst/>
@@ -8249,221 +10730,13 @@
               </a:spcAft>
             </a:pPr>
             <a:r>
-              <a:rPr sz="1200" b="0">
+              <a:rPr sz="1150" b="0">
                 <a:solidFill>
                   <a:srgbClr val="1A1A1A"/>
                 </a:solidFill>
                 <a:latin typeface="Red Hat Text"/>
               </a:rPr>
               <a:t>Get this vocabulary and Keycloak stops being mysterious</a:t>
-            </a:r>
-          </a:p>
-        </p:txBody>
-      </p:sp>
-      <p:sp>
-        <p:nvSpPr>
-          <p:cNvPr id="21" name="Rounded Rectangle 20"/>
-          <p:cNvSpPr/>
-          <p:nvPr/>
-        </p:nvSpPr>
-        <p:spPr>
-          <a:xfrm>
-            <a:off x="6812280" y="2395728"/>
-            <a:ext cx="4538167" cy="2944368"/>
-          </a:xfrm>
-          <a:prstGeom prst="roundRect">
-            <a:avLst>
-              <a:gd name="adj" fmla="val 4000"/>
-            </a:avLst>
-          </a:prstGeom>
-          <a:solidFill>
-            <a:srgbClr val="FFFFFF"/>
-          </a:solidFill>
-          <a:ln w="15240">
-            <a:solidFill>
-              <a:srgbClr val="DDE1E6"/>
-            </a:solidFill>
-          </a:ln>
-          <a:effectLst/>
-        </p:spPr>
-        <p:style>
-          <a:lnRef idx="1">
-            <a:schemeClr val="accent1"/>
-          </a:lnRef>
-          <a:fillRef idx="3">
-            <a:schemeClr val="accent1"/>
-          </a:fillRef>
-          <a:effectRef idx="2">
-            <a:schemeClr val="accent1"/>
-          </a:effectRef>
-          <a:fontRef idx="minor">
-            <a:schemeClr val="lt1"/>
-          </a:fontRef>
-        </p:style>
-        <p:txBody>
-          <a:bodyPr rtlCol="0" anchor="ctr"/>
-          <a:lstStyle/>
-          <a:p>
-            <a:pPr algn="ctr"/>
-          </a:p>
-        </p:txBody>
-      </p:sp>
-      <p:sp>
-        <p:nvSpPr>
-          <p:cNvPr id="22" name="Rounded Rectangle 21"/>
-          <p:cNvSpPr/>
-          <p:nvPr/>
-        </p:nvSpPr>
-        <p:spPr>
-          <a:xfrm>
-            <a:off x="7013448" y="2596896"/>
-            <a:ext cx="1298448" cy="310896"/>
-          </a:xfrm>
-          <a:prstGeom prst="roundRect">
-            <a:avLst>
-              <a:gd name="adj" fmla="val 50000"/>
-            </a:avLst>
-          </a:prstGeom>
-          <a:solidFill>
-            <a:srgbClr val="FCECEC"/>
-          </a:solidFill>
-          <a:ln>
-            <a:noFill/>
-          </a:ln>
-          <a:effectLst/>
-        </p:spPr>
-        <p:style>
-          <a:lnRef idx="1">
-            <a:schemeClr val="accent1"/>
-          </a:lnRef>
-          <a:fillRef idx="3">
-            <a:schemeClr val="accent1"/>
-          </a:fillRef>
-          <a:effectRef idx="2">
-            <a:schemeClr val="accent1"/>
-          </a:effectRef>
-          <a:fontRef idx="minor">
-            <a:schemeClr val="lt1"/>
-          </a:fontRef>
-        </p:style>
-        <p:txBody>
-          <a:bodyPr rtlCol="0" anchor="ctr"/>
-          <a:lstStyle/>
-          <a:p>
-            <a:pPr algn="ctr"/>
-          </a:p>
-        </p:txBody>
-      </p:sp>
-      <p:sp>
-        <p:nvSpPr>
-          <p:cNvPr id="23" name="TextBox 22"/>
-          <p:cNvSpPr txBox="1"/>
-          <p:nvPr/>
-        </p:nvSpPr>
-        <p:spPr>
-          <a:xfrm>
-            <a:off x="7013448" y="2596896"/>
-            <a:ext cx="1298448" cy="310896"/>
-          </a:xfrm>
-          <a:prstGeom prst="rect">
-            <a:avLst/>
-          </a:prstGeom>
-          <a:noFill/>
-        </p:spPr>
-        <p:txBody>
-          <a:bodyPr wrap="none" anchor="ctr" lIns="0" rIns="0" tIns="0" bIns="0">
-            <a:spAutoFit/>
-          </a:bodyPr>
-          <a:lstStyle/>
-          <a:p>
-            <a:pPr algn="ctr">
-              <a:lnSpc>
-                <a:spcPct val="106000"/>
-              </a:lnSpc>
-              <a:spcBef>
-                <a:spcPts val="0"/>
-              </a:spcBef>
-              <a:spcAft>
-                <a:spcPts val="0"/>
-              </a:spcAft>
-            </a:pPr>
-            <a:r>
-              <a:rPr sz="850" b="1">
-                <a:solidFill>
-                  <a:srgbClr val="B80000"/>
-                </a:solidFill>
-                <a:latin typeface="Red Hat Display"/>
-              </a:rPr>
-              <a:t>MEDIA PASS</a:t>
-            </a:r>
-          </a:p>
-        </p:txBody>
-      </p:sp>
-      <p:pic>
-        <p:nvPicPr>
-          <p:cNvPr id="24" name="Picture 23" descr="eye_slate.png"/>
-          <p:cNvPicPr>
-            <a:picLocks noChangeAspect="1"/>
-          </p:cNvPicPr>
-          <p:nvPr/>
-        </p:nvPicPr>
-        <p:blipFill>
-          <a:blip r:embed="rId4"/>
-          <a:stretch>
-            <a:fillRect/>
-          </a:stretch>
-        </p:blipFill>
-        <p:spPr>
-          <a:xfrm>
-            <a:off x="8843619" y="3108960"/>
-            <a:ext cx="475488" cy="475488"/>
-          </a:xfrm>
-          <a:prstGeom prst="rect">
-            <a:avLst/>
-          </a:prstGeom>
-        </p:spPr>
-      </p:pic>
-      <p:sp>
-        <p:nvSpPr>
-          <p:cNvPr id="25" name="TextBox 24"/>
-          <p:cNvSpPr txBox="1"/>
-          <p:nvPr/>
-        </p:nvSpPr>
-        <p:spPr>
-          <a:xfrm>
-            <a:off x="7050024" y="3721608"/>
-            <a:ext cx="4062679" cy="1481328"/>
-          </a:xfrm>
-          <a:prstGeom prst="rect">
-            <a:avLst/>
-          </a:prstGeom>
-          <a:noFill/>
-        </p:spPr>
-        <p:txBody>
-          <a:bodyPr wrap="square" anchor="t" lIns="0" rIns="0" tIns="0" bIns="0">
-            <a:spAutoFit/>
-          </a:bodyPr>
-          <a:lstStyle/>
-          <a:p>
-            <a:pPr algn="l">
-              <a:lnSpc>
-                <a:spcPct val="120000"/>
-              </a:lnSpc>
-              <a:spcBef>
-                <a:spcPts val="0"/>
-              </a:spcBef>
-              <a:spcAft>
-                <a:spcPts val="0"/>
-              </a:spcAft>
-            </a:pPr>
-            <a:r>
-              <a:rPr sz="950" b="0">
-                <a:solidFill>
-                  <a:srgbClr val="8A9099"/>
-                </a:solidFill>
-                <a:latin typeface="Red Hat Text"/>
-              </a:rPr>
-              <a:t>Concept diagram securing-apps-keycloak-02-realm-model — realm containing clients / roles / users, with the four Parasol clients and two users as leaves.</a:t>
             </a:r>
           </a:p>
         </p:txBody>
@@ -8771,11 +11044,11 @@
         <p:spPr>
           <a:xfrm>
             <a:off x="841248" y="2395728"/>
-            <a:ext cx="5715000" cy="530352"/>
+            <a:ext cx="5138928" cy="786384"/>
           </a:xfrm>
           <a:prstGeom prst="roundRect">
             <a:avLst>
-              <a:gd name="adj" fmla="val 6000"/>
+              <a:gd name="adj" fmla="val 7000"/>
             </a:avLst>
           </a:prstGeom>
           <a:solidFill>
@@ -8810,9 +11083,55 @@
           </a:p>
         </p:txBody>
       </p:sp>
+      <p:sp>
+        <p:nvSpPr>
+          <p:cNvPr id="7" name="Rounded Rectangle 6"/>
+          <p:cNvSpPr/>
+          <p:nvPr/>
+        </p:nvSpPr>
+        <p:spPr>
+          <a:xfrm>
+            <a:off x="987552" y="2532888"/>
+            <a:ext cx="512064" cy="512064"/>
+          </a:xfrm>
+          <a:prstGeom prst="roundRect">
+            <a:avLst>
+              <a:gd name="adj" fmla="val 26000"/>
+            </a:avLst>
+          </a:prstGeom>
+          <a:solidFill>
+            <a:srgbClr val="EE0000"/>
+          </a:solidFill>
+          <a:ln>
+            <a:noFill/>
+          </a:ln>
+          <a:effectLst/>
+        </p:spPr>
+        <p:style>
+          <a:lnRef idx="1">
+            <a:schemeClr val="accent1"/>
+          </a:lnRef>
+          <a:fillRef idx="3">
+            <a:schemeClr val="accent1"/>
+          </a:fillRef>
+          <a:effectRef idx="2">
+            <a:schemeClr val="accent1"/>
+          </a:effectRef>
+          <a:fontRef idx="minor">
+            <a:schemeClr val="lt1"/>
+          </a:fontRef>
+        </p:style>
+        <p:txBody>
+          <a:bodyPr rtlCol="0" anchor="ctr"/>
+          <a:lstStyle/>
+          <a:p>
+            <a:pPr algn="ctr"/>
+          </a:p>
+        </p:txBody>
+      </p:sp>
       <p:pic>
         <p:nvPicPr>
-          <p:cNvPr id="7" name="Picture 6" descr="check_steel.png"/>
+          <p:cNvPr id="8" name="Picture 7" descr="check_white.png"/>
           <p:cNvPicPr>
             <a:picLocks noChangeAspect="1"/>
           </p:cNvPicPr>
@@ -8826,8 +11145,8 @@
         </p:blipFill>
         <p:spPr>
           <a:xfrm>
-            <a:off x="987552" y="2542032"/>
-            <a:ext cx="237744" cy="237744"/>
+            <a:off x="1110447" y="2655783"/>
+            <a:ext cx="266273" cy="266273"/>
           </a:xfrm>
           <a:prstGeom prst="rect">
             <a:avLst/>
@@ -8836,14 +11155,14 @@
       </p:pic>
       <p:sp>
         <p:nvSpPr>
-          <p:cNvPr id="8" name="TextBox 7"/>
+          <p:cNvPr id="9" name="TextBox 8"/>
           <p:cNvSpPr txBox="1"/>
           <p:nvPr/>
         </p:nvSpPr>
         <p:spPr>
           <a:xfrm>
-            <a:off x="1353312" y="2395728"/>
-            <a:ext cx="5029200" cy="530352"/>
+            <a:off x="1627632" y="2395728"/>
+            <a:ext cx="4206240" cy="786384"/>
           </a:xfrm>
           <a:prstGeom prst="rect">
             <a:avLst/>
@@ -8868,7 +11187,7 @@
               </a:spcAft>
             </a:pPr>
             <a:r>
-              <a:rPr sz="1200" b="0">
+              <a:rPr sz="1150" b="0">
                 <a:solidFill>
                   <a:srgbClr val="1A1A1A"/>
                 </a:solidFill>
@@ -8881,18 +11200,18 @@
       </p:sp>
       <p:sp>
         <p:nvSpPr>
-          <p:cNvPr id="9" name="Rounded Rectangle 8"/>
+          <p:cNvPr id="10" name="Rounded Rectangle 9"/>
           <p:cNvSpPr/>
           <p:nvPr/>
         </p:nvSpPr>
         <p:spPr>
           <a:xfrm>
-            <a:off x="841248" y="2999232"/>
-            <a:ext cx="5715000" cy="530352"/>
+            <a:off x="6254496" y="2395728"/>
+            <a:ext cx="5138928" cy="786384"/>
           </a:xfrm>
           <a:prstGeom prst="roundRect">
             <a:avLst>
-              <a:gd name="adj" fmla="val 6000"/>
+              <a:gd name="adj" fmla="val 7000"/>
             </a:avLst>
           </a:prstGeom>
           <a:solidFill>
@@ -8927,9 +11246,55 @@
           </a:p>
         </p:txBody>
       </p:sp>
+      <p:sp>
+        <p:nvSpPr>
+          <p:cNvPr id="11" name="Rounded Rectangle 10"/>
+          <p:cNvSpPr/>
+          <p:nvPr/>
+        </p:nvSpPr>
+        <p:spPr>
+          <a:xfrm>
+            <a:off x="6400800" y="2532888"/>
+            <a:ext cx="512064" cy="512064"/>
+          </a:xfrm>
+          <a:prstGeom prst="roundRect">
+            <a:avLst>
+              <a:gd name="adj" fmla="val 26000"/>
+            </a:avLst>
+          </a:prstGeom>
+          <a:solidFill>
+            <a:srgbClr val="EE0000"/>
+          </a:solidFill>
+          <a:ln>
+            <a:noFill/>
+          </a:ln>
+          <a:effectLst/>
+        </p:spPr>
+        <p:style>
+          <a:lnRef idx="1">
+            <a:schemeClr val="accent1"/>
+          </a:lnRef>
+          <a:fillRef idx="3">
+            <a:schemeClr val="accent1"/>
+          </a:fillRef>
+          <a:effectRef idx="2">
+            <a:schemeClr val="accent1"/>
+          </a:effectRef>
+          <a:fontRef idx="minor">
+            <a:schemeClr val="lt1"/>
+          </a:fontRef>
+        </p:style>
+        <p:txBody>
+          <a:bodyPr rtlCol="0" anchor="ctr"/>
+          <a:lstStyle/>
+          <a:p>
+            <a:pPr algn="ctr"/>
+          </a:p>
+        </p:txBody>
+      </p:sp>
       <p:pic>
         <p:nvPicPr>
-          <p:cNvPr id="10" name="Picture 9" descr="check_steel.png"/>
+          <p:cNvPr id="12" name="Picture 11" descr="check_white.png"/>
           <p:cNvPicPr>
             <a:picLocks noChangeAspect="1"/>
           </p:cNvPicPr>
@@ -8943,8 +11308,8 @@
         </p:blipFill>
         <p:spPr>
           <a:xfrm>
-            <a:off x="987552" y="3145536"/>
-            <a:ext cx="237744" cy="237744"/>
+            <a:off x="6523695" y="2655783"/>
+            <a:ext cx="266273" cy="266273"/>
           </a:xfrm>
           <a:prstGeom prst="rect">
             <a:avLst/>
@@ -8953,14 +11318,14 @@
       </p:pic>
       <p:sp>
         <p:nvSpPr>
-          <p:cNvPr id="11" name="TextBox 10"/>
+          <p:cNvPr id="13" name="TextBox 12"/>
           <p:cNvSpPr txBox="1"/>
           <p:nvPr/>
         </p:nvSpPr>
         <p:spPr>
           <a:xfrm>
-            <a:off x="1353312" y="2999232"/>
-            <a:ext cx="5029200" cy="530352"/>
+            <a:off x="7040880" y="2395728"/>
+            <a:ext cx="4206240" cy="786384"/>
           </a:xfrm>
           <a:prstGeom prst="rect">
             <a:avLst/>
@@ -8985,7 +11350,7 @@
               </a:spcAft>
             </a:pPr>
             <a:r>
-              <a:rPr sz="1200" b="0">
+              <a:rPr sz="1150" b="0">
                 <a:solidFill>
                   <a:srgbClr val="1A1A1A"/>
                 </a:solidFill>
@@ -8998,18 +11363,18 @@
       </p:sp>
       <p:sp>
         <p:nvSpPr>
-          <p:cNvPr id="12" name="Rounded Rectangle 11"/>
+          <p:cNvPr id="14" name="Rounded Rectangle 13"/>
           <p:cNvSpPr/>
           <p:nvPr/>
         </p:nvSpPr>
         <p:spPr>
           <a:xfrm>
-            <a:off x="841248" y="3602736"/>
-            <a:ext cx="5715000" cy="530352"/>
+            <a:off x="841248" y="3328416"/>
+            <a:ext cx="5138928" cy="786384"/>
           </a:xfrm>
           <a:prstGeom prst="roundRect">
             <a:avLst>
-              <a:gd name="adj" fmla="val 6000"/>
+              <a:gd name="adj" fmla="val 7000"/>
             </a:avLst>
           </a:prstGeom>
           <a:solidFill>
@@ -9044,9 +11409,55 @@
           </a:p>
         </p:txBody>
       </p:sp>
+      <p:sp>
+        <p:nvSpPr>
+          <p:cNvPr id="15" name="Rounded Rectangle 14"/>
+          <p:cNvSpPr/>
+          <p:nvPr/>
+        </p:nvSpPr>
+        <p:spPr>
+          <a:xfrm>
+            <a:off x="987552" y="3465576"/>
+            <a:ext cx="512064" cy="512064"/>
+          </a:xfrm>
+          <a:prstGeom prst="roundRect">
+            <a:avLst>
+              <a:gd name="adj" fmla="val 26000"/>
+            </a:avLst>
+          </a:prstGeom>
+          <a:solidFill>
+            <a:srgbClr val="EE0000"/>
+          </a:solidFill>
+          <a:ln>
+            <a:noFill/>
+          </a:ln>
+          <a:effectLst/>
+        </p:spPr>
+        <p:style>
+          <a:lnRef idx="1">
+            <a:schemeClr val="accent1"/>
+          </a:lnRef>
+          <a:fillRef idx="3">
+            <a:schemeClr val="accent1"/>
+          </a:fillRef>
+          <a:effectRef idx="2">
+            <a:schemeClr val="accent1"/>
+          </a:effectRef>
+          <a:fontRef idx="minor">
+            <a:schemeClr val="lt1"/>
+          </a:fontRef>
+        </p:style>
+        <p:txBody>
+          <a:bodyPr rtlCol="0" anchor="ctr"/>
+          <a:lstStyle/>
+          <a:p>
+            <a:pPr algn="ctr"/>
+          </a:p>
+        </p:txBody>
+      </p:sp>
       <p:pic>
         <p:nvPicPr>
-          <p:cNvPr id="13" name="Picture 12" descr="check_steel.png"/>
+          <p:cNvPr id="16" name="Picture 15" descr="check_white.png"/>
           <p:cNvPicPr>
             <a:picLocks noChangeAspect="1"/>
           </p:cNvPicPr>
@@ -9060,8 +11471,8 @@
         </p:blipFill>
         <p:spPr>
           <a:xfrm>
-            <a:off x="987552" y="3749040"/>
-            <a:ext cx="237744" cy="237744"/>
+            <a:off x="1110447" y="3588471"/>
+            <a:ext cx="266273" cy="266273"/>
           </a:xfrm>
           <a:prstGeom prst="rect">
             <a:avLst/>
@@ -9070,14 +11481,14 @@
       </p:pic>
       <p:sp>
         <p:nvSpPr>
-          <p:cNvPr id="14" name="TextBox 13"/>
+          <p:cNvPr id="17" name="TextBox 16"/>
           <p:cNvSpPr txBox="1"/>
           <p:nvPr/>
         </p:nvSpPr>
         <p:spPr>
           <a:xfrm>
-            <a:off x="1353312" y="3602736"/>
-            <a:ext cx="5029200" cy="530352"/>
+            <a:off x="1627632" y="3328416"/>
+            <a:ext cx="4206240" cy="786384"/>
           </a:xfrm>
           <a:prstGeom prst="rect">
             <a:avLst/>
@@ -9102,7 +11513,7 @@
               </a:spcAft>
             </a:pPr>
             <a:r>
-              <a:rPr sz="1200" b="0">
+              <a:rPr sz="1150" b="0">
                 <a:solidFill>
                   <a:srgbClr val="1A1A1A"/>
                 </a:solidFill>
@@ -9115,18 +11526,18 @@
       </p:sp>
       <p:sp>
         <p:nvSpPr>
-          <p:cNvPr id="15" name="Rounded Rectangle 14"/>
+          <p:cNvPr id="18" name="Rounded Rectangle 17"/>
           <p:cNvSpPr/>
           <p:nvPr/>
         </p:nvSpPr>
         <p:spPr>
           <a:xfrm>
-            <a:off x="841248" y="4206240"/>
-            <a:ext cx="5715000" cy="530352"/>
+            <a:off x="6254496" y="3328416"/>
+            <a:ext cx="5138928" cy="786384"/>
           </a:xfrm>
           <a:prstGeom prst="roundRect">
             <a:avLst>
-              <a:gd name="adj" fmla="val 6000"/>
+              <a:gd name="adj" fmla="val 7000"/>
             </a:avLst>
           </a:prstGeom>
           <a:solidFill>
@@ -9161,9 +11572,55 @@
           </a:p>
         </p:txBody>
       </p:sp>
+      <p:sp>
+        <p:nvSpPr>
+          <p:cNvPr id="19" name="Rounded Rectangle 18"/>
+          <p:cNvSpPr/>
+          <p:nvPr/>
+        </p:nvSpPr>
+        <p:spPr>
+          <a:xfrm>
+            <a:off x="6400800" y="3465576"/>
+            <a:ext cx="512064" cy="512064"/>
+          </a:xfrm>
+          <a:prstGeom prst="roundRect">
+            <a:avLst>
+              <a:gd name="adj" fmla="val 26000"/>
+            </a:avLst>
+          </a:prstGeom>
+          <a:solidFill>
+            <a:srgbClr val="EE0000"/>
+          </a:solidFill>
+          <a:ln>
+            <a:noFill/>
+          </a:ln>
+          <a:effectLst/>
+        </p:spPr>
+        <p:style>
+          <a:lnRef idx="1">
+            <a:schemeClr val="accent1"/>
+          </a:lnRef>
+          <a:fillRef idx="3">
+            <a:schemeClr val="accent1"/>
+          </a:fillRef>
+          <a:effectRef idx="2">
+            <a:schemeClr val="accent1"/>
+          </a:effectRef>
+          <a:fontRef idx="minor">
+            <a:schemeClr val="lt1"/>
+          </a:fontRef>
+        </p:style>
+        <p:txBody>
+          <a:bodyPr rtlCol="0" anchor="ctr"/>
+          <a:lstStyle/>
+          <a:p>
+            <a:pPr algn="ctr"/>
+          </a:p>
+        </p:txBody>
+      </p:sp>
       <p:pic>
         <p:nvPicPr>
-          <p:cNvPr id="16" name="Picture 15" descr="check_steel.png"/>
+          <p:cNvPr id="20" name="Picture 19" descr="check_white.png"/>
           <p:cNvPicPr>
             <a:picLocks noChangeAspect="1"/>
           </p:cNvPicPr>
@@ -9177,8 +11634,8 @@
         </p:blipFill>
         <p:spPr>
           <a:xfrm>
-            <a:off x="987552" y="4352544"/>
-            <a:ext cx="237744" cy="237744"/>
+            <a:off x="6523695" y="3588471"/>
+            <a:ext cx="266273" cy="266273"/>
           </a:xfrm>
           <a:prstGeom prst="rect">
             <a:avLst/>
@@ -9187,14 +11644,14 @@
       </p:pic>
       <p:sp>
         <p:nvSpPr>
-          <p:cNvPr id="17" name="TextBox 16"/>
+          <p:cNvPr id="21" name="TextBox 20"/>
           <p:cNvSpPr txBox="1"/>
           <p:nvPr/>
         </p:nvSpPr>
         <p:spPr>
           <a:xfrm>
-            <a:off x="1353312" y="4206240"/>
-            <a:ext cx="5029200" cy="530352"/>
+            <a:off x="7040880" y="3328416"/>
+            <a:ext cx="4206240" cy="786384"/>
           </a:xfrm>
           <a:prstGeom prst="rect">
             <a:avLst/>
@@ -9219,7 +11676,7 @@
               </a:spcAft>
             </a:pPr>
             <a:r>
-              <a:rPr sz="1200" b="0">
+              <a:rPr sz="1150" b="0">
                 <a:solidFill>
                   <a:srgbClr val="1A1A1A"/>
                 </a:solidFill>
@@ -9232,18 +11689,18 @@
       </p:sp>
       <p:sp>
         <p:nvSpPr>
-          <p:cNvPr id="18" name="Rounded Rectangle 17"/>
+          <p:cNvPr id="22" name="Rounded Rectangle 21"/>
           <p:cNvSpPr/>
           <p:nvPr/>
         </p:nvSpPr>
         <p:spPr>
           <a:xfrm>
-            <a:off x="841248" y="4809744"/>
-            <a:ext cx="5715000" cy="530352"/>
+            <a:off x="841248" y="4261104"/>
+            <a:ext cx="5138928" cy="786384"/>
           </a:xfrm>
           <a:prstGeom prst="roundRect">
             <a:avLst>
-              <a:gd name="adj" fmla="val 6000"/>
+              <a:gd name="adj" fmla="val 7000"/>
             </a:avLst>
           </a:prstGeom>
           <a:solidFill>
@@ -9278,9 +11735,55 @@
           </a:p>
         </p:txBody>
       </p:sp>
+      <p:sp>
+        <p:nvSpPr>
+          <p:cNvPr id="23" name="Rounded Rectangle 22"/>
+          <p:cNvSpPr/>
+          <p:nvPr/>
+        </p:nvSpPr>
+        <p:spPr>
+          <a:xfrm>
+            <a:off x="987552" y="4398264"/>
+            <a:ext cx="512064" cy="512064"/>
+          </a:xfrm>
+          <a:prstGeom prst="roundRect">
+            <a:avLst>
+              <a:gd name="adj" fmla="val 26000"/>
+            </a:avLst>
+          </a:prstGeom>
+          <a:solidFill>
+            <a:srgbClr val="EE0000"/>
+          </a:solidFill>
+          <a:ln>
+            <a:noFill/>
+          </a:ln>
+          <a:effectLst/>
+        </p:spPr>
+        <p:style>
+          <a:lnRef idx="1">
+            <a:schemeClr val="accent1"/>
+          </a:lnRef>
+          <a:fillRef idx="3">
+            <a:schemeClr val="accent1"/>
+          </a:fillRef>
+          <a:effectRef idx="2">
+            <a:schemeClr val="accent1"/>
+          </a:effectRef>
+          <a:fontRef idx="minor">
+            <a:schemeClr val="lt1"/>
+          </a:fontRef>
+        </p:style>
+        <p:txBody>
+          <a:bodyPr rtlCol="0" anchor="ctr"/>
+          <a:lstStyle/>
+          <a:p>
+            <a:pPr algn="ctr"/>
+          </a:p>
+        </p:txBody>
+      </p:sp>
       <p:pic>
         <p:nvPicPr>
-          <p:cNvPr id="19" name="Picture 18" descr="check_steel.png"/>
+          <p:cNvPr id="24" name="Picture 23" descr="check_white.png"/>
           <p:cNvPicPr>
             <a:picLocks noChangeAspect="1"/>
           </p:cNvPicPr>
@@ -9294,8 +11797,8 @@
         </p:blipFill>
         <p:spPr>
           <a:xfrm>
-            <a:off x="987552" y="4956048"/>
-            <a:ext cx="237744" cy="237744"/>
+            <a:off x="1110447" y="4521159"/>
+            <a:ext cx="266273" cy="266273"/>
           </a:xfrm>
           <a:prstGeom prst="rect">
             <a:avLst/>
@@ -9304,14 +11807,14 @@
       </p:pic>
       <p:sp>
         <p:nvSpPr>
-          <p:cNvPr id="20" name="TextBox 19"/>
+          <p:cNvPr id="25" name="TextBox 24"/>
           <p:cNvSpPr txBox="1"/>
           <p:nvPr/>
         </p:nvSpPr>
         <p:spPr>
           <a:xfrm>
-            <a:off x="1353312" y="4809744"/>
-            <a:ext cx="5029200" cy="530352"/>
+            <a:off x="1627632" y="4261104"/>
+            <a:ext cx="4206240" cy="786384"/>
           </a:xfrm>
           <a:prstGeom prst="rect">
             <a:avLst/>
@@ -9336,221 +11839,13 @@
               </a:spcAft>
             </a:pPr>
             <a:r>
-              <a:rPr sz="1200" b="0">
+              <a:rPr sz="1150" b="0">
                 <a:solidFill>
                   <a:srgbClr val="1A1A1A"/>
                 </a:solidFill>
                 <a:latin typeface="Red Hat Text"/>
               </a:rPr>
               <a:t>**The punchline: Red Hat build of Keycloak is included with your OpenShift subscription**</a:t>
-            </a:r>
-          </a:p>
-        </p:txBody>
-      </p:sp>
-      <p:sp>
-        <p:nvSpPr>
-          <p:cNvPr id="21" name="Rounded Rectangle 20"/>
-          <p:cNvSpPr/>
-          <p:nvPr/>
-        </p:nvSpPr>
-        <p:spPr>
-          <a:xfrm>
-            <a:off x="6812280" y="2395728"/>
-            <a:ext cx="4538167" cy="2944368"/>
-          </a:xfrm>
-          <a:prstGeom prst="roundRect">
-            <a:avLst>
-              <a:gd name="adj" fmla="val 4000"/>
-            </a:avLst>
-          </a:prstGeom>
-          <a:solidFill>
-            <a:srgbClr val="FFFFFF"/>
-          </a:solidFill>
-          <a:ln w="15240">
-            <a:solidFill>
-              <a:srgbClr val="DDE1E6"/>
-            </a:solidFill>
-          </a:ln>
-          <a:effectLst/>
-        </p:spPr>
-        <p:style>
-          <a:lnRef idx="1">
-            <a:schemeClr val="accent1"/>
-          </a:lnRef>
-          <a:fillRef idx="3">
-            <a:schemeClr val="accent1"/>
-          </a:fillRef>
-          <a:effectRef idx="2">
-            <a:schemeClr val="accent1"/>
-          </a:effectRef>
-          <a:fontRef idx="minor">
-            <a:schemeClr val="lt1"/>
-          </a:fontRef>
-        </p:style>
-        <p:txBody>
-          <a:bodyPr rtlCol="0" anchor="ctr"/>
-          <a:lstStyle/>
-          <a:p>
-            <a:pPr algn="ctr"/>
-          </a:p>
-        </p:txBody>
-      </p:sp>
-      <p:sp>
-        <p:nvSpPr>
-          <p:cNvPr id="22" name="Rounded Rectangle 21"/>
-          <p:cNvSpPr/>
-          <p:nvPr/>
-        </p:nvSpPr>
-        <p:spPr>
-          <a:xfrm>
-            <a:off x="7013448" y="2596896"/>
-            <a:ext cx="1298448" cy="310896"/>
-          </a:xfrm>
-          <a:prstGeom prst="roundRect">
-            <a:avLst>
-              <a:gd name="adj" fmla="val 50000"/>
-            </a:avLst>
-          </a:prstGeom>
-          <a:solidFill>
-            <a:srgbClr val="FCECEC"/>
-          </a:solidFill>
-          <a:ln>
-            <a:noFill/>
-          </a:ln>
-          <a:effectLst/>
-        </p:spPr>
-        <p:style>
-          <a:lnRef idx="1">
-            <a:schemeClr val="accent1"/>
-          </a:lnRef>
-          <a:fillRef idx="3">
-            <a:schemeClr val="accent1"/>
-          </a:fillRef>
-          <a:effectRef idx="2">
-            <a:schemeClr val="accent1"/>
-          </a:effectRef>
-          <a:fontRef idx="minor">
-            <a:schemeClr val="lt1"/>
-          </a:fontRef>
-        </p:style>
-        <p:txBody>
-          <a:bodyPr rtlCol="0" anchor="ctr"/>
-          <a:lstStyle/>
-          <a:p>
-            <a:pPr algn="ctr"/>
-          </a:p>
-        </p:txBody>
-      </p:sp>
-      <p:sp>
-        <p:nvSpPr>
-          <p:cNvPr id="23" name="TextBox 22"/>
-          <p:cNvSpPr txBox="1"/>
-          <p:nvPr/>
-        </p:nvSpPr>
-        <p:spPr>
-          <a:xfrm>
-            <a:off x="7013448" y="2596896"/>
-            <a:ext cx="1298448" cy="310896"/>
-          </a:xfrm>
-          <a:prstGeom prst="rect">
-            <a:avLst/>
-          </a:prstGeom>
-          <a:noFill/>
-        </p:spPr>
-        <p:txBody>
-          <a:bodyPr wrap="none" anchor="ctr" lIns="0" rIns="0" tIns="0" bIns="0">
-            <a:spAutoFit/>
-          </a:bodyPr>
-          <a:lstStyle/>
-          <a:p>
-            <a:pPr algn="ctr">
-              <a:lnSpc>
-                <a:spcPct val="106000"/>
-              </a:lnSpc>
-              <a:spcBef>
-                <a:spcPts val="0"/>
-              </a:spcBef>
-              <a:spcAft>
-                <a:spcPts val="0"/>
-              </a:spcAft>
-            </a:pPr>
-            <a:r>
-              <a:rPr sz="850" b="1">
-                <a:solidFill>
-                  <a:srgbClr val="B80000"/>
-                </a:solidFill>
-                <a:latin typeface="Red Hat Display"/>
-              </a:rPr>
-              <a:t>MEDIA PASS</a:t>
-            </a:r>
-          </a:p>
-        </p:txBody>
-      </p:sp>
-      <p:pic>
-        <p:nvPicPr>
-          <p:cNvPr id="24" name="Picture 23" descr="eye_slate.png"/>
-          <p:cNvPicPr>
-            <a:picLocks noChangeAspect="1"/>
-          </p:cNvPicPr>
-          <p:nvPr/>
-        </p:nvPicPr>
-        <p:blipFill>
-          <a:blip r:embed="rId4"/>
-          <a:stretch>
-            <a:fillRect/>
-          </a:stretch>
-        </p:blipFill>
-        <p:spPr>
-          <a:xfrm>
-            <a:off x="8843619" y="3108960"/>
-            <a:ext cx="475488" cy="475488"/>
-          </a:xfrm>
-          <a:prstGeom prst="rect">
-            <a:avLst/>
-          </a:prstGeom>
-        </p:spPr>
-      </p:pic>
-      <p:sp>
-        <p:nvSpPr>
-          <p:cNvPr id="25" name="TextBox 24"/>
-          <p:cNvSpPr txBox="1"/>
-          <p:nvPr/>
-        </p:nvSpPr>
-        <p:spPr>
-          <a:xfrm>
-            <a:off x="7050024" y="3721608"/>
-            <a:ext cx="4062679" cy="1481328"/>
-          </a:xfrm>
-          <a:prstGeom prst="rect">
-            <a:avLst/>
-          </a:prstGeom>
-          <a:noFill/>
-        </p:spPr>
-        <p:txBody>
-          <a:bodyPr wrap="square" anchor="t" lIns="0" rIns="0" tIns="0" bIns="0">
-            <a:spAutoFit/>
-          </a:bodyPr>
-          <a:lstStyle/>
-          <a:p>
-            <a:pPr algn="l">
-              <a:lnSpc>
-                <a:spcPct val="120000"/>
-              </a:lnSpc>
-              <a:spcBef>
-                <a:spcPts val="0"/>
-              </a:spcBef>
-              <a:spcAft>
-                <a:spcPts val="0"/>
-              </a:spcAft>
-            </a:pPr>
-            <a:r>
-              <a:rPr sz="950" b="0">
-                <a:solidFill>
-                  <a:srgbClr val="8A9099"/>
-                </a:solidFill>
-                <a:latin typeface="Red Hat Text"/>
-              </a:rPr>
-              <a:t>Concept diagram securing-apps-keycloak-03-build-vs-buy — a long "build it yourself" column of risk vs a single "included with OpenShift" tile.</a:t>
             </a:r>
           </a:p>
         </p:txBody>
@@ -9858,11 +12153,11 @@
         <p:spPr>
           <a:xfrm>
             <a:off x="841248" y="2395728"/>
-            <a:ext cx="5715000" cy="530352"/>
+            <a:ext cx="5138928" cy="786384"/>
           </a:xfrm>
           <a:prstGeom prst="roundRect">
             <a:avLst>
-              <a:gd name="adj" fmla="val 6000"/>
+              <a:gd name="adj" fmla="val 7000"/>
             </a:avLst>
           </a:prstGeom>
           <a:solidFill>
@@ -9897,9 +12192,55 @@
           </a:p>
         </p:txBody>
       </p:sp>
+      <p:sp>
+        <p:nvSpPr>
+          <p:cNvPr id="7" name="Rounded Rectangle 6"/>
+          <p:cNvSpPr/>
+          <p:nvPr/>
+        </p:nvSpPr>
+        <p:spPr>
+          <a:xfrm>
+            <a:off x="987552" y="2532888"/>
+            <a:ext cx="512064" cy="512064"/>
+          </a:xfrm>
+          <a:prstGeom prst="roundRect">
+            <a:avLst>
+              <a:gd name="adj" fmla="val 26000"/>
+            </a:avLst>
+          </a:prstGeom>
+          <a:solidFill>
+            <a:srgbClr val="EE0000"/>
+          </a:solidFill>
+          <a:ln>
+            <a:noFill/>
+          </a:ln>
+          <a:effectLst/>
+        </p:spPr>
+        <p:style>
+          <a:lnRef idx="1">
+            <a:schemeClr val="accent1"/>
+          </a:lnRef>
+          <a:fillRef idx="3">
+            <a:schemeClr val="accent1"/>
+          </a:fillRef>
+          <a:effectRef idx="2">
+            <a:schemeClr val="accent1"/>
+          </a:effectRef>
+          <a:fontRef idx="minor">
+            <a:schemeClr val="lt1"/>
+          </a:fontRef>
+        </p:style>
+        <p:txBody>
+          <a:bodyPr rtlCol="0" anchor="ctr"/>
+          <a:lstStyle/>
+          <a:p>
+            <a:pPr algn="ctr"/>
+          </a:p>
+        </p:txBody>
+      </p:sp>
       <p:pic>
         <p:nvPicPr>
-          <p:cNvPr id="7" name="Picture 6" descr="check_steel.png"/>
+          <p:cNvPr id="8" name="Picture 7" descr="check_white.png"/>
           <p:cNvPicPr>
             <a:picLocks noChangeAspect="1"/>
           </p:cNvPicPr>
@@ -9913,8 +12254,8 @@
         </p:blipFill>
         <p:spPr>
           <a:xfrm>
-            <a:off x="987552" y="2542032"/>
-            <a:ext cx="237744" cy="237744"/>
+            <a:off x="1110447" y="2655783"/>
+            <a:ext cx="266273" cy="266273"/>
           </a:xfrm>
           <a:prstGeom prst="rect">
             <a:avLst/>
@@ -9923,14 +12264,14 @@
       </p:pic>
       <p:sp>
         <p:nvSpPr>
-          <p:cNvPr id="8" name="TextBox 7"/>
+          <p:cNvPr id="9" name="TextBox 8"/>
           <p:cNvSpPr txBox="1"/>
           <p:nvPr/>
         </p:nvSpPr>
         <p:spPr>
           <a:xfrm>
-            <a:off x="1353312" y="2395728"/>
-            <a:ext cx="5029200" cy="530352"/>
+            <a:off x="1627632" y="2395728"/>
+            <a:ext cx="4206240" cy="786384"/>
           </a:xfrm>
           <a:prstGeom prst="rect">
             <a:avLst/>
@@ -9955,7 +12296,7 @@
               </a:spcAft>
             </a:pPr>
             <a:r>
-              <a:rPr sz="1200" b="0">
+              <a:rPr sz="1150" b="0">
                 <a:solidFill>
                   <a:srgbClr val="1A1A1A"/>
                 </a:solidFill>
@@ -9968,18 +12309,18 @@
       </p:sp>
       <p:sp>
         <p:nvSpPr>
-          <p:cNvPr id="9" name="Rounded Rectangle 8"/>
+          <p:cNvPr id="10" name="Rounded Rectangle 9"/>
           <p:cNvSpPr/>
           <p:nvPr/>
         </p:nvSpPr>
         <p:spPr>
           <a:xfrm>
-            <a:off x="841248" y="2999232"/>
-            <a:ext cx="5715000" cy="530352"/>
+            <a:off x="6254496" y="2395728"/>
+            <a:ext cx="5138928" cy="786384"/>
           </a:xfrm>
           <a:prstGeom prst="roundRect">
             <a:avLst>
-              <a:gd name="adj" fmla="val 6000"/>
+              <a:gd name="adj" fmla="val 7000"/>
             </a:avLst>
           </a:prstGeom>
           <a:solidFill>
@@ -10014,9 +12355,55 @@
           </a:p>
         </p:txBody>
       </p:sp>
+      <p:sp>
+        <p:nvSpPr>
+          <p:cNvPr id="11" name="Rounded Rectangle 10"/>
+          <p:cNvSpPr/>
+          <p:nvPr/>
+        </p:nvSpPr>
+        <p:spPr>
+          <a:xfrm>
+            <a:off x="6400800" y="2532888"/>
+            <a:ext cx="512064" cy="512064"/>
+          </a:xfrm>
+          <a:prstGeom prst="roundRect">
+            <a:avLst>
+              <a:gd name="adj" fmla="val 26000"/>
+            </a:avLst>
+          </a:prstGeom>
+          <a:solidFill>
+            <a:srgbClr val="EE0000"/>
+          </a:solidFill>
+          <a:ln>
+            <a:noFill/>
+          </a:ln>
+          <a:effectLst/>
+        </p:spPr>
+        <p:style>
+          <a:lnRef idx="1">
+            <a:schemeClr val="accent1"/>
+          </a:lnRef>
+          <a:fillRef idx="3">
+            <a:schemeClr val="accent1"/>
+          </a:fillRef>
+          <a:effectRef idx="2">
+            <a:schemeClr val="accent1"/>
+          </a:effectRef>
+          <a:fontRef idx="minor">
+            <a:schemeClr val="lt1"/>
+          </a:fontRef>
+        </p:style>
+        <p:txBody>
+          <a:bodyPr rtlCol="0" anchor="ctr"/>
+          <a:lstStyle/>
+          <a:p>
+            <a:pPr algn="ctr"/>
+          </a:p>
+        </p:txBody>
+      </p:sp>
       <p:pic>
         <p:nvPicPr>
-          <p:cNvPr id="10" name="Picture 9" descr="check_steel.png"/>
+          <p:cNvPr id="12" name="Picture 11" descr="check_white.png"/>
           <p:cNvPicPr>
             <a:picLocks noChangeAspect="1"/>
           </p:cNvPicPr>
@@ -10030,8 +12417,8 @@
         </p:blipFill>
         <p:spPr>
           <a:xfrm>
-            <a:off x="987552" y="3145536"/>
-            <a:ext cx="237744" cy="237744"/>
+            <a:off x="6523695" y="2655783"/>
+            <a:ext cx="266273" cy="266273"/>
           </a:xfrm>
           <a:prstGeom prst="rect">
             <a:avLst/>
@@ -10040,14 +12427,14 @@
       </p:pic>
       <p:sp>
         <p:nvSpPr>
-          <p:cNvPr id="11" name="TextBox 10"/>
+          <p:cNvPr id="13" name="TextBox 12"/>
           <p:cNvSpPr txBox="1"/>
           <p:nvPr/>
         </p:nvSpPr>
         <p:spPr>
           <a:xfrm>
-            <a:off x="1353312" y="2999232"/>
-            <a:ext cx="5029200" cy="530352"/>
+            <a:off x="7040880" y="2395728"/>
+            <a:ext cx="4206240" cy="786384"/>
           </a:xfrm>
           <a:prstGeom prst="rect">
             <a:avLst/>
@@ -10072,7 +12459,7 @@
               </a:spcAft>
             </a:pPr>
             <a:r>
-              <a:rPr sz="1200" b="0">
+              <a:rPr sz="1150" b="0">
                 <a:solidFill>
                   <a:srgbClr val="1A1A1A"/>
                 </a:solidFill>
@@ -10085,18 +12472,18 @@
       </p:sp>
       <p:sp>
         <p:nvSpPr>
-          <p:cNvPr id="12" name="Rounded Rectangle 11"/>
+          <p:cNvPr id="14" name="Rounded Rectangle 13"/>
           <p:cNvSpPr/>
           <p:nvPr/>
         </p:nvSpPr>
         <p:spPr>
           <a:xfrm>
-            <a:off x="841248" y="3602736"/>
-            <a:ext cx="5715000" cy="530352"/>
+            <a:off x="841248" y="3328416"/>
+            <a:ext cx="5138928" cy="786384"/>
           </a:xfrm>
           <a:prstGeom prst="roundRect">
             <a:avLst>
-              <a:gd name="adj" fmla="val 6000"/>
+              <a:gd name="adj" fmla="val 7000"/>
             </a:avLst>
           </a:prstGeom>
           <a:solidFill>
@@ -10131,9 +12518,55 @@
           </a:p>
         </p:txBody>
       </p:sp>
+      <p:sp>
+        <p:nvSpPr>
+          <p:cNvPr id="15" name="Rounded Rectangle 14"/>
+          <p:cNvSpPr/>
+          <p:nvPr/>
+        </p:nvSpPr>
+        <p:spPr>
+          <a:xfrm>
+            <a:off x="987552" y="3465576"/>
+            <a:ext cx="512064" cy="512064"/>
+          </a:xfrm>
+          <a:prstGeom prst="roundRect">
+            <a:avLst>
+              <a:gd name="adj" fmla="val 26000"/>
+            </a:avLst>
+          </a:prstGeom>
+          <a:solidFill>
+            <a:srgbClr val="EE0000"/>
+          </a:solidFill>
+          <a:ln>
+            <a:noFill/>
+          </a:ln>
+          <a:effectLst/>
+        </p:spPr>
+        <p:style>
+          <a:lnRef idx="1">
+            <a:schemeClr val="accent1"/>
+          </a:lnRef>
+          <a:fillRef idx="3">
+            <a:schemeClr val="accent1"/>
+          </a:fillRef>
+          <a:effectRef idx="2">
+            <a:schemeClr val="accent1"/>
+          </a:effectRef>
+          <a:fontRef idx="minor">
+            <a:schemeClr val="lt1"/>
+          </a:fontRef>
+        </p:style>
+        <p:txBody>
+          <a:bodyPr rtlCol="0" anchor="ctr"/>
+          <a:lstStyle/>
+          <a:p>
+            <a:pPr algn="ctr"/>
+          </a:p>
+        </p:txBody>
+      </p:sp>
       <p:pic>
         <p:nvPicPr>
-          <p:cNvPr id="13" name="Picture 12" descr="check_steel.png"/>
+          <p:cNvPr id="16" name="Picture 15" descr="check_white.png"/>
           <p:cNvPicPr>
             <a:picLocks noChangeAspect="1"/>
           </p:cNvPicPr>
@@ -10147,8 +12580,8 @@
         </p:blipFill>
         <p:spPr>
           <a:xfrm>
-            <a:off x="987552" y="3749040"/>
-            <a:ext cx="237744" cy="237744"/>
+            <a:off x="1110447" y="3588471"/>
+            <a:ext cx="266273" cy="266273"/>
           </a:xfrm>
           <a:prstGeom prst="rect">
             <a:avLst/>
@@ -10157,14 +12590,14 @@
       </p:pic>
       <p:sp>
         <p:nvSpPr>
-          <p:cNvPr id="14" name="TextBox 13"/>
+          <p:cNvPr id="17" name="TextBox 16"/>
           <p:cNvSpPr txBox="1"/>
           <p:nvPr/>
         </p:nvSpPr>
         <p:spPr>
           <a:xfrm>
-            <a:off x="1353312" y="3602736"/>
-            <a:ext cx="5029200" cy="530352"/>
+            <a:off x="1627632" y="3328416"/>
+            <a:ext cx="4206240" cy="786384"/>
           </a:xfrm>
           <a:prstGeom prst="rect">
             <a:avLst/>
@@ -10189,7 +12622,7 @@
               </a:spcAft>
             </a:pPr>
             <a:r>
-              <a:rPr sz="1200" b="0">
+              <a:rPr sz="1150" b="0">
                 <a:solidFill>
                   <a:srgbClr val="1A1A1A"/>
                 </a:solidFill>
@@ -10202,18 +12635,18 @@
       </p:sp>
       <p:sp>
         <p:nvSpPr>
-          <p:cNvPr id="15" name="Rounded Rectangle 14"/>
+          <p:cNvPr id="18" name="Rounded Rectangle 17"/>
           <p:cNvSpPr/>
           <p:nvPr/>
         </p:nvSpPr>
         <p:spPr>
           <a:xfrm>
-            <a:off x="841248" y="4206240"/>
-            <a:ext cx="5715000" cy="530352"/>
+            <a:off x="6254496" y="3328416"/>
+            <a:ext cx="5138928" cy="786384"/>
           </a:xfrm>
           <a:prstGeom prst="roundRect">
             <a:avLst>
-              <a:gd name="adj" fmla="val 6000"/>
+              <a:gd name="adj" fmla="val 7000"/>
             </a:avLst>
           </a:prstGeom>
           <a:solidFill>
@@ -10248,9 +12681,55 @@
           </a:p>
         </p:txBody>
       </p:sp>
+      <p:sp>
+        <p:nvSpPr>
+          <p:cNvPr id="19" name="Rounded Rectangle 18"/>
+          <p:cNvSpPr/>
+          <p:nvPr/>
+        </p:nvSpPr>
+        <p:spPr>
+          <a:xfrm>
+            <a:off x="6400800" y="3465576"/>
+            <a:ext cx="512064" cy="512064"/>
+          </a:xfrm>
+          <a:prstGeom prst="roundRect">
+            <a:avLst>
+              <a:gd name="adj" fmla="val 26000"/>
+            </a:avLst>
+          </a:prstGeom>
+          <a:solidFill>
+            <a:srgbClr val="EE0000"/>
+          </a:solidFill>
+          <a:ln>
+            <a:noFill/>
+          </a:ln>
+          <a:effectLst/>
+        </p:spPr>
+        <p:style>
+          <a:lnRef idx="1">
+            <a:schemeClr val="accent1"/>
+          </a:lnRef>
+          <a:fillRef idx="3">
+            <a:schemeClr val="accent1"/>
+          </a:fillRef>
+          <a:effectRef idx="2">
+            <a:schemeClr val="accent1"/>
+          </a:effectRef>
+          <a:fontRef idx="minor">
+            <a:schemeClr val="lt1"/>
+          </a:fontRef>
+        </p:style>
+        <p:txBody>
+          <a:bodyPr rtlCol="0" anchor="ctr"/>
+          <a:lstStyle/>
+          <a:p>
+            <a:pPr algn="ctr"/>
+          </a:p>
+        </p:txBody>
+      </p:sp>
       <p:pic>
         <p:nvPicPr>
-          <p:cNvPr id="16" name="Picture 15" descr="check_steel.png"/>
+          <p:cNvPr id="20" name="Picture 19" descr="check_white.png"/>
           <p:cNvPicPr>
             <a:picLocks noChangeAspect="1"/>
           </p:cNvPicPr>
@@ -10264,8 +12743,8 @@
         </p:blipFill>
         <p:spPr>
           <a:xfrm>
-            <a:off x="987552" y="4352544"/>
-            <a:ext cx="237744" cy="237744"/>
+            <a:off x="6523695" y="3588471"/>
+            <a:ext cx="266273" cy="266273"/>
           </a:xfrm>
           <a:prstGeom prst="rect">
             <a:avLst/>
@@ -10274,14 +12753,14 @@
       </p:pic>
       <p:sp>
         <p:nvSpPr>
-          <p:cNvPr id="17" name="TextBox 16"/>
+          <p:cNvPr id="21" name="TextBox 20"/>
           <p:cNvSpPr txBox="1"/>
           <p:nvPr/>
         </p:nvSpPr>
         <p:spPr>
           <a:xfrm>
-            <a:off x="1353312" y="4206240"/>
-            <a:ext cx="5029200" cy="530352"/>
+            <a:off x="7040880" y="3328416"/>
+            <a:ext cx="4206240" cy="786384"/>
           </a:xfrm>
           <a:prstGeom prst="rect">
             <a:avLst/>
@@ -10306,7 +12785,7 @@
               </a:spcAft>
             </a:pPr>
             <a:r>
-              <a:rPr sz="1200" b="0">
+              <a:rPr sz="1150" b="0">
                 <a:solidFill>
                   <a:srgbClr val="1A1A1A"/>
                 </a:solidFill>
@@ -10319,18 +12798,18 @@
       </p:sp>
       <p:sp>
         <p:nvSpPr>
-          <p:cNvPr id="18" name="Rounded Rectangle 17"/>
+          <p:cNvPr id="22" name="Rounded Rectangle 21"/>
           <p:cNvSpPr/>
           <p:nvPr/>
         </p:nvSpPr>
         <p:spPr>
           <a:xfrm>
-            <a:off x="841248" y="4809744"/>
-            <a:ext cx="5715000" cy="530352"/>
+            <a:off x="841248" y="4261104"/>
+            <a:ext cx="5138928" cy="786384"/>
           </a:xfrm>
           <a:prstGeom prst="roundRect">
             <a:avLst>
-              <a:gd name="adj" fmla="val 6000"/>
+              <a:gd name="adj" fmla="val 7000"/>
             </a:avLst>
           </a:prstGeom>
           <a:solidFill>
@@ -10365,9 +12844,55 @@
           </a:p>
         </p:txBody>
       </p:sp>
+      <p:sp>
+        <p:nvSpPr>
+          <p:cNvPr id="23" name="Rounded Rectangle 22"/>
+          <p:cNvSpPr/>
+          <p:nvPr/>
+        </p:nvSpPr>
+        <p:spPr>
+          <a:xfrm>
+            <a:off x="987552" y="4398264"/>
+            <a:ext cx="512064" cy="512064"/>
+          </a:xfrm>
+          <a:prstGeom prst="roundRect">
+            <a:avLst>
+              <a:gd name="adj" fmla="val 26000"/>
+            </a:avLst>
+          </a:prstGeom>
+          <a:solidFill>
+            <a:srgbClr val="EE0000"/>
+          </a:solidFill>
+          <a:ln>
+            <a:noFill/>
+          </a:ln>
+          <a:effectLst/>
+        </p:spPr>
+        <p:style>
+          <a:lnRef idx="1">
+            <a:schemeClr val="accent1"/>
+          </a:lnRef>
+          <a:fillRef idx="3">
+            <a:schemeClr val="accent1"/>
+          </a:fillRef>
+          <a:effectRef idx="2">
+            <a:schemeClr val="accent1"/>
+          </a:effectRef>
+          <a:fontRef idx="minor">
+            <a:schemeClr val="lt1"/>
+          </a:fontRef>
+        </p:style>
+        <p:txBody>
+          <a:bodyPr rtlCol="0" anchor="ctr"/>
+          <a:lstStyle/>
+          <a:p>
+            <a:pPr algn="ctr"/>
+          </a:p>
+        </p:txBody>
+      </p:sp>
       <p:pic>
         <p:nvPicPr>
-          <p:cNvPr id="19" name="Picture 18" descr="check_steel.png"/>
+          <p:cNvPr id="24" name="Picture 23" descr="check_white.png"/>
           <p:cNvPicPr>
             <a:picLocks noChangeAspect="1"/>
           </p:cNvPicPr>
@@ -10381,8 +12906,8 @@
         </p:blipFill>
         <p:spPr>
           <a:xfrm>
-            <a:off x="987552" y="4956048"/>
-            <a:ext cx="237744" cy="237744"/>
+            <a:off x="1110447" y="4521159"/>
+            <a:ext cx="266273" cy="266273"/>
           </a:xfrm>
           <a:prstGeom prst="rect">
             <a:avLst/>
@@ -10391,14 +12916,14 @@
       </p:pic>
       <p:sp>
         <p:nvSpPr>
-          <p:cNvPr id="20" name="TextBox 19"/>
+          <p:cNvPr id="25" name="TextBox 24"/>
           <p:cNvSpPr txBox="1"/>
           <p:nvPr/>
         </p:nvSpPr>
         <p:spPr>
           <a:xfrm>
-            <a:off x="1353312" y="4809744"/>
-            <a:ext cx="5029200" cy="530352"/>
+            <a:off x="1627632" y="4261104"/>
+            <a:ext cx="4206240" cy="786384"/>
           </a:xfrm>
           <a:prstGeom prst="rect">
             <a:avLst/>
@@ -10423,221 +12948,13 @@
               </a:spcAft>
             </a:pPr>
             <a:r>
-              <a:rPr sz="1200" b="0">
+              <a:rPr sz="1150" b="0">
                 <a:solidFill>
                   <a:srgbClr val="1A1A1A"/>
                 </a:solidFill>
                 <a:latin typeface="Red Hat Text"/>
               </a:rPr>
               <a:t>Authentication *and* authorization, on screen, in four minutes</a:t>
-            </a:r>
-          </a:p>
-        </p:txBody>
-      </p:sp>
-      <p:sp>
-        <p:nvSpPr>
-          <p:cNvPr id="21" name="Rounded Rectangle 20"/>
-          <p:cNvSpPr/>
-          <p:nvPr/>
-        </p:nvSpPr>
-        <p:spPr>
-          <a:xfrm>
-            <a:off x="6812280" y="2395728"/>
-            <a:ext cx="4538167" cy="2944368"/>
-          </a:xfrm>
-          <a:prstGeom prst="roundRect">
-            <a:avLst>
-              <a:gd name="adj" fmla="val 4000"/>
-            </a:avLst>
-          </a:prstGeom>
-          <a:solidFill>
-            <a:srgbClr val="FFFFFF"/>
-          </a:solidFill>
-          <a:ln w="15240">
-            <a:solidFill>
-              <a:srgbClr val="DDE1E6"/>
-            </a:solidFill>
-          </a:ln>
-          <a:effectLst/>
-        </p:spPr>
-        <p:style>
-          <a:lnRef idx="1">
-            <a:schemeClr val="accent1"/>
-          </a:lnRef>
-          <a:fillRef idx="3">
-            <a:schemeClr val="accent1"/>
-          </a:fillRef>
-          <a:effectRef idx="2">
-            <a:schemeClr val="accent1"/>
-          </a:effectRef>
-          <a:fontRef idx="minor">
-            <a:schemeClr val="lt1"/>
-          </a:fontRef>
-        </p:style>
-        <p:txBody>
-          <a:bodyPr rtlCol="0" anchor="ctr"/>
-          <a:lstStyle/>
-          <a:p>
-            <a:pPr algn="ctr"/>
-          </a:p>
-        </p:txBody>
-      </p:sp>
-      <p:sp>
-        <p:nvSpPr>
-          <p:cNvPr id="22" name="Rounded Rectangle 21"/>
-          <p:cNvSpPr/>
-          <p:nvPr/>
-        </p:nvSpPr>
-        <p:spPr>
-          <a:xfrm>
-            <a:off x="7013448" y="2596896"/>
-            <a:ext cx="1298448" cy="310896"/>
-          </a:xfrm>
-          <a:prstGeom prst="roundRect">
-            <a:avLst>
-              <a:gd name="adj" fmla="val 50000"/>
-            </a:avLst>
-          </a:prstGeom>
-          <a:solidFill>
-            <a:srgbClr val="FCECEC"/>
-          </a:solidFill>
-          <a:ln>
-            <a:noFill/>
-          </a:ln>
-          <a:effectLst/>
-        </p:spPr>
-        <p:style>
-          <a:lnRef idx="1">
-            <a:schemeClr val="accent1"/>
-          </a:lnRef>
-          <a:fillRef idx="3">
-            <a:schemeClr val="accent1"/>
-          </a:fillRef>
-          <a:effectRef idx="2">
-            <a:schemeClr val="accent1"/>
-          </a:effectRef>
-          <a:fontRef idx="minor">
-            <a:schemeClr val="lt1"/>
-          </a:fontRef>
-        </p:style>
-        <p:txBody>
-          <a:bodyPr rtlCol="0" anchor="ctr"/>
-          <a:lstStyle/>
-          <a:p>
-            <a:pPr algn="ctr"/>
-          </a:p>
-        </p:txBody>
-      </p:sp>
-      <p:sp>
-        <p:nvSpPr>
-          <p:cNvPr id="23" name="TextBox 22"/>
-          <p:cNvSpPr txBox="1"/>
-          <p:nvPr/>
-        </p:nvSpPr>
-        <p:spPr>
-          <a:xfrm>
-            <a:off x="7013448" y="2596896"/>
-            <a:ext cx="1298448" cy="310896"/>
-          </a:xfrm>
-          <a:prstGeom prst="rect">
-            <a:avLst/>
-          </a:prstGeom>
-          <a:noFill/>
-        </p:spPr>
-        <p:txBody>
-          <a:bodyPr wrap="none" anchor="ctr" lIns="0" rIns="0" tIns="0" bIns="0">
-            <a:spAutoFit/>
-          </a:bodyPr>
-          <a:lstStyle/>
-          <a:p>
-            <a:pPr algn="ctr">
-              <a:lnSpc>
-                <a:spcPct val="106000"/>
-              </a:lnSpc>
-              <a:spcBef>
-                <a:spcPts val="0"/>
-              </a:spcBef>
-              <a:spcAft>
-                <a:spcPts val="0"/>
-              </a:spcAft>
-            </a:pPr>
-            <a:r>
-              <a:rPr sz="850" b="1">
-                <a:solidFill>
-                  <a:srgbClr val="B80000"/>
-                </a:solidFill>
-                <a:latin typeface="Red Hat Display"/>
-              </a:rPr>
-              <a:t>MEDIA PASS</a:t>
-            </a:r>
-          </a:p>
-        </p:txBody>
-      </p:sp>
-      <p:pic>
-        <p:nvPicPr>
-          <p:cNvPr id="24" name="Picture 23" descr="eye_slate.png"/>
-          <p:cNvPicPr>
-            <a:picLocks noChangeAspect="1"/>
-          </p:cNvPicPr>
-          <p:nvPr/>
-        </p:nvPicPr>
-        <p:blipFill>
-          <a:blip r:embed="rId4"/>
-          <a:stretch>
-            <a:fillRect/>
-          </a:stretch>
-        </p:blipFill>
-        <p:spPr>
-          <a:xfrm>
-            <a:off x="8843619" y="3108960"/>
-            <a:ext cx="475488" cy="475488"/>
-          </a:xfrm>
-          <a:prstGeom prst="rect">
-            <a:avLst/>
-          </a:prstGeom>
-        </p:spPr>
-      </p:pic>
-      <p:sp>
-        <p:nvSpPr>
-          <p:cNvPr id="25" name="TextBox 24"/>
-          <p:cNvSpPr txBox="1"/>
-          <p:nvPr/>
-        </p:nvSpPr>
-        <p:spPr>
-          <a:xfrm>
-            <a:off x="7050024" y="3721608"/>
-            <a:ext cx="4062679" cy="1481328"/>
-          </a:xfrm>
-          <a:prstGeom prst="rect">
-            <a:avLst/>
-          </a:prstGeom>
-          <a:noFill/>
-        </p:spPr>
-        <p:txBody>
-          <a:bodyPr wrap="square" anchor="t" lIns="0" rIns="0" tIns="0" bIns="0">
-            <a:spAutoFit/>
-          </a:bodyPr>
-          <a:lstStyle/>
-          <a:p>
-            <a:pPr algn="l">
-              <a:lnSpc>
-                <a:spcPct val="120000"/>
-              </a:lnSpc>
-              <a:spcBef>
-                <a:spcPts val="0"/>
-              </a:spcBef>
-              <a:spcAft>
-                <a:spcPts val="0"/>
-              </a:spcAft>
-            </a:pPr>
-            <a:r>
-              <a:rPr sz="950" b="0">
-                <a:solidFill>
-                  <a:srgbClr val="8A9099"/>
-                </a:solidFill>
-                <a:latin typeface="Red Hat Text"/>
-              </a:rPr>
-              <a:t>A terminal-style panel with three lines lighting up: `no token → 401` (red), `adjuster → 200` (green), `viewer → 403` (amber).</a:t>
             </a:r>
           </a:p>
         </p:txBody>
@@ -10945,11 +13262,11 @@
         <p:spPr>
           <a:xfrm>
             <a:off x="841248" y="2395728"/>
-            <a:ext cx="5715000" cy="530352"/>
+            <a:ext cx="5138928" cy="786384"/>
           </a:xfrm>
           <a:prstGeom prst="roundRect">
             <a:avLst>
-              <a:gd name="adj" fmla="val 6000"/>
+              <a:gd name="adj" fmla="val 7000"/>
             </a:avLst>
           </a:prstGeom>
           <a:solidFill>
@@ -10984,9 +13301,55 @@
           </a:p>
         </p:txBody>
       </p:sp>
+      <p:sp>
+        <p:nvSpPr>
+          <p:cNvPr id="7" name="Rounded Rectangle 6"/>
+          <p:cNvSpPr/>
+          <p:nvPr/>
+        </p:nvSpPr>
+        <p:spPr>
+          <a:xfrm>
+            <a:off x="987552" y="2532888"/>
+            <a:ext cx="512064" cy="512064"/>
+          </a:xfrm>
+          <a:prstGeom prst="roundRect">
+            <a:avLst>
+              <a:gd name="adj" fmla="val 26000"/>
+            </a:avLst>
+          </a:prstGeom>
+          <a:solidFill>
+            <a:srgbClr val="EE0000"/>
+          </a:solidFill>
+          <a:ln>
+            <a:noFill/>
+          </a:ln>
+          <a:effectLst/>
+        </p:spPr>
+        <p:style>
+          <a:lnRef idx="1">
+            <a:schemeClr val="accent1"/>
+          </a:lnRef>
+          <a:fillRef idx="3">
+            <a:schemeClr val="accent1"/>
+          </a:fillRef>
+          <a:effectRef idx="2">
+            <a:schemeClr val="accent1"/>
+          </a:effectRef>
+          <a:fontRef idx="minor">
+            <a:schemeClr val="lt1"/>
+          </a:fontRef>
+        </p:style>
+        <p:txBody>
+          <a:bodyPr rtlCol="0" anchor="ctr"/>
+          <a:lstStyle/>
+          <a:p>
+            <a:pPr algn="ctr"/>
+          </a:p>
+        </p:txBody>
+      </p:sp>
       <p:pic>
         <p:nvPicPr>
-          <p:cNvPr id="7" name="Picture 6" descr="check_steel.png"/>
+          <p:cNvPr id="8" name="Picture 7" descr="check_white.png"/>
           <p:cNvPicPr>
             <a:picLocks noChangeAspect="1"/>
           </p:cNvPicPr>
@@ -11000,8 +13363,8 @@
         </p:blipFill>
         <p:spPr>
           <a:xfrm>
-            <a:off x="987552" y="2542032"/>
-            <a:ext cx="237744" cy="237744"/>
+            <a:off x="1110447" y="2655783"/>
+            <a:ext cx="266273" cy="266273"/>
           </a:xfrm>
           <a:prstGeom prst="rect">
             <a:avLst/>
@@ -11010,14 +13373,14 @@
       </p:pic>
       <p:sp>
         <p:nvSpPr>
-          <p:cNvPr id="8" name="TextBox 7"/>
+          <p:cNvPr id="9" name="TextBox 8"/>
           <p:cNvSpPr txBox="1"/>
           <p:nvPr/>
         </p:nvSpPr>
         <p:spPr>
           <a:xfrm>
-            <a:off x="1353312" y="2395728"/>
-            <a:ext cx="5029200" cy="530352"/>
+            <a:off x="1627632" y="2395728"/>
+            <a:ext cx="4206240" cy="786384"/>
           </a:xfrm>
           <a:prstGeom prst="rect">
             <a:avLst/>
@@ -11042,7 +13405,7 @@
               </a:spcAft>
             </a:pPr>
             <a:r>
-              <a:rPr sz="1200" b="0">
+              <a:rPr sz="1150" b="0">
                 <a:solidFill>
                   <a:srgbClr val="1A1A1A"/>
                 </a:solidFill>
@@ -11055,18 +13418,18 @@
       </p:sp>
       <p:sp>
         <p:nvSpPr>
-          <p:cNvPr id="9" name="Rounded Rectangle 8"/>
+          <p:cNvPr id="10" name="Rounded Rectangle 9"/>
           <p:cNvSpPr/>
           <p:nvPr/>
         </p:nvSpPr>
         <p:spPr>
           <a:xfrm>
-            <a:off x="841248" y="2999232"/>
-            <a:ext cx="5715000" cy="530352"/>
+            <a:off x="6254496" y="2395728"/>
+            <a:ext cx="5138928" cy="786384"/>
           </a:xfrm>
           <a:prstGeom prst="roundRect">
             <a:avLst>
-              <a:gd name="adj" fmla="val 6000"/>
+              <a:gd name="adj" fmla="val 7000"/>
             </a:avLst>
           </a:prstGeom>
           <a:solidFill>
@@ -11101,9 +13464,55 @@
           </a:p>
         </p:txBody>
       </p:sp>
+      <p:sp>
+        <p:nvSpPr>
+          <p:cNvPr id="11" name="Rounded Rectangle 10"/>
+          <p:cNvSpPr/>
+          <p:nvPr/>
+        </p:nvSpPr>
+        <p:spPr>
+          <a:xfrm>
+            <a:off x="6400800" y="2532888"/>
+            <a:ext cx="512064" cy="512064"/>
+          </a:xfrm>
+          <a:prstGeom prst="roundRect">
+            <a:avLst>
+              <a:gd name="adj" fmla="val 26000"/>
+            </a:avLst>
+          </a:prstGeom>
+          <a:solidFill>
+            <a:srgbClr val="EE0000"/>
+          </a:solidFill>
+          <a:ln>
+            <a:noFill/>
+          </a:ln>
+          <a:effectLst/>
+        </p:spPr>
+        <p:style>
+          <a:lnRef idx="1">
+            <a:schemeClr val="accent1"/>
+          </a:lnRef>
+          <a:fillRef idx="3">
+            <a:schemeClr val="accent1"/>
+          </a:fillRef>
+          <a:effectRef idx="2">
+            <a:schemeClr val="accent1"/>
+          </a:effectRef>
+          <a:fontRef idx="minor">
+            <a:schemeClr val="lt1"/>
+          </a:fontRef>
+        </p:style>
+        <p:txBody>
+          <a:bodyPr rtlCol="0" anchor="ctr"/>
+          <a:lstStyle/>
+          <a:p>
+            <a:pPr algn="ctr"/>
+          </a:p>
+        </p:txBody>
+      </p:sp>
       <p:pic>
         <p:nvPicPr>
-          <p:cNvPr id="10" name="Picture 9" descr="check_steel.png"/>
+          <p:cNvPr id="12" name="Picture 11" descr="check_white.png"/>
           <p:cNvPicPr>
             <a:picLocks noChangeAspect="1"/>
           </p:cNvPicPr>
@@ -11117,8 +13526,8 @@
         </p:blipFill>
         <p:spPr>
           <a:xfrm>
-            <a:off x="987552" y="3145536"/>
-            <a:ext cx="237744" cy="237744"/>
+            <a:off x="6523695" y="2655783"/>
+            <a:ext cx="266273" cy="266273"/>
           </a:xfrm>
           <a:prstGeom prst="rect">
             <a:avLst/>
@@ -11127,14 +13536,14 @@
       </p:pic>
       <p:sp>
         <p:nvSpPr>
-          <p:cNvPr id="11" name="TextBox 10"/>
+          <p:cNvPr id="13" name="TextBox 12"/>
           <p:cNvSpPr txBox="1"/>
           <p:nvPr/>
         </p:nvSpPr>
         <p:spPr>
           <a:xfrm>
-            <a:off x="1353312" y="2999232"/>
-            <a:ext cx="5029200" cy="530352"/>
+            <a:off x="7040880" y="2395728"/>
+            <a:ext cx="4206240" cy="786384"/>
           </a:xfrm>
           <a:prstGeom prst="rect">
             <a:avLst/>
@@ -11159,7 +13568,7 @@
               </a:spcAft>
             </a:pPr>
             <a:r>
-              <a:rPr sz="1200" b="0">
+              <a:rPr sz="1150" b="0">
                 <a:solidFill>
                   <a:srgbClr val="1A1A1A"/>
                 </a:solidFill>
@@ -11172,18 +13581,18 @@
       </p:sp>
       <p:sp>
         <p:nvSpPr>
-          <p:cNvPr id="12" name="Rounded Rectangle 11"/>
+          <p:cNvPr id="14" name="Rounded Rectangle 13"/>
           <p:cNvSpPr/>
           <p:nvPr/>
         </p:nvSpPr>
         <p:spPr>
           <a:xfrm>
-            <a:off x="841248" y="3602736"/>
-            <a:ext cx="5715000" cy="530352"/>
+            <a:off x="841248" y="3328416"/>
+            <a:ext cx="5138928" cy="786384"/>
           </a:xfrm>
           <a:prstGeom prst="roundRect">
             <a:avLst>
-              <a:gd name="adj" fmla="val 6000"/>
+              <a:gd name="adj" fmla="val 7000"/>
             </a:avLst>
           </a:prstGeom>
           <a:solidFill>
@@ -11218,9 +13627,55 @@
           </a:p>
         </p:txBody>
       </p:sp>
+      <p:sp>
+        <p:nvSpPr>
+          <p:cNvPr id="15" name="Rounded Rectangle 14"/>
+          <p:cNvSpPr/>
+          <p:nvPr/>
+        </p:nvSpPr>
+        <p:spPr>
+          <a:xfrm>
+            <a:off x="987552" y="3465576"/>
+            <a:ext cx="512064" cy="512064"/>
+          </a:xfrm>
+          <a:prstGeom prst="roundRect">
+            <a:avLst>
+              <a:gd name="adj" fmla="val 26000"/>
+            </a:avLst>
+          </a:prstGeom>
+          <a:solidFill>
+            <a:srgbClr val="EE0000"/>
+          </a:solidFill>
+          <a:ln>
+            <a:noFill/>
+          </a:ln>
+          <a:effectLst/>
+        </p:spPr>
+        <p:style>
+          <a:lnRef idx="1">
+            <a:schemeClr val="accent1"/>
+          </a:lnRef>
+          <a:fillRef idx="3">
+            <a:schemeClr val="accent1"/>
+          </a:fillRef>
+          <a:effectRef idx="2">
+            <a:schemeClr val="accent1"/>
+          </a:effectRef>
+          <a:fontRef idx="minor">
+            <a:schemeClr val="lt1"/>
+          </a:fontRef>
+        </p:style>
+        <p:txBody>
+          <a:bodyPr rtlCol="0" anchor="ctr"/>
+          <a:lstStyle/>
+          <a:p>
+            <a:pPr algn="ctr"/>
+          </a:p>
+        </p:txBody>
+      </p:sp>
       <p:pic>
         <p:nvPicPr>
-          <p:cNvPr id="13" name="Picture 12" descr="check_steel.png"/>
+          <p:cNvPr id="16" name="Picture 15" descr="check_white.png"/>
           <p:cNvPicPr>
             <a:picLocks noChangeAspect="1"/>
           </p:cNvPicPr>
@@ -11234,8 +13689,8 @@
         </p:blipFill>
         <p:spPr>
           <a:xfrm>
-            <a:off x="987552" y="3749040"/>
-            <a:ext cx="237744" cy="237744"/>
+            <a:off x="1110447" y="3588471"/>
+            <a:ext cx="266273" cy="266273"/>
           </a:xfrm>
           <a:prstGeom prst="rect">
             <a:avLst/>
@@ -11244,14 +13699,14 @@
       </p:pic>
       <p:sp>
         <p:nvSpPr>
-          <p:cNvPr id="14" name="TextBox 13"/>
+          <p:cNvPr id="17" name="TextBox 16"/>
           <p:cNvSpPr txBox="1"/>
           <p:nvPr/>
         </p:nvSpPr>
         <p:spPr>
           <a:xfrm>
-            <a:off x="1353312" y="3602736"/>
-            <a:ext cx="5029200" cy="530352"/>
+            <a:off x="1627632" y="3328416"/>
+            <a:ext cx="4206240" cy="786384"/>
           </a:xfrm>
           <a:prstGeom prst="rect">
             <a:avLst/>
@@ -11276,7 +13731,7 @@
               </a:spcAft>
             </a:pPr>
             <a:r>
-              <a:rPr sz="1200" b="0">
+              <a:rPr sz="1150" b="0">
                 <a:solidFill>
                   <a:srgbClr val="1A1A1A"/>
                 </a:solidFill>
@@ -11289,18 +13744,18 @@
       </p:sp>
       <p:sp>
         <p:nvSpPr>
-          <p:cNvPr id="15" name="Rounded Rectangle 14"/>
+          <p:cNvPr id="18" name="Rounded Rectangle 17"/>
           <p:cNvSpPr/>
           <p:nvPr/>
         </p:nvSpPr>
         <p:spPr>
           <a:xfrm>
-            <a:off x="841248" y="4206240"/>
-            <a:ext cx="5715000" cy="530352"/>
+            <a:off x="6254496" y="3328416"/>
+            <a:ext cx="5138928" cy="786384"/>
           </a:xfrm>
           <a:prstGeom prst="roundRect">
             <a:avLst>
-              <a:gd name="adj" fmla="val 6000"/>
+              <a:gd name="adj" fmla="val 7000"/>
             </a:avLst>
           </a:prstGeom>
           <a:solidFill>
@@ -11335,9 +13790,55 @@
           </a:p>
         </p:txBody>
       </p:sp>
+      <p:sp>
+        <p:nvSpPr>
+          <p:cNvPr id="19" name="Rounded Rectangle 18"/>
+          <p:cNvSpPr/>
+          <p:nvPr/>
+        </p:nvSpPr>
+        <p:spPr>
+          <a:xfrm>
+            <a:off x="6400800" y="3465576"/>
+            <a:ext cx="512064" cy="512064"/>
+          </a:xfrm>
+          <a:prstGeom prst="roundRect">
+            <a:avLst>
+              <a:gd name="adj" fmla="val 26000"/>
+            </a:avLst>
+          </a:prstGeom>
+          <a:solidFill>
+            <a:srgbClr val="EE0000"/>
+          </a:solidFill>
+          <a:ln>
+            <a:noFill/>
+          </a:ln>
+          <a:effectLst/>
+        </p:spPr>
+        <p:style>
+          <a:lnRef idx="1">
+            <a:schemeClr val="accent1"/>
+          </a:lnRef>
+          <a:fillRef idx="3">
+            <a:schemeClr val="accent1"/>
+          </a:fillRef>
+          <a:effectRef idx="2">
+            <a:schemeClr val="accent1"/>
+          </a:effectRef>
+          <a:fontRef idx="minor">
+            <a:schemeClr val="lt1"/>
+          </a:fontRef>
+        </p:style>
+        <p:txBody>
+          <a:bodyPr rtlCol="0" anchor="ctr"/>
+          <a:lstStyle/>
+          <a:p>
+            <a:pPr algn="ctr"/>
+          </a:p>
+        </p:txBody>
+      </p:sp>
       <p:pic>
         <p:nvPicPr>
-          <p:cNvPr id="16" name="Picture 15" descr="check_steel.png"/>
+          <p:cNvPr id="20" name="Picture 19" descr="check_white.png"/>
           <p:cNvPicPr>
             <a:picLocks noChangeAspect="1"/>
           </p:cNvPicPr>
@@ -11351,8 +13852,8 @@
         </p:blipFill>
         <p:spPr>
           <a:xfrm>
-            <a:off x="987552" y="4352544"/>
-            <a:ext cx="237744" cy="237744"/>
+            <a:off x="6523695" y="3588471"/>
+            <a:ext cx="266273" cy="266273"/>
           </a:xfrm>
           <a:prstGeom prst="rect">
             <a:avLst/>
@@ -11361,14 +13862,14 @@
       </p:pic>
       <p:sp>
         <p:nvSpPr>
-          <p:cNvPr id="17" name="TextBox 16"/>
+          <p:cNvPr id="21" name="TextBox 20"/>
           <p:cNvSpPr txBox="1"/>
           <p:nvPr/>
         </p:nvSpPr>
         <p:spPr>
           <a:xfrm>
-            <a:off x="1353312" y="4206240"/>
-            <a:ext cx="5029200" cy="530352"/>
+            <a:off x="7040880" y="3328416"/>
+            <a:ext cx="4206240" cy="786384"/>
           </a:xfrm>
           <a:prstGeom prst="rect">
             <a:avLst/>
@@ -11393,7 +13894,7 @@
               </a:spcAft>
             </a:pPr>
             <a:r>
-              <a:rPr sz="1200" b="0">
+              <a:rPr sz="1150" b="0">
                 <a:solidFill>
                   <a:srgbClr val="1A1A1A"/>
                 </a:solidFill>
@@ -11406,18 +13907,18 @@
       </p:sp>
       <p:sp>
         <p:nvSpPr>
-          <p:cNvPr id="18" name="Rounded Rectangle 17"/>
+          <p:cNvPr id="22" name="Rounded Rectangle 21"/>
           <p:cNvSpPr/>
           <p:nvPr/>
         </p:nvSpPr>
         <p:spPr>
           <a:xfrm>
-            <a:off x="841248" y="4809744"/>
-            <a:ext cx="5715000" cy="530352"/>
+            <a:off x="841248" y="4261104"/>
+            <a:ext cx="5138928" cy="786384"/>
           </a:xfrm>
           <a:prstGeom prst="roundRect">
             <a:avLst>
-              <a:gd name="adj" fmla="val 6000"/>
+              <a:gd name="adj" fmla="val 7000"/>
             </a:avLst>
           </a:prstGeom>
           <a:solidFill>
@@ -11452,9 +13953,55 @@
           </a:p>
         </p:txBody>
       </p:sp>
+      <p:sp>
+        <p:nvSpPr>
+          <p:cNvPr id="23" name="Rounded Rectangle 22"/>
+          <p:cNvSpPr/>
+          <p:nvPr/>
+        </p:nvSpPr>
+        <p:spPr>
+          <a:xfrm>
+            <a:off x="987552" y="4398264"/>
+            <a:ext cx="512064" cy="512064"/>
+          </a:xfrm>
+          <a:prstGeom prst="roundRect">
+            <a:avLst>
+              <a:gd name="adj" fmla="val 26000"/>
+            </a:avLst>
+          </a:prstGeom>
+          <a:solidFill>
+            <a:srgbClr val="EE0000"/>
+          </a:solidFill>
+          <a:ln>
+            <a:noFill/>
+          </a:ln>
+          <a:effectLst/>
+        </p:spPr>
+        <p:style>
+          <a:lnRef idx="1">
+            <a:schemeClr val="accent1"/>
+          </a:lnRef>
+          <a:fillRef idx="3">
+            <a:schemeClr val="accent1"/>
+          </a:fillRef>
+          <a:effectRef idx="2">
+            <a:schemeClr val="accent1"/>
+          </a:effectRef>
+          <a:fontRef idx="minor">
+            <a:schemeClr val="lt1"/>
+          </a:fontRef>
+        </p:style>
+        <p:txBody>
+          <a:bodyPr rtlCol="0" anchor="ctr"/>
+          <a:lstStyle/>
+          <a:p>
+            <a:pPr algn="ctr"/>
+          </a:p>
+        </p:txBody>
+      </p:sp>
       <p:pic>
         <p:nvPicPr>
-          <p:cNvPr id="19" name="Picture 18" descr="check_steel.png"/>
+          <p:cNvPr id="24" name="Picture 23" descr="check_white.png"/>
           <p:cNvPicPr>
             <a:picLocks noChangeAspect="1"/>
           </p:cNvPicPr>
@@ -11468,8 +14015,8 @@
         </p:blipFill>
         <p:spPr>
           <a:xfrm>
-            <a:off x="987552" y="4956048"/>
-            <a:ext cx="237744" cy="237744"/>
+            <a:off x="1110447" y="4521159"/>
+            <a:ext cx="266273" cy="266273"/>
           </a:xfrm>
           <a:prstGeom prst="rect">
             <a:avLst/>
@@ -11478,14 +14025,14 @@
       </p:pic>
       <p:sp>
         <p:nvSpPr>
-          <p:cNvPr id="20" name="TextBox 19"/>
+          <p:cNvPr id="25" name="TextBox 24"/>
           <p:cNvSpPr txBox="1"/>
           <p:nvPr/>
         </p:nvSpPr>
         <p:spPr>
           <a:xfrm>
-            <a:off x="1353312" y="4809744"/>
-            <a:ext cx="5029200" cy="530352"/>
+            <a:off x="1627632" y="4261104"/>
+            <a:ext cx="4206240" cy="786384"/>
           </a:xfrm>
           <a:prstGeom prst="rect">
             <a:avLst/>
@@ -11510,221 +14057,13 @@
               </a:spcAft>
             </a:pPr>
             <a:r>
-              <a:rPr sz="1200" b="0">
+              <a:rPr sz="1150" b="0">
                 <a:solidFill>
                   <a:srgbClr val="1A1A1A"/>
                 </a:solidFill>
                 <a:latin typeface="Red Hat Text"/>
               </a:rPr>
               <a:t>The rule: re-audience and downscope, **never escalate**</a:t>
-            </a:r>
-          </a:p>
-        </p:txBody>
-      </p:sp>
-      <p:sp>
-        <p:nvSpPr>
-          <p:cNvPr id="21" name="Rounded Rectangle 20"/>
-          <p:cNvSpPr/>
-          <p:nvPr/>
-        </p:nvSpPr>
-        <p:spPr>
-          <a:xfrm>
-            <a:off x="6812280" y="2395728"/>
-            <a:ext cx="4538167" cy="2944368"/>
-          </a:xfrm>
-          <a:prstGeom prst="roundRect">
-            <a:avLst>
-              <a:gd name="adj" fmla="val 4000"/>
-            </a:avLst>
-          </a:prstGeom>
-          <a:solidFill>
-            <a:srgbClr val="FFFFFF"/>
-          </a:solidFill>
-          <a:ln w="15240">
-            <a:solidFill>
-              <a:srgbClr val="DDE1E6"/>
-            </a:solidFill>
-          </a:ln>
-          <a:effectLst/>
-        </p:spPr>
-        <p:style>
-          <a:lnRef idx="1">
-            <a:schemeClr val="accent1"/>
-          </a:lnRef>
-          <a:fillRef idx="3">
-            <a:schemeClr val="accent1"/>
-          </a:fillRef>
-          <a:effectRef idx="2">
-            <a:schemeClr val="accent1"/>
-          </a:effectRef>
-          <a:fontRef idx="minor">
-            <a:schemeClr val="lt1"/>
-          </a:fontRef>
-        </p:style>
-        <p:txBody>
-          <a:bodyPr rtlCol="0" anchor="ctr"/>
-          <a:lstStyle/>
-          <a:p>
-            <a:pPr algn="ctr"/>
-          </a:p>
-        </p:txBody>
-      </p:sp>
-      <p:sp>
-        <p:nvSpPr>
-          <p:cNvPr id="22" name="Rounded Rectangle 21"/>
-          <p:cNvSpPr/>
-          <p:nvPr/>
-        </p:nvSpPr>
-        <p:spPr>
-          <a:xfrm>
-            <a:off x="7013448" y="2596896"/>
-            <a:ext cx="1298448" cy="310896"/>
-          </a:xfrm>
-          <a:prstGeom prst="roundRect">
-            <a:avLst>
-              <a:gd name="adj" fmla="val 50000"/>
-            </a:avLst>
-          </a:prstGeom>
-          <a:solidFill>
-            <a:srgbClr val="FCECEC"/>
-          </a:solidFill>
-          <a:ln>
-            <a:noFill/>
-          </a:ln>
-          <a:effectLst/>
-        </p:spPr>
-        <p:style>
-          <a:lnRef idx="1">
-            <a:schemeClr val="accent1"/>
-          </a:lnRef>
-          <a:fillRef idx="3">
-            <a:schemeClr val="accent1"/>
-          </a:fillRef>
-          <a:effectRef idx="2">
-            <a:schemeClr val="accent1"/>
-          </a:effectRef>
-          <a:fontRef idx="minor">
-            <a:schemeClr val="lt1"/>
-          </a:fontRef>
-        </p:style>
-        <p:txBody>
-          <a:bodyPr rtlCol="0" anchor="ctr"/>
-          <a:lstStyle/>
-          <a:p>
-            <a:pPr algn="ctr"/>
-          </a:p>
-        </p:txBody>
-      </p:sp>
-      <p:sp>
-        <p:nvSpPr>
-          <p:cNvPr id="23" name="TextBox 22"/>
-          <p:cNvSpPr txBox="1"/>
-          <p:nvPr/>
-        </p:nvSpPr>
-        <p:spPr>
-          <a:xfrm>
-            <a:off x="7013448" y="2596896"/>
-            <a:ext cx="1298448" cy="310896"/>
-          </a:xfrm>
-          <a:prstGeom prst="rect">
-            <a:avLst/>
-          </a:prstGeom>
-          <a:noFill/>
-        </p:spPr>
-        <p:txBody>
-          <a:bodyPr wrap="none" anchor="ctr" lIns="0" rIns="0" tIns="0" bIns="0">
-            <a:spAutoFit/>
-          </a:bodyPr>
-          <a:lstStyle/>
-          <a:p>
-            <a:pPr algn="ctr">
-              <a:lnSpc>
-                <a:spcPct val="106000"/>
-              </a:lnSpc>
-              <a:spcBef>
-                <a:spcPts val="0"/>
-              </a:spcBef>
-              <a:spcAft>
-                <a:spcPts val="0"/>
-              </a:spcAft>
-            </a:pPr>
-            <a:r>
-              <a:rPr sz="850" b="1">
-                <a:solidFill>
-                  <a:srgbClr val="B80000"/>
-                </a:solidFill>
-                <a:latin typeface="Red Hat Display"/>
-              </a:rPr>
-              <a:t>MEDIA PASS</a:t>
-            </a:r>
-          </a:p>
-        </p:txBody>
-      </p:sp>
-      <p:pic>
-        <p:nvPicPr>
-          <p:cNvPr id="24" name="Picture 23" descr="eye_slate.png"/>
-          <p:cNvPicPr>
-            <a:picLocks noChangeAspect="1"/>
-          </p:cNvPicPr>
-          <p:nvPr/>
-        </p:nvPicPr>
-        <p:blipFill>
-          <a:blip r:embed="rId4"/>
-          <a:stretch>
-            <a:fillRect/>
-          </a:stretch>
-        </p:blipFill>
-        <p:spPr>
-          <a:xfrm>
-            <a:off x="8843619" y="3108960"/>
-            <a:ext cx="475488" cy="475488"/>
-          </a:xfrm>
-          <a:prstGeom prst="rect">
-            <a:avLst/>
-          </a:prstGeom>
-        </p:spPr>
-      </p:pic>
-      <p:sp>
-        <p:nvSpPr>
-          <p:cNvPr id="25" name="TextBox 24"/>
-          <p:cNvSpPr txBox="1"/>
-          <p:nvPr/>
-        </p:nvSpPr>
-        <p:spPr>
-          <a:xfrm>
-            <a:off x="7050024" y="3721608"/>
-            <a:ext cx="4062679" cy="1481328"/>
-          </a:xfrm>
-          <a:prstGeom prst="rect">
-            <a:avLst/>
-          </a:prstGeom>
-          <a:noFill/>
-        </p:spPr>
-        <p:txBody>
-          <a:bodyPr wrap="square" anchor="t" lIns="0" rIns="0" tIns="0" bIns="0">
-            <a:spAutoFit/>
-          </a:bodyPr>
-          <a:lstStyle/>
-          <a:p>
-            <a:pPr algn="l">
-              <a:lnSpc>
-                <a:spcPct val="120000"/>
-              </a:lnSpc>
-              <a:spcBef>
-                <a:spcPts val="0"/>
-              </a:spcBef>
-              <a:spcAft>
-                <a:spcPts val="0"/>
-              </a:spcAft>
-            </a:pPr>
-            <a:r>
-              <a:rPr sz="950" b="0">
-                <a:solidFill>
-                  <a:srgbClr val="8A9099"/>
-                </a:solidFill>
-                <a:latin typeface="Red Hat Text"/>
-              </a:rPr>
-              <a:t>user token (aud=claims) → [Keycloak exchange] → token (aud=fraud, still adjuster) → fraud 200; a second dashed arrow toward "batch" hitting a red REFUSED wall.</a:t>
             </a:r>
           </a:p>
         </p:txBody>
@@ -12032,11 +14371,11 @@
         <p:spPr>
           <a:xfrm>
             <a:off x="841248" y="2395728"/>
-            <a:ext cx="5715000" cy="530352"/>
+            <a:ext cx="5138928" cy="786384"/>
           </a:xfrm>
           <a:prstGeom prst="roundRect">
             <a:avLst>
-              <a:gd name="adj" fmla="val 6000"/>
+              <a:gd name="adj" fmla="val 7000"/>
             </a:avLst>
           </a:prstGeom>
           <a:solidFill>
@@ -12071,9 +14410,55 @@
           </a:p>
         </p:txBody>
       </p:sp>
+      <p:sp>
+        <p:nvSpPr>
+          <p:cNvPr id="7" name="Rounded Rectangle 6"/>
+          <p:cNvSpPr/>
+          <p:nvPr/>
+        </p:nvSpPr>
+        <p:spPr>
+          <a:xfrm>
+            <a:off x="987552" y="2532888"/>
+            <a:ext cx="512064" cy="512064"/>
+          </a:xfrm>
+          <a:prstGeom prst="roundRect">
+            <a:avLst>
+              <a:gd name="adj" fmla="val 26000"/>
+            </a:avLst>
+          </a:prstGeom>
+          <a:solidFill>
+            <a:srgbClr val="EE0000"/>
+          </a:solidFill>
+          <a:ln>
+            <a:noFill/>
+          </a:ln>
+          <a:effectLst/>
+        </p:spPr>
+        <p:style>
+          <a:lnRef idx="1">
+            <a:schemeClr val="accent1"/>
+          </a:lnRef>
+          <a:fillRef idx="3">
+            <a:schemeClr val="accent1"/>
+          </a:fillRef>
+          <a:effectRef idx="2">
+            <a:schemeClr val="accent1"/>
+          </a:effectRef>
+          <a:fontRef idx="minor">
+            <a:schemeClr val="lt1"/>
+          </a:fontRef>
+        </p:style>
+        <p:txBody>
+          <a:bodyPr rtlCol="0" anchor="ctr"/>
+          <a:lstStyle/>
+          <a:p>
+            <a:pPr algn="ctr"/>
+          </a:p>
+        </p:txBody>
+      </p:sp>
       <p:pic>
         <p:nvPicPr>
-          <p:cNvPr id="7" name="Picture 6" descr="check_steel.png"/>
+          <p:cNvPr id="8" name="Picture 7" descr="check_white.png"/>
           <p:cNvPicPr>
             <a:picLocks noChangeAspect="1"/>
           </p:cNvPicPr>
@@ -12087,8 +14472,8 @@
         </p:blipFill>
         <p:spPr>
           <a:xfrm>
-            <a:off x="987552" y="2542032"/>
-            <a:ext cx="237744" cy="237744"/>
+            <a:off x="1110447" y="2655783"/>
+            <a:ext cx="266273" cy="266273"/>
           </a:xfrm>
           <a:prstGeom prst="rect">
             <a:avLst/>
@@ -12097,14 +14482,14 @@
       </p:pic>
       <p:sp>
         <p:nvSpPr>
-          <p:cNvPr id="8" name="TextBox 7"/>
+          <p:cNvPr id="9" name="TextBox 8"/>
           <p:cNvSpPr txBox="1"/>
           <p:nvPr/>
         </p:nvSpPr>
         <p:spPr>
           <a:xfrm>
-            <a:off x="1353312" y="2395728"/>
-            <a:ext cx="5029200" cy="530352"/>
+            <a:off x="1627632" y="2395728"/>
+            <a:ext cx="4206240" cy="786384"/>
           </a:xfrm>
           <a:prstGeom prst="rect">
             <a:avLst/>
@@ -12129,7 +14514,7 @@
               </a:spcAft>
             </a:pPr>
             <a:r>
-              <a:rPr sz="1200" b="0">
+              <a:rPr sz="1150" b="0">
                 <a:solidFill>
                   <a:srgbClr val="1A1A1A"/>
                 </a:solidFill>
@@ -12142,18 +14527,18 @@
       </p:sp>
       <p:sp>
         <p:nvSpPr>
-          <p:cNvPr id="9" name="Rounded Rectangle 8"/>
+          <p:cNvPr id="10" name="Rounded Rectangle 9"/>
           <p:cNvSpPr/>
           <p:nvPr/>
         </p:nvSpPr>
         <p:spPr>
           <a:xfrm>
-            <a:off x="841248" y="2999232"/>
-            <a:ext cx="5715000" cy="530352"/>
+            <a:off x="6254496" y="2395728"/>
+            <a:ext cx="5138928" cy="786384"/>
           </a:xfrm>
           <a:prstGeom prst="roundRect">
             <a:avLst>
-              <a:gd name="adj" fmla="val 6000"/>
+              <a:gd name="adj" fmla="val 7000"/>
             </a:avLst>
           </a:prstGeom>
           <a:solidFill>
@@ -12188,9 +14573,55 @@
           </a:p>
         </p:txBody>
       </p:sp>
+      <p:sp>
+        <p:nvSpPr>
+          <p:cNvPr id="11" name="Rounded Rectangle 10"/>
+          <p:cNvSpPr/>
+          <p:nvPr/>
+        </p:nvSpPr>
+        <p:spPr>
+          <a:xfrm>
+            <a:off x="6400800" y="2532888"/>
+            <a:ext cx="512064" cy="512064"/>
+          </a:xfrm>
+          <a:prstGeom prst="roundRect">
+            <a:avLst>
+              <a:gd name="adj" fmla="val 26000"/>
+            </a:avLst>
+          </a:prstGeom>
+          <a:solidFill>
+            <a:srgbClr val="EE0000"/>
+          </a:solidFill>
+          <a:ln>
+            <a:noFill/>
+          </a:ln>
+          <a:effectLst/>
+        </p:spPr>
+        <p:style>
+          <a:lnRef idx="1">
+            <a:schemeClr val="accent1"/>
+          </a:lnRef>
+          <a:fillRef idx="3">
+            <a:schemeClr val="accent1"/>
+          </a:fillRef>
+          <a:effectRef idx="2">
+            <a:schemeClr val="accent1"/>
+          </a:effectRef>
+          <a:fontRef idx="minor">
+            <a:schemeClr val="lt1"/>
+          </a:fontRef>
+        </p:style>
+        <p:txBody>
+          <a:bodyPr rtlCol="0" anchor="ctr"/>
+          <a:lstStyle/>
+          <a:p>
+            <a:pPr algn="ctr"/>
+          </a:p>
+        </p:txBody>
+      </p:sp>
       <p:pic>
         <p:nvPicPr>
-          <p:cNvPr id="10" name="Picture 9" descr="check_steel.png"/>
+          <p:cNvPr id="12" name="Picture 11" descr="check_white.png"/>
           <p:cNvPicPr>
             <a:picLocks noChangeAspect="1"/>
           </p:cNvPicPr>
@@ -12204,8 +14635,8 @@
         </p:blipFill>
         <p:spPr>
           <a:xfrm>
-            <a:off x="987552" y="3145536"/>
-            <a:ext cx="237744" cy="237744"/>
+            <a:off x="6523695" y="2655783"/>
+            <a:ext cx="266273" cy="266273"/>
           </a:xfrm>
           <a:prstGeom prst="rect">
             <a:avLst/>
@@ -12214,14 +14645,14 @@
       </p:pic>
       <p:sp>
         <p:nvSpPr>
-          <p:cNvPr id="11" name="TextBox 10"/>
+          <p:cNvPr id="13" name="TextBox 12"/>
           <p:cNvSpPr txBox="1"/>
           <p:nvPr/>
         </p:nvSpPr>
         <p:spPr>
           <a:xfrm>
-            <a:off x="1353312" y="2999232"/>
-            <a:ext cx="5029200" cy="530352"/>
+            <a:off x="7040880" y="2395728"/>
+            <a:ext cx="4206240" cy="786384"/>
           </a:xfrm>
           <a:prstGeom prst="rect">
             <a:avLst/>
@@ -12246,7 +14677,7 @@
               </a:spcAft>
             </a:pPr>
             <a:r>
-              <a:rPr sz="1200" b="0">
+              <a:rPr sz="1150" b="0">
                 <a:solidFill>
                   <a:srgbClr val="1A1A1A"/>
                 </a:solidFill>
@@ -12259,18 +14690,18 @@
       </p:sp>
       <p:sp>
         <p:nvSpPr>
-          <p:cNvPr id="12" name="Rounded Rectangle 11"/>
+          <p:cNvPr id="14" name="Rounded Rectangle 13"/>
           <p:cNvSpPr/>
           <p:nvPr/>
         </p:nvSpPr>
         <p:spPr>
           <a:xfrm>
-            <a:off x="841248" y="3602736"/>
-            <a:ext cx="5715000" cy="530352"/>
+            <a:off x="841248" y="3328416"/>
+            <a:ext cx="5138928" cy="786384"/>
           </a:xfrm>
           <a:prstGeom prst="roundRect">
             <a:avLst>
-              <a:gd name="adj" fmla="val 6000"/>
+              <a:gd name="adj" fmla="val 7000"/>
             </a:avLst>
           </a:prstGeom>
           <a:solidFill>
@@ -12305,9 +14736,55 @@
           </a:p>
         </p:txBody>
       </p:sp>
+      <p:sp>
+        <p:nvSpPr>
+          <p:cNvPr id="15" name="Rounded Rectangle 14"/>
+          <p:cNvSpPr/>
+          <p:nvPr/>
+        </p:nvSpPr>
+        <p:spPr>
+          <a:xfrm>
+            <a:off x="987552" y="3465576"/>
+            <a:ext cx="512064" cy="512064"/>
+          </a:xfrm>
+          <a:prstGeom prst="roundRect">
+            <a:avLst>
+              <a:gd name="adj" fmla="val 26000"/>
+            </a:avLst>
+          </a:prstGeom>
+          <a:solidFill>
+            <a:srgbClr val="EE0000"/>
+          </a:solidFill>
+          <a:ln>
+            <a:noFill/>
+          </a:ln>
+          <a:effectLst/>
+        </p:spPr>
+        <p:style>
+          <a:lnRef idx="1">
+            <a:schemeClr val="accent1"/>
+          </a:lnRef>
+          <a:fillRef idx="3">
+            <a:schemeClr val="accent1"/>
+          </a:fillRef>
+          <a:effectRef idx="2">
+            <a:schemeClr val="accent1"/>
+          </a:effectRef>
+          <a:fontRef idx="minor">
+            <a:schemeClr val="lt1"/>
+          </a:fontRef>
+        </p:style>
+        <p:txBody>
+          <a:bodyPr rtlCol="0" anchor="ctr"/>
+          <a:lstStyle/>
+          <a:p>
+            <a:pPr algn="ctr"/>
+          </a:p>
+        </p:txBody>
+      </p:sp>
       <p:pic>
         <p:nvPicPr>
-          <p:cNvPr id="13" name="Picture 12" descr="check_steel.png"/>
+          <p:cNvPr id="16" name="Picture 15" descr="check_white.png"/>
           <p:cNvPicPr>
             <a:picLocks noChangeAspect="1"/>
           </p:cNvPicPr>
@@ -12321,8 +14798,8 @@
         </p:blipFill>
         <p:spPr>
           <a:xfrm>
-            <a:off x="987552" y="3749040"/>
-            <a:ext cx="237744" cy="237744"/>
+            <a:off x="1110447" y="3588471"/>
+            <a:ext cx="266273" cy="266273"/>
           </a:xfrm>
           <a:prstGeom prst="rect">
             <a:avLst/>
@@ -12331,14 +14808,14 @@
       </p:pic>
       <p:sp>
         <p:nvSpPr>
-          <p:cNvPr id="14" name="TextBox 13"/>
+          <p:cNvPr id="17" name="TextBox 16"/>
           <p:cNvSpPr txBox="1"/>
           <p:nvPr/>
         </p:nvSpPr>
         <p:spPr>
           <a:xfrm>
-            <a:off x="1353312" y="3602736"/>
-            <a:ext cx="5029200" cy="530352"/>
+            <a:off x="1627632" y="3328416"/>
+            <a:ext cx="4206240" cy="786384"/>
           </a:xfrm>
           <a:prstGeom prst="rect">
             <a:avLst/>
@@ -12363,7 +14840,7 @@
               </a:spcAft>
             </a:pPr>
             <a:r>
-              <a:rPr sz="1200" b="0">
+              <a:rPr sz="1150" b="0">
                 <a:solidFill>
                   <a:srgbClr val="1A1A1A"/>
                 </a:solidFill>
@@ -12376,18 +14853,18 @@
       </p:sp>
       <p:sp>
         <p:nvSpPr>
-          <p:cNvPr id="15" name="Rounded Rectangle 14"/>
+          <p:cNvPr id="18" name="Rounded Rectangle 17"/>
           <p:cNvSpPr/>
           <p:nvPr/>
         </p:nvSpPr>
         <p:spPr>
           <a:xfrm>
-            <a:off x="841248" y="4206240"/>
-            <a:ext cx="5715000" cy="530352"/>
+            <a:off x="6254496" y="3328416"/>
+            <a:ext cx="5138928" cy="786384"/>
           </a:xfrm>
           <a:prstGeom prst="roundRect">
             <a:avLst>
-              <a:gd name="adj" fmla="val 6000"/>
+              <a:gd name="adj" fmla="val 7000"/>
             </a:avLst>
           </a:prstGeom>
           <a:solidFill>
@@ -12422,9 +14899,55 @@
           </a:p>
         </p:txBody>
       </p:sp>
+      <p:sp>
+        <p:nvSpPr>
+          <p:cNvPr id="19" name="Rounded Rectangle 18"/>
+          <p:cNvSpPr/>
+          <p:nvPr/>
+        </p:nvSpPr>
+        <p:spPr>
+          <a:xfrm>
+            <a:off x="6400800" y="3465576"/>
+            <a:ext cx="512064" cy="512064"/>
+          </a:xfrm>
+          <a:prstGeom prst="roundRect">
+            <a:avLst>
+              <a:gd name="adj" fmla="val 26000"/>
+            </a:avLst>
+          </a:prstGeom>
+          <a:solidFill>
+            <a:srgbClr val="EE0000"/>
+          </a:solidFill>
+          <a:ln>
+            <a:noFill/>
+          </a:ln>
+          <a:effectLst/>
+        </p:spPr>
+        <p:style>
+          <a:lnRef idx="1">
+            <a:schemeClr val="accent1"/>
+          </a:lnRef>
+          <a:fillRef idx="3">
+            <a:schemeClr val="accent1"/>
+          </a:fillRef>
+          <a:effectRef idx="2">
+            <a:schemeClr val="accent1"/>
+          </a:effectRef>
+          <a:fontRef idx="minor">
+            <a:schemeClr val="lt1"/>
+          </a:fontRef>
+        </p:style>
+        <p:txBody>
+          <a:bodyPr rtlCol="0" anchor="ctr"/>
+          <a:lstStyle/>
+          <a:p>
+            <a:pPr algn="ctr"/>
+          </a:p>
+        </p:txBody>
+      </p:sp>
       <p:pic>
         <p:nvPicPr>
-          <p:cNvPr id="16" name="Picture 15" descr="check_steel.png"/>
+          <p:cNvPr id="20" name="Picture 19" descr="check_white.png"/>
           <p:cNvPicPr>
             <a:picLocks noChangeAspect="1"/>
           </p:cNvPicPr>
@@ -12438,8 +14961,8 @@
         </p:blipFill>
         <p:spPr>
           <a:xfrm>
-            <a:off x="987552" y="4352544"/>
-            <a:ext cx="237744" cy="237744"/>
+            <a:off x="6523695" y="3588471"/>
+            <a:ext cx="266273" cy="266273"/>
           </a:xfrm>
           <a:prstGeom prst="rect">
             <a:avLst/>
@@ -12448,14 +14971,14 @@
       </p:pic>
       <p:sp>
         <p:nvSpPr>
-          <p:cNvPr id="17" name="TextBox 16"/>
+          <p:cNvPr id="21" name="TextBox 20"/>
           <p:cNvSpPr txBox="1"/>
           <p:nvPr/>
         </p:nvSpPr>
         <p:spPr>
           <a:xfrm>
-            <a:off x="1353312" y="4206240"/>
-            <a:ext cx="5029200" cy="530352"/>
+            <a:off x="7040880" y="3328416"/>
+            <a:ext cx="4206240" cy="786384"/>
           </a:xfrm>
           <a:prstGeom prst="rect">
             <a:avLst/>
@@ -12480,7 +15003,7 @@
               </a:spcAft>
             </a:pPr>
             <a:r>
-              <a:rPr sz="1200" b="0">
+              <a:rPr sz="1150" b="0">
                 <a:solidFill>
                   <a:srgbClr val="1A1A1A"/>
                 </a:solidFill>
@@ -12493,18 +15016,18 @@
       </p:sp>
       <p:sp>
         <p:nvSpPr>
-          <p:cNvPr id="18" name="Rounded Rectangle 17"/>
+          <p:cNvPr id="22" name="Rounded Rectangle 21"/>
           <p:cNvSpPr/>
           <p:nvPr/>
         </p:nvSpPr>
         <p:spPr>
           <a:xfrm>
-            <a:off x="841248" y="4809744"/>
-            <a:ext cx="5715000" cy="530352"/>
+            <a:off x="841248" y="4261104"/>
+            <a:ext cx="5138928" cy="786384"/>
           </a:xfrm>
           <a:prstGeom prst="roundRect">
             <a:avLst>
-              <a:gd name="adj" fmla="val 6000"/>
+              <a:gd name="adj" fmla="val 7000"/>
             </a:avLst>
           </a:prstGeom>
           <a:solidFill>
@@ -12539,9 +15062,55 @@
           </a:p>
         </p:txBody>
       </p:sp>
+      <p:sp>
+        <p:nvSpPr>
+          <p:cNvPr id="23" name="Rounded Rectangle 22"/>
+          <p:cNvSpPr/>
+          <p:nvPr/>
+        </p:nvSpPr>
+        <p:spPr>
+          <a:xfrm>
+            <a:off x="987552" y="4398264"/>
+            <a:ext cx="512064" cy="512064"/>
+          </a:xfrm>
+          <a:prstGeom prst="roundRect">
+            <a:avLst>
+              <a:gd name="adj" fmla="val 26000"/>
+            </a:avLst>
+          </a:prstGeom>
+          <a:solidFill>
+            <a:srgbClr val="EE0000"/>
+          </a:solidFill>
+          <a:ln>
+            <a:noFill/>
+          </a:ln>
+          <a:effectLst/>
+        </p:spPr>
+        <p:style>
+          <a:lnRef idx="1">
+            <a:schemeClr val="accent1"/>
+          </a:lnRef>
+          <a:fillRef idx="3">
+            <a:schemeClr val="accent1"/>
+          </a:fillRef>
+          <a:effectRef idx="2">
+            <a:schemeClr val="accent1"/>
+          </a:effectRef>
+          <a:fontRef idx="minor">
+            <a:schemeClr val="lt1"/>
+          </a:fontRef>
+        </p:style>
+        <p:txBody>
+          <a:bodyPr rtlCol="0" anchor="ctr"/>
+          <a:lstStyle/>
+          <a:p>
+            <a:pPr algn="ctr"/>
+          </a:p>
+        </p:txBody>
+      </p:sp>
       <p:pic>
         <p:nvPicPr>
-          <p:cNvPr id="19" name="Picture 18" descr="check_steel.png"/>
+          <p:cNvPr id="24" name="Picture 23" descr="check_white.png"/>
           <p:cNvPicPr>
             <a:picLocks noChangeAspect="1"/>
           </p:cNvPicPr>
@@ -12555,8 +15124,8 @@
         </p:blipFill>
         <p:spPr>
           <a:xfrm>
-            <a:off x="987552" y="4956048"/>
-            <a:ext cx="237744" cy="237744"/>
+            <a:off x="1110447" y="4521159"/>
+            <a:ext cx="266273" cy="266273"/>
           </a:xfrm>
           <a:prstGeom prst="rect">
             <a:avLst/>
@@ -12565,14 +15134,14 @@
       </p:pic>
       <p:sp>
         <p:nvSpPr>
-          <p:cNvPr id="20" name="TextBox 19"/>
+          <p:cNvPr id="25" name="TextBox 24"/>
           <p:cNvSpPr txBox="1"/>
           <p:nvPr/>
         </p:nvSpPr>
         <p:spPr>
           <a:xfrm>
-            <a:off x="1353312" y="4809744"/>
-            <a:ext cx="5029200" cy="530352"/>
+            <a:off x="1627632" y="4261104"/>
+            <a:ext cx="4206240" cy="786384"/>
           </a:xfrm>
           <a:prstGeom prst="rect">
             <a:avLst/>
@@ -12597,221 +15166,13 @@
               </a:spcAft>
             </a:pPr>
             <a:r>
-              <a:rPr sz="1200" b="0">
+              <a:rPr sz="1150" b="0">
                 <a:solidFill>
                   <a:srgbClr val="1A1A1A"/>
                 </a:solidFill>
                 <a:latin typeface="Red Hat Text"/>
               </a:rPr>
               <a:t>"Trusted network" is not a security model; a token you can validate is</a:t>
-            </a:r>
-          </a:p>
-        </p:txBody>
-      </p:sp>
-      <p:sp>
-        <p:nvSpPr>
-          <p:cNvPr id="21" name="Rounded Rectangle 20"/>
-          <p:cNvSpPr/>
-          <p:nvPr/>
-        </p:nvSpPr>
-        <p:spPr>
-          <a:xfrm>
-            <a:off x="6812280" y="2395728"/>
-            <a:ext cx="4538167" cy="2944368"/>
-          </a:xfrm>
-          <a:prstGeom prst="roundRect">
-            <a:avLst>
-              <a:gd name="adj" fmla="val 4000"/>
-            </a:avLst>
-          </a:prstGeom>
-          <a:solidFill>
-            <a:srgbClr val="FFFFFF"/>
-          </a:solidFill>
-          <a:ln w="15240">
-            <a:solidFill>
-              <a:srgbClr val="DDE1E6"/>
-            </a:solidFill>
-          </a:ln>
-          <a:effectLst/>
-        </p:spPr>
-        <p:style>
-          <a:lnRef idx="1">
-            <a:schemeClr val="accent1"/>
-          </a:lnRef>
-          <a:fillRef idx="3">
-            <a:schemeClr val="accent1"/>
-          </a:fillRef>
-          <a:effectRef idx="2">
-            <a:schemeClr val="accent1"/>
-          </a:effectRef>
-          <a:fontRef idx="minor">
-            <a:schemeClr val="lt1"/>
-          </a:fontRef>
-        </p:style>
-        <p:txBody>
-          <a:bodyPr rtlCol="0" anchor="ctr"/>
-          <a:lstStyle/>
-          <a:p>
-            <a:pPr algn="ctr"/>
-          </a:p>
-        </p:txBody>
-      </p:sp>
-      <p:sp>
-        <p:nvSpPr>
-          <p:cNvPr id="22" name="Rounded Rectangle 21"/>
-          <p:cNvSpPr/>
-          <p:nvPr/>
-        </p:nvSpPr>
-        <p:spPr>
-          <a:xfrm>
-            <a:off x="7013448" y="2596896"/>
-            <a:ext cx="1298448" cy="310896"/>
-          </a:xfrm>
-          <a:prstGeom prst="roundRect">
-            <a:avLst>
-              <a:gd name="adj" fmla="val 50000"/>
-            </a:avLst>
-          </a:prstGeom>
-          <a:solidFill>
-            <a:srgbClr val="FCECEC"/>
-          </a:solidFill>
-          <a:ln>
-            <a:noFill/>
-          </a:ln>
-          <a:effectLst/>
-        </p:spPr>
-        <p:style>
-          <a:lnRef idx="1">
-            <a:schemeClr val="accent1"/>
-          </a:lnRef>
-          <a:fillRef idx="3">
-            <a:schemeClr val="accent1"/>
-          </a:fillRef>
-          <a:effectRef idx="2">
-            <a:schemeClr val="accent1"/>
-          </a:effectRef>
-          <a:fontRef idx="minor">
-            <a:schemeClr val="lt1"/>
-          </a:fontRef>
-        </p:style>
-        <p:txBody>
-          <a:bodyPr rtlCol="0" anchor="ctr"/>
-          <a:lstStyle/>
-          <a:p>
-            <a:pPr algn="ctr"/>
-          </a:p>
-        </p:txBody>
-      </p:sp>
-      <p:sp>
-        <p:nvSpPr>
-          <p:cNvPr id="23" name="TextBox 22"/>
-          <p:cNvSpPr txBox="1"/>
-          <p:nvPr/>
-        </p:nvSpPr>
-        <p:spPr>
-          <a:xfrm>
-            <a:off x="7013448" y="2596896"/>
-            <a:ext cx="1298448" cy="310896"/>
-          </a:xfrm>
-          <a:prstGeom prst="rect">
-            <a:avLst/>
-          </a:prstGeom>
-          <a:noFill/>
-        </p:spPr>
-        <p:txBody>
-          <a:bodyPr wrap="none" anchor="ctr" lIns="0" rIns="0" tIns="0" bIns="0">
-            <a:spAutoFit/>
-          </a:bodyPr>
-          <a:lstStyle/>
-          <a:p>
-            <a:pPr algn="ctr">
-              <a:lnSpc>
-                <a:spcPct val="106000"/>
-              </a:lnSpc>
-              <a:spcBef>
-                <a:spcPts val="0"/>
-              </a:spcBef>
-              <a:spcAft>
-                <a:spcPts val="0"/>
-              </a:spcAft>
-            </a:pPr>
-            <a:r>
-              <a:rPr sz="850" b="1">
-                <a:solidFill>
-                  <a:srgbClr val="B80000"/>
-                </a:solidFill>
-                <a:latin typeface="Red Hat Display"/>
-              </a:rPr>
-              <a:t>MEDIA PASS</a:t>
-            </a:r>
-          </a:p>
-        </p:txBody>
-      </p:sp>
-      <p:pic>
-        <p:nvPicPr>
-          <p:cNvPr id="24" name="Picture 23" descr="eye_slate.png"/>
-          <p:cNvPicPr>
-            <a:picLocks noChangeAspect="1"/>
-          </p:cNvPicPr>
-          <p:nvPr/>
-        </p:nvPicPr>
-        <p:blipFill>
-          <a:blip r:embed="rId4"/>
-          <a:stretch>
-            <a:fillRect/>
-          </a:stretch>
-        </p:blipFill>
-        <p:spPr>
-          <a:xfrm>
-            <a:off x="8843619" y="3108960"/>
-            <a:ext cx="475488" cy="475488"/>
-          </a:xfrm>
-          <a:prstGeom prst="rect">
-            <a:avLst/>
-          </a:prstGeom>
-        </p:spPr>
-      </p:pic>
-      <p:sp>
-        <p:nvSpPr>
-          <p:cNvPr id="25" name="TextBox 24"/>
-          <p:cNvSpPr txBox="1"/>
-          <p:nvPr/>
-        </p:nvSpPr>
-        <p:spPr>
-          <a:xfrm>
-            <a:off x="7050024" y="3721608"/>
-            <a:ext cx="4062679" cy="1481328"/>
-          </a:xfrm>
-          <a:prstGeom prst="rect">
-            <a:avLst/>
-          </a:prstGeom>
-          <a:noFill/>
-        </p:spPr>
-        <p:txBody>
-          <a:bodyPr wrap="square" anchor="t" lIns="0" rIns="0" tIns="0" bIns="0">
-            <a:spAutoFit/>
-          </a:bodyPr>
-          <a:lstStyle/>
-          <a:p>
-            <a:pPr algn="l">
-              <a:lnSpc>
-                <a:spcPct val="120000"/>
-              </a:lnSpc>
-              <a:spcBef>
-                <a:spcPts val="0"/>
-              </a:spcBef>
-              <a:spcAft>
-                <a:spcPts val="0"/>
-              </a:spcAft>
-            </a:pPr>
-            <a:r>
-              <a:rPr sz="950" b="0">
-                <a:solidFill>
-                  <a:srgbClr val="8A9099"/>
-                </a:solidFill>
-                <a:latin typeface="Red Hat Text"/>
-              </a:rPr>
-              <a:t>Concept diagram securing-apps-keycloak-07-what-you-built — Keycloak at center feeding web (login), claims (bearer+role), fraud (exchange), batch (client-creds), all green.</a:t>
             </a:r>
           </a:p>
         </p:txBody>
